--- a/Boek 2 - Kosten, opbrengsten, elasticiteit en surplus/edities/chat-2026/bronnen/H3/paragrafen/2.3.4 Gemengde opgaven/2.3.4 Gemengde opgaven – presentatie.pptx
+++ b/Boek 2 - Kosten, opbrengsten, elasticiteit en surplus/edities/chat-2026/bronnen/H3/paragrafen/2.3.4 Gemengde opgaven/2.3.4 Gemengde opgaven – presentatie.pptx
@@ -2,34 +2,34 @@
 <file path=ppt/presentation.xml><?xml version="1.0" encoding="utf-8"?>
 <p:presentation xmlns:p="http://schemas.openxmlformats.org/presentationml/2006/main">
   <p:sldMasterIdLst>
-    <p:sldMasterId xmlns:r="http://schemas.openxmlformats.org/officeDocument/2006/relationships" id="2147483648" r:id="Rfe7e8955e4b2449e"/>
+    <p:sldMasterId xmlns:r="http://schemas.openxmlformats.org/officeDocument/2006/relationships" id="2147483648" r:id="R92bf8ec3465a4f63"/>
   </p:sldMasterIdLst>
   <p:notesMasterIdLst>
-    <p:notesMasterId xmlns:r="http://schemas.openxmlformats.org/officeDocument/2006/relationships" r:id="Rdc6e80bbeb154923"/>
+    <p:notesMasterId xmlns:r="http://schemas.openxmlformats.org/officeDocument/2006/relationships" r:id="Rc2392cf5ebf1418b"/>
   </p:notesMasterIdLst>
   <p:sldIdLst>
-    <p:sldId xmlns:r="http://schemas.openxmlformats.org/officeDocument/2006/relationships" id="256" r:id="Rde28029eaa134312"/>
-    <p:sldId xmlns:r="http://schemas.openxmlformats.org/officeDocument/2006/relationships" id="257" r:id="R01ff7cdd7b17493b"/>
-    <p:sldId xmlns:r="http://schemas.openxmlformats.org/officeDocument/2006/relationships" id="258" r:id="Ra30bd61e52cc48ed"/>
-    <p:sldId xmlns:r="http://schemas.openxmlformats.org/officeDocument/2006/relationships" id="259" r:id="Rce7ca2ae7ab240a5"/>
-    <p:sldId xmlns:r="http://schemas.openxmlformats.org/officeDocument/2006/relationships" id="260" r:id="R79955f84391f44a8"/>
-    <p:sldId xmlns:r="http://schemas.openxmlformats.org/officeDocument/2006/relationships" id="261" r:id="R1f0acfba7f7a43ee"/>
-    <p:sldId xmlns:r="http://schemas.openxmlformats.org/officeDocument/2006/relationships" id="262" r:id="Rbc44077c5ff549f6"/>
-    <p:sldId xmlns:r="http://schemas.openxmlformats.org/officeDocument/2006/relationships" id="263" r:id="R2a9d4a2eca064664"/>
-    <p:sldId xmlns:r="http://schemas.openxmlformats.org/officeDocument/2006/relationships" id="264" r:id="R0df105d6b6b74f07"/>
-    <p:sldId xmlns:r="http://schemas.openxmlformats.org/officeDocument/2006/relationships" id="265" r:id="R22824bc543b34807"/>
-    <p:sldId xmlns:r="http://schemas.openxmlformats.org/officeDocument/2006/relationships" id="266" r:id="R8299627e4b834799"/>
-    <p:sldId xmlns:r="http://schemas.openxmlformats.org/officeDocument/2006/relationships" id="267" r:id="Rf7312e8d8e804573"/>
-    <p:sldId xmlns:r="http://schemas.openxmlformats.org/officeDocument/2006/relationships" id="268" r:id="Rdc665b59e1714c19"/>
-    <p:sldId xmlns:r="http://schemas.openxmlformats.org/officeDocument/2006/relationships" id="269" r:id="Rdd9f1384c63c4e24"/>
-    <p:sldId xmlns:r="http://schemas.openxmlformats.org/officeDocument/2006/relationships" id="270" r:id="Ra9da3245c1614196"/>
-    <p:sldId xmlns:r="http://schemas.openxmlformats.org/officeDocument/2006/relationships" id="271" r:id="Rda2f89fa3f4e46a6"/>
-    <p:sldId xmlns:r="http://schemas.openxmlformats.org/officeDocument/2006/relationships" id="272" r:id="R9da5665996164e10"/>
-    <p:sldId xmlns:r="http://schemas.openxmlformats.org/officeDocument/2006/relationships" id="273" r:id="R3830d88293af402b"/>
-    <p:sldId xmlns:r="http://schemas.openxmlformats.org/officeDocument/2006/relationships" id="274" r:id="R723a89a26d314753"/>
-    <p:sldId xmlns:r="http://schemas.openxmlformats.org/officeDocument/2006/relationships" id="275" r:id="R12cda79976b747b0"/>
-    <p:sldId xmlns:r="http://schemas.openxmlformats.org/officeDocument/2006/relationships" id="276" r:id="R0f74e399cc9a4eab"/>
-    <p:sldId xmlns:r="http://schemas.openxmlformats.org/officeDocument/2006/relationships" id="277" r:id="R24f619bfee0e46ea"/>
+    <p:sldId xmlns:r="http://schemas.openxmlformats.org/officeDocument/2006/relationships" id="256" r:id="R717891bb56bb43a0"/>
+    <p:sldId xmlns:r="http://schemas.openxmlformats.org/officeDocument/2006/relationships" id="257" r:id="R9618f934c39b40da"/>
+    <p:sldId xmlns:r="http://schemas.openxmlformats.org/officeDocument/2006/relationships" id="258" r:id="R8398aedf0f284ef7"/>
+    <p:sldId xmlns:r="http://schemas.openxmlformats.org/officeDocument/2006/relationships" id="259" r:id="R8fcc8382ed604c48"/>
+    <p:sldId xmlns:r="http://schemas.openxmlformats.org/officeDocument/2006/relationships" id="260" r:id="R42a3ac8904b844f1"/>
+    <p:sldId xmlns:r="http://schemas.openxmlformats.org/officeDocument/2006/relationships" id="261" r:id="R9d97d80cb5104c4f"/>
+    <p:sldId xmlns:r="http://schemas.openxmlformats.org/officeDocument/2006/relationships" id="262" r:id="R6afb032ac6f04fc9"/>
+    <p:sldId xmlns:r="http://schemas.openxmlformats.org/officeDocument/2006/relationships" id="263" r:id="Rf5be585b4a1344ff"/>
+    <p:sldId xmlns:r="http://schemas.openxmlformats.org/officeDocument/2006/relationships" id="264" r:id="R9b24a2256d784307"/>
+    <p:sldId xmlns:r="http://schemas.openxmlformats.org/officeDocument/2006/relationships" id="265" r:id="R14dad1cfecdf4ab8"/>
+    <p:sldId xmlns:r="http://schemas.openxmlformats.org/officeDocument/2006/relationships" id="266" r:id="R809c7f6701864ef3"/>
+    <p:sldId xmlns:r="http://schemas.openxmlformats.org/officeDocument/2006/relationships" id="267" r:id="R1aae93ea2a4c43ba"/>
+    <p:sldId xmlns:r="http://schemas.openxmlformats.org/officeDocument/2006/relationships" id="268" r:id="R5cd4097ab3554fe6"/>
+    <p:sldId xmlns:r="http://schemas.openxmlformats.org/officeDocument/2006/relationships" id="269" r:id="Rbcbbe07092bb4325"/>
+    <p:sldId xmlns:r="http://schemas.openxmlformats.org/officeDocument/2006/relationships" id="270" r:id="Rf43eddf1cb534320"/>
+    <p:sldId xmlns:r="http://schemas.openxmlformats.org/officeDocument/2006/relationships" id="271" r:id="R54aa1448a0ec477f"/>
+    <p:sldId xmlns:r="http://schemas.openxmlformats.org/officeDocument/2006/relationships" id="272" r:id="R60a12c0894a340fc"/>
+    <p:sldId xmlns:r="http://schemas.openxmlformats.org/officeDocument/2006/relationships" id="273" r:id="R761e96c80e774f30"/>
+    <p:sldId xmlns:r="http://schemas.openxmlformats.org/officeDocument/2006/relationships" id="274" r:id="R91eeb2211e5c4bce"/>
+    <p:sldId xmlns:r="http://schemas.openxmlformats.org/officeDocument/2006/relationships" id="275" r:id="R4a91801ba9544df9"/>
+    <p:sldId xmlns:r="http://schemas.openxmlformats.org/officeDocument/2006/relationships" id="276" r:id="Rf79c7dc5dc24421b"/>
+    <p:sldId xmlns:r="http://schemas.openxmlformats.org/officeDocument/2006/relationships" id="277" r:id="Re08c2b0c1f4b4e31"/>
   </p:sldIdLst>
   <p:sldSz cx="15240000" cy="8572500"/>
   <p:notesSz cx="6858000" cy="9144000"/>
@@ -476,7 +476,7 @@
           <a:p xmlns:a="http://schemas.openxmlformats.org/drawingml/2006/main">
             <a:r>
               <a:rPr sz="1400"/>
-              <a:t>Uitleg: Laat deze dia staan tijdens startopdracht. Start is opgave 1 (p. 101). Er is geen afzonderlijke basis- of zelfstandige sectie: werk na 1 verder aan 2 (p. 102–103) en doel 3 (p. 104–105). Het huiswerk volgens de classroomroute is alle gemengde opgaven 1, 2, 3, 4, 5, 6 en 7 maken en nakijken, met het bonuslabel bij 4 en herhaling bij 5–7 behouden. Dit is een ruimere huiswerkopdracht dan de gedifferentieerde boekroute. De volledige route hoeft niet in één les af te zijn. Start 1 haalt werkelijk onderwezen stof uit §2.3.2 p. 82–84 op: functies gelijkstellen, driehoeken, vergelijking betalingsbereidheid/MK en de grens tussen maximaal TS en eerlijkheid. Bij moeite laat je die uitleg gebruiken en hun eerste vastgelopen stap aanwijzen. Terug bij dit overzicht vóór verder oefenen laat je het startantwoord verbeteren. Meer TS alleen bewijst geen gelijk voordeel voor iedereen.</a:t>
+              <a:t>Uitleg: Laat deze dia staan tijdens startopdracht. Start is opgave 1 (p. 102). Er is geen afzonderlijke basis- of zelfstandige sectie: werk na 1 verder aan 2 (p. 103–104) en doel 3 (p. 105–106). Het huiswerk volgens de classroomroute is alle gemengde opgaven 1, 2, 3, 4, 5, 6 en 7 maken en nakijken, met het bonuslabel bij 4 en herhaling bij 5–7 behouden. Dit is een ruimere huiswerkopdracht dan de gedifferentieerde boekroute. De volledige route hoeft niet in één les af te zijn. Start 1 haalt werkelijk onderwezen stof uit §2.3.2 p. 83–85 op: functies gelijkstellen, driehoeken, vergelijking betalingsbereidheid/MK en de grens tussen maximaal TS en eerlijkheid. Bij moeite laat je die uitleg gebruiken en hun eerste vastgelopen stap aanwijzen. Terug bij dit overzicht vóór verder oefenen laat je het startantwoord verbeteren. Meer TS alleen bewijst geen gelijk voordeel voor iedereen.</a:t>
             </a:r>
           </a:p>
           <a:p xmlns:a="http://schemas.openxmlformats.org/drawingml/2006/main">
@@ -488,7 +488,7 @@
           <a:p xmlns:a="http://schemas.openxmlformats.org/drawingml/2006/main">
             <a:r>
               <a:rPr sz="1400"/>
-              <a:t>Misvatting: De paginanummers zijn de gedrukte boekvoeten. Page 101 is fysieke PDF-pagina 103. Geen nieuwe theorie aannemen op basis van een eerdere paragraaftitel.</a:t>
+              <a:t>Misvatting: De paginanummers zijn de gedrukte boekvoeten. Page 102 is fysieke PDF-pagina 104. Geen nieuwe theorie aannemen op basis van een eerdere paragraaftitel.</a:t>
             </a:r>
           </a:p>
           <a:p xmlns:a="http://schemas.openxmlformats.org/drawingml/2006/main">
@@ -512,13 +512,13 @@
           <a:p xmlns:a="http://schemas.openxmlformats.org/drawingml/2006/main">
             <a:r>
               <a:rPr sz="1400"/>
-              <a:t>Bron: Leerlingenboek Boek 2, chat-2026, gedrukte pagina 101–106. https://github.com/meijer1973/4veco-lessen/blob/d53080f38ebbdbba319e6d9b89dcba86067a72be/Boek%202%20-%20Kosten,%20opbrengsten,%20elasticiteit%20en%20surplus/edities/chat-2026/boek/Boek_2_Compleet.pdf</a:t>
+              <a:t>Bron: Leerlingenboek Boek 2, chat-2026, gedrukte pagina 102–107. https://github.com/meijer1973/4veco-lessen/blob/a8940a7a79e22857a3e306a91fe923c48c63e716/Boek%202%20-%20Kosten,%20opbrengsten,%20elasticiteit%20en%20surplus/edities/chat-2026/boek/Boek_2_Compleet.pdf</a:t>
             </a:r>
           </a:p>
           <a:p xmlns:a="http://schemas.openxmlformats.org/drawingml/2006/main">
             <a:r>
               <a:rPr sz="1400"/>
-              <a:t>Antwoordmodel: https://github.com/meijer1973/4veco-lessen/blob/d53080f38ebbdbba319e6d9b89dcba86067a72be/Boek%202%20-%20Kosten,%20opbrengsten,%20elasticiteit%20en%20surplus/edities/chat-2026/bronnen/H3/2.3%20Surplus%20en%20welvaart%20%E2%80%93%20antwoorden.md</a:t>
+              <a:t>Antwoordmodel: https://github.com/meijer1973/4veco-lessen/blob/a8940a7a79e22857a3e306a91fe923c48c63e716/Boek%202%20-%20Kosten,%20opbrengsten,%20elasticiteit%20en%20surplus/edities/chat-2026/bronnen/H3/2.3%20Surplus%20en%20welvaart%20%E2%80%93%20antwoorden.md</a:t>
             </a:r>
           </a:p>
         </p:txBody>
@@ -637,13 +637,13 @@
           <a:p xmlns:a="http://schemas.openxmlformats.org/drawingml/2006/main">
             <a:r>
               <a:rPr sz="1400"/>
-              <a:t>Bron: Leerlingenboek Boek 2, chat-2026, gedrukte pagina 104. https://github.com/meijer1973/4veco-lessen/blob/d53080f38ebbdbba319e6d9b89dcba86067a72be/Boek%202%20-%20Kosten,%20opbrengsten,%20elasticiteit%20en%20surplus/edities/chat-2026/boek/Boek_2_Compleet.pdf</a:t>
+              <a:t>Bron: Leerlingenboek Boek 2, chat-2026, gedrukte pagina 105. https://github.com/meijer1973/4veco-lessen/blob/a8940a7a79e22857a3e306a91fe923c48c63e716/Boek%202%20-%20Kosten,%20opbrengsten,%20elasticiteit%20en%20surplus/edities/chat-2026/boek/Boek_2_Compleet.pdf</a:t>
             </a:r>
           </a:p>
           <a:p xmlns:a="http://schemas.openxmlformats.org/drawingml/2006/main">
             <a:r>
               <a:rPr sz="1400"/>
-              <a:t>Antwoordmodel: https://github.com/meijer1973/4veco-lessen/blob/d53080f38ebbdbba319e6d9b89dcba86067a72be/Boek%202%20-%20Kosten,%20opbrengsten,%20elasticiteit%20en%20surplus/edities/chat-2026/bronnen/H3/2.3%20Surplus%20en%20welvaart%20%E2%80%93%20antwoorden.md</a:t>
+              <a:t>Antwoordmodel: https://github.com/meijer1973/4veco-lessen/blob/a8940a7a79e22857a3e306a91fe923c48c63e716/Boek%202%20-%20Kosten,%20opbrengsten,%20elasticiteit%20en%20surplus/edities/chat-2026/bronnen/H3/2.3%20Surplus%20en%20welvaart%20%E2%80%93%20antwoorden.md</a:t>
             </a:r>
           </a:p>
         </p:txBody>
@@ -762,13 +762,13 @@
           <a:p xmlns:a="http://schemas.openxmlformats.org/drawingml/2006/main">
             <a:r>
               <a:rPr sz="1400"/>
-              <a:t>Bron: Leerlingenboek Boek 2, chat-2026, gedrukte pagina 105. https://github.com/meijer1973/4veco-lessen/blob/d53080f38ebbdbba319e6d9b89dcba86067a72be/Boek%202%20-%20Kosten,%20opbrengsten,%20elasticiteit%20en%20surplus/edities/chat-2026/boek/Boek_2_Compleet.pdf</a:t>
+              <a:t>Bron: Leerlingenboek Boek 2, chat-2026, gedrukte pagina 106. https://github.com/meijer1973/4veco-lessen/blob/a8940a7a79e22857a3e306a91fe923c48c63e716/Boek%202%20-%20Kosten,%20opbrengsten,%20elasticiteit%20en%20surplus/edities/chat-2026/boek/Boek_2_Compleet.pdf</a:t>
             </a:r>
           </a:p>
           <a:p xmlns:a="http://schemas.openxmlformats.org/drawingml/2006/main">
             <a:r>
               <a:rPr sz="1400"/>
-              <a:t>Antwoordmodel: https://github.com/meijer1973/4veco-lessen/blob/d53080f38ebbdbba319e6d9b89dcba86067a72be/Boek%202%20-%20Kosten,%20opbrengsten,%20elasticiteit%20en%20surplus/edities/chat-2026/bronnen/H3/2.3%20Surplus%20en%20welvaart%20%E2%80%93%20antwoorden.md</a:t>
+              <a:t>Antwoordmodel: https://github.com/meijer1973/4veco-lessen/blob/a8940a7a79e22857a3e306a91fe923c48c63e716/Boek%202%20-%20Kosten,%20opbrengsten,%20elasticiteit%20en%20surplus/edities/chat-2026/bronnen/H3/2.3%20Surplus%20en%20welvaart%20%E2%80%93%20antwoorden.md</a:t>
             </a:r>
           </a:p>
         </p:txBody>
@@ -887,13 +887,13 @@
           <a:p xmlns:a="http://schemas.openxmlformats.org/drawingml/2006/main">
             <a:r>
               <a:rPr sz="1400"/>
-              <a:t>Bron: Leerlingenboek Boek 2, chat-2026, gedrukte pagina 105. https://github.com/meijer1973/4veco-lessen/blob/d53080f38ebbdbba319e6d9b89dcba86067a72be/Boek%202%20-%20Kosten,%20opbrengsten,%20elasticiteit%20en%20surplus/edities/chat-2026/boek/Boek_2_Compleet.pdf</a:t>
+              <a:t>Bron: Leerlingenboek Boek 2, chat-2026, gedrukte pagina 106. https://github.com/meijer1973/4veco-lessen/blob/a8940a7a79e22857a3e306a91fe923c48c63e716/Boek%202%20-%20Kosten,%20opbrengsten,%20elasticiteit%20en%20surplus/edities/chat-2026/boek/Boek_2_Compleet.pdf</a:t>
             </a:r>
           </a:p>
           <a:p xmlns:a="http://schemas.openxmlformats.org/drawingml/2006/main">
             <a:r>
               <a:rPr sz="1400"/>
-              <a:t>Antwoordmodel: https://github.com/meijer1973/4veco-lessen/blob/d53080f38ebbdbba319e6d9b89dcba86067a72be/Boek%202%20-%20Kosten,%20opbrengsten,%20elasticiteit%20en%20surplus/edities/chat-2026/bronnen/H3/2.3%20Surplus%20en%20welvaart%20%E2%80%93%20antwoorden.md</a:t>
+              <a:t>Antwoordmodel: https://github.com/meijer1973/4veco-lessen/blob/a8940a7a79e22857a3e306a91fe923c48c63e716/Boek%202%20-%20Kosten,%20opbrengsten,%20elasticiteit%20en%20surplus/edities/chat-2026/bronnen/H3/2.3%20Surplus%20en%20welvaart%20%E2%80%93%20antwoorden.md</a:t>
             </a:r>
           </a:p>
         </p:txBody>
@@ -1012,13 +1012,13 @@
           <a:p xmlns:a="http://schemas.openxmlformats.org/drawingml/2006/main">
             <a:r>
               <a:rPr sz="1400"/>
-              <a:t>Bron: Leerlingenboek Boek 2, chat-2026, gedrukte pagina 104–105. https://github.com/meijer1973/4veco-lessen/blob/d53080f38ebbdbba319e6d9b89dcba86067a72be/Boek%202%20-%20Kosten,%20opbrengsten,%20elasticiteit%20en%20surplus/edities/chat-2026/boek/Boek_2_Compleet.pdf</a:t>
+              <a:t>Bron: Leerlingenboek Boek 2, chat-2026, gedrukte pagina 105–106. https://github.com/meijer1973/4veco-lessen/blob/a8940a7a79e22857a3e306a91fe923c48c63e716/Boek%202%20-%20Kosten,%20opbrengsten,%20elasticiteit%20en%20surplus/edities/chat-2026/boek/Boek_2_Compleet.pdf</a:t>
             </a:r>
           </a:p>
           <a:p xmlns:a="http://schemas.openxmlformats.org/drawingml/2006/main">
             <a:r>
               <a:rPr sz="1400"/>
-              <a:t>Antwoordmodel: https://github.com/meijer1973/4veco-lessen/blob/d53080f38ebbdbba319e6d9b89dcba86067a72be/Boek%202%20-%20Kosten,%20opbrengsten,%20elasticiteit%20en%20surplus/edities/chat-2026/bronnen/H3/2.3%20Surplus%20en%20welvaart%20%E2%80%93%20antwoorden.md</a:t>
+              <a:t>Antwoordmodel: https://github.com/meijer1973/4veco-lessen/blob/a8940a7a79e22857a3e306a91fe923c48c63e716/Boek%202%20-%20Kosten,%20opbrengsten,%20elasticiteit%20en%20surplus/edities/chat-2026/bronnen/H3/2.3%20Surplus%20en%20welvaart%20%E2%80%93%20antwoorden.md</a:t>
             </a:r>
           </a:p>
         </p:txBody>
@@ -1137,13 +1137,13 @@
           <a:p xmlns:a="http://schemas.openxmlformats.org/drawingml/2006/main">
             <a:r>
               <a:rPr sz="1400"/>
-              <a:t>Bron: Leerlingenboek Boek 2, chat-2026, gedrukte pagina 104–105. https://github.com/meijer1973/4veco-lessen/blob/d53080f38ebbdbba319e6d9b89dcba86067a72be/Boek%202%20-%20Kosten,%20opbrengsten,%20elasticiteit%20en%20surplus/edities/chat-2026/boek/Boek_2_Compleet.pdf</a:t>
+              <a:t>Bron: Leerlingenboek Boek 2, chat-2026, gedrukte pagina 105–106. https://github.com/meijer1973/4veco-lessen/blob/a8940a7a79e22857a3e306a91fe923c48c63e716/Boek%202%20-%20Kosten,%20opbrengsten,%20elasticiteit%20en%20surplus/edities/chat-2026/boek/Boek_2_Compleet.pdf</a:t>
             </a:r>
           </a:p>
           <a:p xmlns:a="http://schemas.openxmlformats.org/drawingml/2006/main">
             <a:r>
               <a:rPr sz="1400"/>
-              <a:t>Antwoordmodel: https://github.com/meijer1973/4veco-lessen/blob/d53080f38ebbdbba319e6d9b89dcba86067a72be/Boek%202%20-%20Kosten,%20opbrengsten,%20elasticiteit%20en%20surplus/edities/chat-2026/bronnen/H3/2.3%20Surplus%20en%20welvaart%20%E2%80%93%20antwoorden.md</a:t>
+              <a:t>Antwoordmodel: https://github.com/meijer1973/4veco-lessen/blob/a8940a7a79e22857a3e306a91fe923c48c63e716/Boek%202%20-%20Kosten,%20opbrengsten,%20elasticiteit%20en%20surplus/edities/chat-2026/bronnen/H3/2.3%20Surplus%20en%20welvaart%20%E2%80%93%20antwoorden.md</a:t>
             </a:r>
           </a:p>
         </p:txBody>
@@ -1238,7 +1238,7 @@
           <a:p xmlns:a="http://schemas.openxmlformats.org/drawingml/2006/main">
             <a:r>
               <a:rPr sz="1400"/>
-              <a:t>Misvatting: Teken geen gebied tot Qd = 35 of Qs = 50.</a:t>
+              <a:t>Misvatting: Teken geen gebied tot Qv = 35 of Qa = 50.</a:t>
             </a:r>
           </a:p>
           <a:p xmlns:a="http://schemas.openxmlformats.org/drawingml/2006/main">
@@ -1262,13 +1262,13 @@
           <a:p xmlns:a="http://schemas.openxmlformats.org/drawingml/2006/main">
             <a:r>
               <a:rPr sz="1400"/>
-              <a:t>Bron: Leerlingenboek Boek 2, chat-2026, gedrukte pagina 104–105. https://github.com/meijer1973/4veco-lessen/blob/d53080f38ebbdbba319e6d9b89dcba86067a72be/Boek%202%20-%20Kosten,%20opbrengsten,%20elasticiteit%20en%20surplus/edities/chat-2026/boek/Boek_2_Compleet.pdf</a:t>
+              <a:t>Bron: Leerlingenboek Boek 2, chat-2026, gedrukte pagina 105–106. https://github.com/meijer1973/4veco-lessen/blob/a8940a7a79e22857a3e306a91fe923c48c63e716/Boek%202%20-%20Kosten,%20opbrengsten,%20elasticiteit%20en%20surplus/edities/chat-2026/boek/Boek_2_Compleet.pdf</a:t>
             </a:r>
           </a:p>
           <a:p xmlns:a="http://schemas.openxmlformats.org/drawingml/2006/main">
             <a:r>
               <a:rPr sz="1400"/>
-              <a:t>Antwoordmodel: https://github.com/meijer1973/4veco-lessen/blob/d53080f38ebbdbba319e6d9b89dcba86067a72be/Boek%202%20-%20Kosten,%20opbrengsten,%20elasticiteit%20en%20surplus/edities/chat-2026/bronnen/H3/2.3%20Surplus%20en%20welvaart%20%E2%80%93%20antwoorden.md</a:t>
+              <a:t>Antwoordmodel: https://github.com/meijer1973/4veco-lessen/blob/a8940a7a79e22857a3e306a91fe923c48c63e716/Boek%202%20-%20Kosten,%20opbrengsten,%20elasticiteit%20en%20surplus/edities/chat-2026/bronnen/H3/2.3%20Surplus%20en%20welvaart%20%E2%80%93%20antwoorden.md</a:t>
             </a:r>
           </a:p>
         </p:txBody>
@@ -1387,13 +1387,13 @@
           <a:p xmlns:a="http://schemas.openxmlformats.org/drawingml/2006/main">
             <a:r>
               <a:rPr sz="1400"/>
-              <a:t>Bron: Leerlingenboek Boek 2, chat-2026, gedrukte pagina 104–105. https://github.com/meijer1973/4veco-lessen/blob/d53080f38ebbdbba319e6d9b89dcba86067a72be/Boek%202%20-%20Kosten,%20opbrengsten,%20elasticiteit%20en%20surplus/edities/chat-2026/boek/Boek_2_Compleet.pdf</a:t>
+              <a:t>Bron: Leerlingenboek Boek 2, chat-2026, gedrukte pagina 105–106. https://github.com/meijer1973/4veco-lessen/blob/a8940a7a79e22857a3e306a91fe923c48c63e716/Boek%202%20-%20Kosten,%20opbrengsten,%20elasticiteit%20en%20surplus/edities/chat-2026/boek/Boek_2_Compleet.pdf</a:t>
             </a:r>
           </a:p>
           <a:p xmlns:a="http://schemas.openxmlformats.org/drawingml/2006/main">
             <a:r>
               <a:rPr sz="1400"/>
-              <a:t>Antwoordmodel: https://github.com/meijer1973/4veco-lessen/blob/d53080f38ebbdbba319e6d9b89dcba86067a72be/Boek%202%20-%20Kosten,%20opbrengsten,%20elasticiteit%20en%20surplus/edities/chat-2026/bronnen/H3/2.3%20Surplus%20en%20welvaart%20%E2%80%93%20antwoorden.md</a:t>
+              <a:t>Antwoordmodel: https://github.com/meijer1973/4veco-lessen/blob/a8940a7a79e22857a3e306a91fe923c48c63e716/Boek%202%20-%20Kosten,%20opbrengsten,%20elasticiteit%20en%20surplus/edities/chat-2026/bronnen/H3/2.3%20Surplus%20en%20welvaart%20%E2%80%93%20antwoorden.md</a:t>
             </a:r>
           </a:p>
         </p:txBody>
@@ -1512,13 +1512,13 @@
           <a:p xmlns:a="http://schemas.openxmlformats.org/drawingml/2006/main">
             <a:r>
               <a:rPr sz="1400"/>
-              <a:t>Bron: Leerlingenboek Boek 2, chat-2026, gedrukte pagina 104–105. https://github.com/meijer1973/4veco-lessen/blob/d53080f38ebbdbba319e6d9b89dcba86067a72be/Boek%202%20-%20Kosten,%20opbrengsten,%20elasticiteit%20en%20surplus/edities/chat-2026/boek/Boek_2_Compleet.pdf</a:t>
+              <a:t>Bron: Leerlingenboek Boek 2, chat-2026, gedrukte pagina 105–106. https://github.com/meijer1973/4veco-lessen/blob/a8940a7a79e22857a3e306a91fe923c48c63e716/Boek%202%20-%20Kosten,%20opbrengsten,%20elasticiteit%20en%20surplus/edities/chat-2026/boek/Boek_2_Compleet.pdf</a:t>
             </a:r>
           </a:p>
           <a:p xmlns:a="http://schemas.openxmlformats.org/drawingml/2006/main">
             <a:r>
               <a:rPr sz="1400"/>
-              <a:t>Antwoordmodel: https://github.com/meijer1973/4veco-lessen/blob/d53080f38ebbdbba319e6d9b89dcba86067a72be/Boek%202%20-%20Kosten,%20opbrengsten,%20elasticiteit%20en%20surplus/edities/chat-2026/bronnen/H3/2.3%20Surplus%20en%20welvaart%20%E2%80%93%20antwoorden.md</a:t>
+              <a:t>Antwoordmodel: https://github.com/meijer1973/4veco-lessen/blob/a8940a7a79e22857a3e306a91fe923c48c63e716/Boek%202%20-%20Kosten,%20opbrengsten,%20elasticiteit%20en%20surplus/edities/chat-2026/bronnen/H3/2.3%20Surplus%20en%20welvaart%20%E2%80%93%20antwoorden.md</a:t>
             </a:r>
           </a:p>
         </p:txBody>
@@ -1637,13 +1637,13 @@
           <a:p xmlns:a="http://schemas.openxmlformats.org/drawingml/2006/main">
             <a:r>
               <a:rPr sz="1400"/>
-              <a:t>Bron: Leerlingenboek Boek 2, chat-2026, gedrukte pagina 104–105. https://github.com/meijer1973/4veco-lessen/blob/d53080f38ebbdbba319e6d9b89dcba86067a72be/Boek%202%20-%20Kosten,%20opbrengsten,%20elasticiteit%20en%20surplus/edities/chat-2026/boek/Boek_2_Compleet.pdf</a:t>
+              <a:t>Bron: Leerlingenboek Boek 2, chat-2026, gedrukte pagina 105–106. https://github.com/meijer1973/4veco-lessen/blob/a8940a7a79e22857a3e306a91fe923c48c63e716/Boek%202%20-%20Kosten,%20opbrengsten,%20elasticiteit%20en%20surplus/edities/chat-2026/boek/Boek_2_Compleet.pdf</a:t>
             </a:r>
           </a:p>
           <a:p xmlns:a="http://schemas.openxmlformats.org/drawingml/2006/main">
             <a:r>
               <a:rPr sz="1400"/>
-              <a:t>Antwoordmodel: https://github.com/meijer1973/4veco-lessen/blob/d53080f38ebbdbba319e6d9b89dcba86067a72be/Boek%202%20-%20Kosten,%20opbrengsten,%20elasticiteit%20en%20surplus/edities/chat-2026/bronnen/H3/2.3%20Surplus%20en%20welvaart%20%E2%80%93%20antwoorden.md</a:t>
+              <a:t>Antwoordmodel: https://github.com/meijer1973/4veco-lessen/blob/a8940a7a79e22857a3e306a91fe923c48c63e716/Boek%202%20-%20Kosten,%20opbrengsten,%20elasticiteit%20en%20surplus/edities/chat-2026/bronnen/H3/2.3%20Surplus%20en%20welvaart%20%E2%80%93%20antwoorden.md</a:t>
             </a:r>
           </a:p>
         </p:txBody>
@@ -1762,13 +1762,13 @@
           <a:p xmlns:a="http://schemas.openxmlformats.org/drawingml/2006/main">
             <a:r>
               <a:rPr sz="1400"/>
-              <a:t>Bron: Leerlingenboek Boek 2, chat-2026, gedrukte pagina 104–105. https://github.com/meijer1973/4veco-lessen/blob/d53080f38ebbdbba319e6d9b89dcba86067a72be/Boek%202%20-%20Kosten,%20opbrengsten,%20elasticiteit%20en%20surplus/edities/chat-2026/boek/Boek_2_Compleet.pdf</a:t>
+              <a:t>Bron: Leerlingenboek Boek 2, chat-2026, gedrukte pagina 105–106. https://github.com/meijer1973/4veco-lessen/blob/a8940a7a79e22857a3e306a91fe923c48c63e716/Boek%202%20-%20Kosten,%20opbrengsten,%20elasticiteit%20en%20surplus/edities/chat-2026/boek/Boek_2_Compleet.pdf</a:t>
             </a:r>
           </a:p>
           <a:p xmlns:a="http://schemas.openxmlformats.org/drawingml/2006/main">
             <a:r>
               <a:rPr sz="1400"/>
-              <a:t>Antwoordmodel: https://github.com/meijer1973/4veco-lessen/blob/d53080f38ebbdbba319e6d9b89dcba86067a72be/Boek%202%20-%20Kosten,%20opbrengsten,%20elasticiteit%20en%20surplus/edities/chat-2026/bronnen/H3/2.3%20Surplus%20en%20welvaart%20%E2%80%93%20antwoorden.md</a:t>
+              <a:t>Antwoordmodel: https://github.com/meijer1973/4veco-lessen/blob/a8940a7a79e22857a3e306a91fe923c48c63e716/Boek%202%20-%20Kosten,%20opbrengsten,%20elasticiteit%20en%20surplus/edities/chat-2026/bronnen/H3/2.3%20Surplus%20en%20welvaart%20%E2%80%93%20antwoorden.md</a:t>
             </a:r>
           </a:p>
         </p:txBody>
@@ -1851,7 +1851,7 @@
           <a:p xmlns:a="http://schemas.openxmlformats.org/drawingml/2006/main">
             <a:r>
               <a:rPr sz="1400"/>
-              <a:t>Uitleg: Haal de bestaande rekenroute op. In het vrije evenwicht stel je V gelijk aan A. Onder een boekingsregel bepaal je eerst Qd, Qs en de bindende grens. Controleer welke partijen handelen. CS ligt onder V en boven P; PS boven A = MK en onder P. Reken alleen met werkelijk verhandelde eenheden. De rekenroute uit p. 91 is hoeveelheid, grenshoogten, rechthoek en driehoek, som. Voor Pareto is naast voordeel ook haalbaarheid en geen nadeel nodig.</a:t>
+              <a:t>Uitleg: Haal de bestaande rekenroute op. In het vrije evenwicht stel je V gelijk aan A. Onder een boekingsregel bepaal je eerst Qv, Qa en de bindende grens. Controleer welke partijen handelen. CS ligt onder V en boven P; PS boven A = MK en onder P. Reken alleen met werkelijk verhandelde eenheden. De rekenroute uit p. 92 is hoeveelheid, grenshoogten, rechthoek en driehoek, som. Voor Pareto is naast voordeel ook haalbaarheid en geen nadeel nodig.</a:t>
             </a:r>
           </a:p>
           <a:p xmlns:a="http://schemas.openxmlformats.org/drawingml/2006/main">
@@ -1887,13 +1887,13 @@
           <a:p xmlns:a="http://schemas.openxmlformats.org/drawingml/2006/main">
             <a:r>
               <a:rPr sz="1400"/>
-              <a:t>Bron: Leerlingenboek Boek 2, chat-2026, gedrukte pagina 82–84, 90–95. https://github.com/meijer1973/4veco-lessen/blob/d53080f38ebbdbba319e6d9b89dcba86067a72be/Boek%202%20-%20Kosten,%20opbrengsten,%20elasticiteit%20en%20surplus/edities/chat-2026/boek/Boek_2_Compleet.pdf</a:t>
+              <a:t>Bron: Leerlingenboek Boek 2, chat-2026, gedrukte pagina 83–85, 91–96. https://github.com/meijer1973/4veco-lessen/blob/a8940a7a79e22857a3e306a91fe923c48c63e716/Boek%202%20-%20Kosten,%20opbrengsten,%20elasticiteit%20en%20surplus/edities/chat-2026/boek/Boek_2_Compleet.pdf</a:t>
             </a:r>
           </a:p>
           <a:p xmlns:a="http://schemas.openxmlformats.org/drawingml/2006/main">
             <a:r>
               <a:rPr sz="1400"/>
-              <a:t>Antwoordmodel: https://github.com/meijer1973/4veco-lessen/blob/d53080f38ebbdbba319e6d9b89dcba86067a72be/Boek%202%20-%20Kosten,%20opbrengsten,%20elasticiteit%20en%20surplus/edities/chat-2026/bronnen/H3/2.3%20Surplus%20en%20welvaart%20%E2%80%93%20antwoorden.md</a:t>
+              <a:t>Antwoordmodel: https://github.com/meijer1973/4veco-lessen/blob/a8940a7a79e22857a3e306a91fe923c48c63e716/Boek%202%20-%20Kosten,%20opbrengsten,%20elasticiteit%20en%20surplus/edities/chat-2026/bronnen/H3/2.3%20Surplus%20en%20welvaart%20%E2%80%93%20antwoorden.md</a:t>
             </a:r>
           </a:p>
         </p:txBody>
@@ -2012,13 +2012,13 @@
           <a:p xmlns:a="http://schemas.openxmlformats.org/drawingml/2006/main">
             <a:r>
               <a:rPr sz="1400"/>
-              <a:t>Bron: Leerlingenboek Boek 2, chat-2026, gedrukte pagina 104–105. https://github.com/meijer1973/4veco-lessen/blob/d53080f38ebbdbba319e6d9b89dcba86067a72be/Boek%202%20-%20Kosten,%20opbrengsten,%20elasticiteit%20en%20surplus/edities/chat-2026/boek/Boek_2_Compleet.pdf</a:t>
+              <a:t>Bron: Leerlingenboek Boek 2, chat-2026, gedrukte pagina 105–106. https://github.com/meijer1973/4veco-lessen/blob/a8940a7a79e22857a3e306a91fe923c48c63e716/Boek%202%20-%20Kosten,%20opbrengsten,%20elasticiteit%20en%20surplus/edities/chat-2026/boek/Boek_2_Compleet.pdf</a:t>
             </a:r>
           </a:p>
           <a:p xmlns:a="http://schemas.openxmlformats.org/drawingml/2006/main">
             <a:r>
               <a:rPr sz="1400"/>
-              <a:t>Antwoordmodel: https://github.com/meijer1973/4veco-lessen/blob/d53080f38ebbdbba319e6d9b89dcba86067a72be/Boek%202%20-%20Kosten,%20opbrengsten,%20elasticiteit%20en%20surplus/edities/chat-2026/bronnen/H3/2.3%20Surplus%20en%20welvaart%20%E2%80%93%20antwoorden.md</a:t>
+              <a:t>Antwoordmodel: https://github.com/meijer1973/4veco-lessen/blob/a8940a7a79e22857a3e306a91fe923c48c63e716/Boek%202%20-%20Kosten,%20opbrengsten,%20elasticiteit%20en%20surplus/edities/chat-2026/bronnen/H3/2.3%20Surplus%20en%20welvaart%20%E2%80%93%20antwoorden.md</a:t>
             </a:r>
           </a:p>
         </p:txBody>
@@ -2137,13 +2137,13 @@
           <a:p xmlns:a="http://schemas.openxmlformats.org/drawingml/2006/main">
             <a:r>
               <a:rPr sz="1400"/>
-              <a:t>Bron: Leerlingenboek Boek 2, chat-2026, gedrukte pagina 104–105. https://github.com/meijer1973/4veco-lessen/blob/d53080f38ebbdbba319e6d9b89dcba86067a72be/Boek%202%20-%20Kosten,%20opbrengsten,%20elasticiteit%20en%20surplus/edities/chat-2026/boek/Boek_2_Compleet.pdf</a:t>
+              <a:t>Bron: Leerlingenboek Boek 2, chat-2026, gedrukte pagina 105–106. https://github.com/meijer1973/4veco-lessen/blob/a8940a7a79e22857a3e306a91fe923c48c63e716/Boek%202%20-%20Kosten,%20opbrengsten,%20elasticiteit%20en%20surplus/edities/chat-2026/boek/Boek_2_Compleet.pdf</a:t>
             </a:r>
           </a:p>
           <a:p xmlns:a="http://schemas.openxmlformats.org/drawingml/2006/main">
             <a:r>
               <a:rPr sz="1400"/>
-              <a:t>Antwoordmodel: https://github.com/meijer1973/4veco-lessen/blob/d53080f38ebbdbba319e6d9b89dcba86067a72be/Boek%202%20-%20Kosten,%20opbrengsten,%20elasticiteit%20en%20surplus/edities/chat-2026/bronnen/H3/2.3%20Surplus%20en%20welvaart%20%E2%80%93%20antwoorden.md</a:t>
+              <a:t>Antwoordmodel: https://github.com/meijer1973/4veco-lessen/blob/a8940a7a79e22857a3e306a91fe923c48c63e716/Boek%202%20-%20Kosten,%20opbrengsten,%20elasticiteit%20en%20surplus/edities/chat-2026/bronnen/H3/2.3%20Surplus%20en%20welvaart%20%E2%80%93%20antwoorden.md</a:t>
             </a:r>
           </a:p>
         </p:txBody>
@@ -2226,7 +2226,7 @@
           <a:p xmlns:a="http://schemas.openxmlformats.org/drawingml/2006/main">
             <a:r>
               <a:rPr sz="1400"/>
-              <a:t>Uitleg: Laat deze dia staan tijdens afsluiting / huiswerk. Start is opgave 1 (p. 101). Er is geen afzonderlijke basis- of zelfstandige sectie: werk na 1 verder aan 2 (p. 102–103) en doel 3 (p. 104–105). Het huiswerk volgens de classroomroute is alle gemengde opgaven 1, 2, 3, 4, 5, 6 en 7 maken en nakijken, met het bonuslabel bij 4 en herhaling bij 5–7 behouden. Dit is een ruimere huiswerkopdracht dan de gedifferentieerde boekroute. De volledige route hoeft niet in één les af te zijn. Start 1 haalt werkelijk onderwezen stof uit §2.3.2 p. 82–84 op: functies gelijkstellen, driehoeken, vergelijking betalingsbereidheid/MK en de grens tussen maximaal TS en eerlijkheid. Bij moeite laat je die uitleg gebruiken en hun eerste vastgelopen stap aanwijzen. Terug bij dit overzicht vóór verder oefenen laat je het startantwoord verbeteren. Meer TS alleen bewijst geen gelijk voordeel voor iedereen.</a:t>
+              <a:t>Uitleg: Laat deze dia staan tijdens afsluiting / huiswerk. Start is opgave 1 (p. 102). Er is geen afzonderlijke basis- of zelfstandige sectie: werk na 1 verder aan 2 (p. 103–104) en doel 3 (p. 105–106). Het huiswerk volgens de classroomroute is alle gemengde opgaven 1, 2, 3, 4, 5, 6 en 7 maken en nakijken, met het bonuslabel bij 4 en herhaling bij 5–7 behouden. Dit is een ruimere huiswerkopdracht dan de gedifferentieerde boekroute. De volledige route hoeft niet in één les af te zijn. Start 1 haalt werkelijk onderwezen stof uit §2.3.2 p. 83–85 op: functies gelijkstellen, driehoeken, vergelijking betalingsbereidheid/MK en de grens tussen maximaal TS en eerlijkheid. Bij moeite laat je die uitleg gebruiken en hun eerste vastgelopen stap aanwijzen. Terug bij dit overzicht vóór verder oefenen laat je het startantwoord verbeteren. Meer TS alleen bewijst geen gelijk voordeel voor iedereen.</a:t>
             </a:r>
           </a:p>
           <a:p xmlns:a="http://schemas.openxmlformats.org/drawingml/2006/main">
@@ -2238,7 +2238,7 @@
           <a:p xmlns:a="http://schemas.openxmlformats.org/drawingml/2006/main">
             <a:r>
               <a:rPr sz="1400"/>
-              <a:t>Misvatting: De paginanummers zijn de gedrukte boekvoeten. Page 101 is fysieke PDF-pagina 103. Geen nieuwe theorie aannemen op basis van een eerdere paragraaftitel.</a:t>
+              <a:t>Misvatting: De paginanummers zijn de gedrukte boekvoeten. Page 102 is fysieke PDF-pagina 104. Geen nieuwe theorie aannemen op basis van een eerdere paragraaftitel.</a:t>
             </a:r>
           </a:p>
           <a:p xmlns:a="http://schemas.openxmlformats.org/drawingml/2006/main">
@@ -2262,13 +2262,13 @@
           <a:p xmlns:a="http://schemas.openxmlformats.org/drawingml/2006/main">
             <a:r>
               <a:rPr sz="1400"/>
-              <a:t>Bron: Leerlingenboek Boek 2, chat-2026, gedrukte pagina 101–106. https://github.com/meijer1973/4veco-lessen/blob/d53080f38ebbdbba319e6d9b89dcba86067a72be/Boek%202%20-%20Kosten,%20opbrengsten,%20elasticiteit%20en%20surplus/edities/chat-2026/boek/Boek_2_Compleet.pdf</a:t>
+              <a:t>Bron: Leerlingenboek Boek 2, chat-2026, gedrukte pagina 102–107. https://github.com/meijer1973/4veco-lessen/blob/a8940a7a79e22857a3e306a91fe923c48c63e716/Boek%202%20-%20Kosten,%20opbrengsten,%20elasticiteit%20en%20surplus/edities/chat-2026/boek/Boek_2_Compleet.pdf</a:t>
             </a:r>
           </a:p>
           <a:p xmlns:a="http://schemas.openxmlformats.org/drawingml/2006/main">
             <a:r>
               <a:rPr sz="1400"/>
-              <a:t>Antwoordmodel: https://github.com/meijer1973/4veco-lessen/blob/d53080f38ebbdbba319e6d9b89dcba86067a72be/Boek%202%20-%20Kosten,%20opbrengsten,%20elasticiteit%20en%20surplus/edities/chat-2026/bronnen/H3/2.3%20Surplus%20en%20welvaart%20%E2%80%93%20antwoorden.md</a:t>
+              <a:t>Antwoordmodel: https://github.com/meijer1973/4veco-lessen/blob/a8940a7a79e22857a3e306a91fe923c48c63e716/Boek%202%20-%20Kosten,%20opbrengsten,%20elasticiteit%20en%20surplus/edities/chat-2026/bronnen/H3/2.3%20Surplus%20en%20welvaart%20%E2%80%93%20antwoorden.md</a:t>
             </a:r>
           </a:p>
         </p:txBody>
@@ -2387,13 +2387,13 @@
           <a:p xmlns:a="http://schemas.openxmlformats.org/drawingml/2006/main">
             <a:r>
               <a:rPr sz="1400"/>
-              <a:t>Bron: Zelfgemaakt uitlegvoorbeeld Kano’s. Context, gegevens en uitkomsten zijn niet uit het boek. Methoden: Leerlingenboek Boek 2, chat-2026, gedrukte pagina 82–84. https://github.com/meijer1973/4veco-lessen/blob/d53080f38ebbdbba319e6d9b89dcba86067a72be/Boek%202%20-%20Kosten,%20opbrengsten,%20elasticiteit%20en%20surplus/edities/chat-2026/boek/Boek_2_Compleet.pdf</a:t>
+              <a:t>Bron: Zelfgemaakt uitlegvoorbeeld Kano’s. Context, gegevens en uitkomsten zijn niet uit het boek. Methoden: Leerlingenboek Boek 2, chat-2026, gedrukte pagina 83–85. https://github.com/meijer1973/4veco-lessen/blob/a8940a7a79e22857a3e306a91fe923c48c63e716/Boek%202%20-%20Kosten,%20opbrengsten,%20elasticiteit%20en%20surplus/edities/chat-2026/boek/Boek_2_Compleet.pdf</a:t>
             </a:r>
           </a:p>
           <a:p xmlns:a="http://schemas.openxmlformats.org/drawingml/2006/main">
             <a:r>
               <a:rPr sz="1400"/>
-              <a:t>Antwoordmodel: https://github.com/meijer1973/4veco-lessen/blob/d53080f38ebbdbba319e6d9b89dcba86067a72be/Boek%202%20-%20Kosten,%20opbrengsten,%20elasticiteit%20en%20surplus/edities/chat-2026/bronnen/H3/2.3%20Surplus%20en%20welvaart%20%E2%80%93%20antwoorden.md (alleen boekopgaven, niet de verzonnen kanomarkt).</a:t>
+              <a:t>Antwoordmodel: https://github.com/meijer1973/4veco-lessen/blob/a8940a7a79e22857a3e306a91fe923c48c63e716/Boek%202%20-%20Kosten,%20opbrengsten,%20elasticiteit%20en%20surplus/edities/chat-2026/bronnen/H3/2.3%20Surplus%20en%20welvaart%20%E2%80%93%20antwoorden.md (alleen boekopgaven, niet de verzonnen kanomarkt).</a:t>
             </a:r>
           </a:p>
         </p:txBody>
@@ -2476,7 +2476,7 @@
           <a:p xmlns:a="http://schemas.openxmlformats.org/drawingml/2006/main">
             <a:r>
               <a:rPr sz="1400"/>
-              <a:t>Uitleg: Bij P = 20: 20 = 42 − 2Qd, dus Qd = 11. 20 = 6 + Qs, dus Qs = 14. De boekingsgrens van 8 bindt. Gegeven toewijzing: hoogste betalingsbereidheden, laagste MK. Lees op Q = 8 de randhoogten af: 42 − 16 = 26 en 6 + 8 = 14. CS heeft een rechthoek van hoogte 6 en driehoek van hoogte 16. PS heeft een rechthoek van hoogte 6 en driehoek van hoogte 8. Alle basissen zijn 8 plaatsen. Laat leerlingen de oppervlakken beschrijven met de eerdere boekgrafiek op p. 91 als steun.</a:t>
+              <a:t>Uitleg: Bij P = 20: 20 = 42 − 2Qv, dus Qv = 11. 20 = 6 + Qa, dus Qa = 14. De boekingsgrens van 8 bindt. Gegeven toewijzing: hoogste betalingsbereidheden, laagste MK. Lees op Q = 8 de randhoogten af: 42 − 16 = 26 en 6 + 8 = 14. CS heeft een rechthoek van hoogte 6 en driehoek van hoogte 16. PS heeft een rechthoek van hoogte 6 en driehoek van hoogte 8. Alle basissen zijn 8 plaatsen. Laat leerlingen de oppervlakken beschrijven met de eerdere boekgrafiek op p. 92 als steun.</a:t>
             </a:r>
           </a:p>
           <a:p xmlns:a="http://schemas.openxmlformats.org/drawingml/2006/main">
@@ -2512,13 +2512,13 @@
           <a:p xmlns:a="http://schemas.openxmlformats.org/drawingml/2006/main">
             <a:r>
               <a:rPr sz="1400"/>
-              <a:t>Bron: Zelfgemaakt uitlegvoorbeeld Kano’s. Context, gegevens en uitkomsten zijn niet uit het boek. Methoden: Leerlingenboek Boek 2, chat-2026, gedrukte pagina 90–91, 94. https://github.com/meijer1973/4veco-lessen/blob/d53080f38ebbdbba319e6d9b89dcba86067a72be/Boek%202%20-%20Kosten,%20opbrengsten,%20elasticiteit%20en%20surplus/edities/chat-2026/boek/Boek_2_Compleet.pdf</a:t>
+              <a:t>Bron: Zelfgemaakt uitlegvoorbeeld Kano’s. Context, gegevens en uitkomsten zijn niet uit het boek. Methoden: Leerlingenboek Boek 2, chat-2026, gedrukte pagina 91–92, 95. https://github.com/meijer1973/4veco-lessen/blob/a8940a7a79e22857a3e306a91fe923c48c63e716/Boek%202%20-%20Kosten,%20opbrengsten,%20elasticiteit%20en%20surplus/edities/chat-2026/boek/Boek_2_Compleet.pdf</a:t>
             </a:r>
           </a:p>
           <a:p xmlns:a="http://schemas.openxmlformats.org/drawingml/2006/main">
             <a:r>
               <a:rPr sz="1400"/>
-              <a:t>Antwoordmodel: https://github.com/meijer1973/4veco-lessen/blob/d53080f38ebbdbba319e6d9b89dcba86067a72be/Boek%202%20-%20Kosten,%20opbrengsten,%20elasticiteit%20en%20surplus/edities/chat-2026/bronnen/H3/2.3%20Surplus%20en%20welvaart%20%E2%80%93%20antwoorden.md (alleen boekopgaven, niet de verzonnen kanomarkt).</a:t>
+              <a:t>Antwoordmodel: https://github.com/meijer1973/4veco-lessen/blob/a8940a7a79e22857a3e306a91fe923c48c63e716/Boek%202%20-%20Kosten,%20opbrengsten,%20elasticiteit%20en%20surplus/edities/chat-2026/bronnen/H3/2.3%20Surplus%20en%20welvaart%20%E2%80%93%20antwoorden.md (alleen boekopgaven, niet de verzonnen kanomarkt).</a:t>
             </a:r>
           </a:p>
         </p:txBody>
@@ -2637,13 +2637,13 @@
           <a:p xmlns:a="http://schemas.openxmlformats.org/drawingml/2006/main">
             <a:r>
               <a:rPr sz="1400"/>
-              <a:t>Bron: Zelfgemaakt uitlegvoorbeeld Kano’s. Context, gegevens en uitkomsten zijn niet uit het boek. Methoden: Leerlingenboek Boek 2, chat-2026, gedrukte pagina 92–95. https://github.com/meijer1973/4veco-lessen/blob/d53080f38ebbdbba319e6d9b89dcba86067a72be/Boek%202%20-%20Kosten,%20opbrengsten,%20elasticiteit%20en%20surplus/edities/chat-2026/boek/Boek_2_Compleet.pdf</a:t>
+              <a:t>Bron: Zelfgemaakt uitlegvoorbeeld Kano’s. Context, gegevens en uitkomsten zijn niet uit het boek. Methoden: Leerlingenboek Boek 2, chat-2026, gedrukte pagina 93–96. https://github.com/meijer1973/4veco-lessen/blob/a8940a7a79e22857a3e306a91fe923c48c63e716/Boek%202%20-%20Kosten,%20opbrengsten,%20elasticiteit%20en%20surplus/edities/chat-2026/boek/Boek_2_Compleet.pdf</a:t>
             </a:r>
           </a:p>
           <a:p xmlns:a="http://schemas.openxmlformats.org/drawingml/2006/main">
             <a:r>
               <a:rPr sz="1400"/>
-              <a:t>Antwoordmodel: https://github.com/meijer1973/4veco-lessen/blob/d53080f38ebbdbba319e6d9b89dcba86067a72be/Boek%202%20-%20Kosten,%20opbrengsten,%20elasticiteit%20en%20surplus/edities/chat-2026/bronnen/H3/2.3%20Surplus%20en%20welvaart%20%E2%80%93%20antwoorden.md (alleen boekopgaven, niet de verzonnen kanomarkt).</a:t>
+              <a:t>Antwoordmodel: https://github.com/meijer1973/4veco-lessen/blob/a8940a7a79e22857a3e306a91fe923c48c63e716/Boek%202%20-%20Kosten,%20opbrengsten,%20elasticiteit%20en%20surplus/edities/chat-2026/bronnen/H3/2.3%20Surplus%20en%20welvaart%20%E2%80%93%20antwoorden.md (alleen boekopgaven, niet de verzonnen kanomarkt).</a:t>
             </a:r>
           </a:p>
         </p:txBody>
@@ -2726,7 +2726,7 @@
           <a:p xmlns:a="http://schemas.openxmlformats.org/drawingml/2006/main">
             <a:r>
               <a:rPr sz="1400"/>
-              <a:t>Uitleg: Laat deze dia staan tijdens zelfstandig werken. Start is opgave 1 (p. 101). Er is geen afzonderlijke basis- of zelfstandige sectie: werk na 1 verder aan 2 (p. 102–103) en doel 3 (p. 104–105). Het huiswerk volgens de classroomroute is alle gemengde opgaven 1, 2, 3, 4, 5, 6 en 7 maken en nakijken, met het bonuslabel bij 4 en herhaling bij 5–7 behouden. Dit is een ruimere huiswerkopdracht dan de gedifferentieerde boekroute. De volledige route hoeft niet in één les af te zijn. Start 1 haalt werkelijk onderwezen stof uit §2.3.2 p. 82–84 op: functies gelijkstellen, driehoeken, vergelijking betalingsbereidheid/MK en de grens tussen maximaal TS en eerlijkheid. Bij moeite laat je die uitleg gebruiken en hun eerste vastgelopen stap aanwijzen. Terug bij dit overzicht vóór verder oefenen laat je het startantwoord verbeteren. Meer TS alleen bewijst geen gelijk voordeel voor iedereen.</a:t>
+              <a:t>Uitleg: Laat deze dia staan tijdens zelfstandig werken. Start is opgave 1 (p. 102). Er is geen afzonderlijke basis- of zelfstandige sectie: werk na 1 verder aan 2 (p. 103–104) en doel 3 (p. 105–106). Het huiswerk volgens de classroomroute is alle gemengde opgaven 1, 2, 3, 4, 5, 6 en 7 maken en nakijken, met het bonuslabel bij 4 en herhaling bij 5–7 behouden. Dit is een ruimere huiswerkopdracht dan de gedifferentieerde boekroute. De volledige route hoeft niet in één les af te zijn. Start 1 haalt werkelijk onderwezen stof uit §2.3.2 p. 83–85 op: functies gelijkstellen, driehoeken, vergelijking betalingsbereidheid/MK en de grens tussen maximaal TS en eerlijkheid. Bij moeite laat je die uitleg gebruiken en hun eerste vastgelopen stap aanwijzen. Terug bij dit overzicht vóór verder oefenen laat je het startantwoord verbeteren. Meer TS alleen bewijst geen gelijk voordeel voor iedereen.</a:t>
             </a:r>
           </a:p>
           <a:p xmlns:a="http://schemas.openxmlformats.org/drawingml/2006/main">
@@ -2738,7 +2738,7 @@
           <a:p xmlns:a="http://schemas.openxmlformats.org/drawingml/2006/main">
             <a:r>
               <a:rPr sz="1400"/>
-              <a:t>Misvatting: De paginanummers zijn de gedrukte boekvoeten. Page 101 is fysieke PDF-pagina 103. Geen nieuwe theorie aannemen op basis van een eerdere paragraaftitel.</a:t>
+              <a:t>Misvatting: De paginanummers zijn de gedrukte boekvoeten. Page 102 is fysieke PDF-pagina 104. Geen nieuwe theorie aannemen op basis van een eerdere paragraaftitel.</a:t>
             </a:r>
           </a:p>
           <a:p xmlns:a="http://schemas.openxmlformats.org/drawingml/2006/main">
@@ -2762,13 +2762,13 @@
           <a:p xmlns:a="http://schemas.openxmlformats.org/drawingml/2006/main">
             <a:r>
               <a:rPr sz="1400"/>
-              <a:t>Bron: Leerlingenboek Boek 2, chat-2026, gedrukte pagina 101–106. https://github.com/meijer1973/4veco-lessen/blob/d53080f38ebbdbba319e6d9b89dcba86067a72be/Boek%202%20-%20Kosten,%20opbrengsten,%20elasticiteit%20en%20surplus/edities/chat-2026/boek/Boek_2_Compleet.pdf</a:t>
+              <a:t>Bron: Leerlingenboek Boek 2, chat-2026, gedrukte pagina 102–107. https://github.com/meijer1973/4veco-lessen/blob/a8940a7a79e22857a3e306a91fe923c48c63e716/Boek%202%20-%20Kosten,%20opbrengsten,%20elasticiteit%20en%20surplus/edities/chat-2026/boek/Boek_2_Compleet.pdf</a:t>
             </a:r>
           </a:p>
           <a:p xmlns:a="http://schemas.openxmlformats.org/drawingml/2006/main">
             <a:r>
               <a:rPr sz="1400"/>
-              <a:t>Antwoordmodel: https://github.com/meijer1973/4veco-lessen/blob/d53080f38ebbdbba319e6d9b89dcba86067a72be/Boek%202%20-%20Kosten,%20opbrengsten,%20elasticiteit%20en%20surplus/edities/chat-2026/bronnen/H3/2.3%20Surplus%20en%20welvaart%20%E2%80%93%20antwoorden.md</a:t>
+              <a:t>Antwoordmodel: https://github.com/meijer1973/4veco-lessen/blob/a8940a7a79e22857a3e306a91fe923c48c63e716/Boek%202%20-%20Kosten,%20opbrengsten,%20elasticiteit%20en%20surplus/edities/chat-2026/bronnen/H3/2.3%20Surplus%20en%20welvaart%20%E2%80%93%20antwoorden.md</a:t>
             </a:r>
           </a:p>
         </p:txBody>
@@ -2887,13 +2887,13 @@
           <a:p xmlns:a="http://schemas.openxmlformats.org/drawingml/2006/main">
             <a:r>
               <a:rPr sz="1400"/>
-              <a:t>Bron: Leerlingenboek Boek 2, chat-2026, gedrukte pagina 104. https://github.com/meijer1973/4veco-lessen/blob/d53080f38ebbdbba319e6d9b89dcba86067a72be/Boek%202%20-%20Kosten,%20opbrengsten,%20elasticiteit%20en%20surplus/edities/chat-2026/boek/Boek_2_Compleet.pdf</a:t>
+              <a:t>Bron: Leerlingenboek Boek 2, chat-2026, gedrukte pagina 105. https://github.com/meijer1973/4veco-lessen/blob/a8940a7a79e22857a3e306a91fe923c48c63e716/Boek%202%20-%20Kosten,%20opbrengsten,%20elasticiteit%20en%20surplus/edities/chat-2026/boek/Boek_2_Compleet.pdf</a:t>
             </a:r>
           </a:p>
           <a:p xmlns:a="http://schemas.openxmlformats.org/drawingml/2006/main">
             <a:r>
               <a:rPr sz="1400"/>
-              <a:t>Antwoordmodel: https://github.com/meijer1973/4veco-lessen/blob/d53080f38ebbdbba319e6d9b89dcba86067a72be/Boek%202%20-%20Kosten,%20opbrengsten,%20elasticiteit%20en%20surplus/edities/chat-2026/bronnen/H3/2.3%20Surplus%20en%20welvaart%20%E2%80%93%20antwoorden.md</a:t>
+              <a:t>Antwoordmodel: https://github.com/meijer1973/4veco-lessen/blob/a8940a7a79e22857a3e306a91fe923c48c63e716/Boek%202%20-%20Kosten,%20opbrengsten,%20elasticiteit%20en%20surplus/edities/chat-2026/bronnen/H3/2.3%20Surplus%20en%20welvaart%20%E2%80%93%20antwoorden.md</a:t>
             </a:r>
           </a:p>
         </p:txBody>
@@ -3012,13 +3012,13 @@
           <a:p xmlns:a="http://schemas.openxmlformats.org/drawingml/2006/main">
             <a:r>
               <a:rPr sz="1400"/>
-              <a:t>Bron: Leerlingenboek Boek 2, chat-2026, gedrukte pagina 104. https://github.com/meijer1973/4veco-lessen/blob/d53080f38ebbdbba319e6d9b89dcba86067a72be/Boek%202%20-%20Kosten,%20opbrengsten,%20elasticiteit%20en%20surplus/edities/chat-2026/boek/Boek_2_Compleet.pdf</a:t>
+              <a:t>Bron: Leerlingenboek Boek 2, chat-2026, gedrukte pagina 105. https://github.com/meijer1973/4veco-lessen/blob/a8940a7a79e22857a3e306a91fe923c48c63e716/Boek%202%20-%20Kosten,%20opbrengsten,%20elasticiteit%20en%20surplus/edities/chat-2026/boek/Boek_2_Compleet.pdf</a:t>
             </a:r>
           </a:p>
           <a:p xmlns:a="http://schemas.openxmlformats.org/drawingml/2006/main">
             <a:r>
               <a:rPr sz="1400"/>
-              <a:t>Antwoordmodel: https://github.com/meijer1973/4veco-lessen/blob/d53080f38ebbdbba319e6d9b89dcba86067a72be/Boek%202%20-%20Kosten,%20opbrengsten,%20elasticiteit%20en%20surplus/edities/chat-2026/bronnen/H3/2.3%20Surplus%20en%20welvaart%20%E2%80%93%20antwoorden.md</a:t>
+              <a:t>Antwoordmodel: https://github.com/meijer1973/4veco-lessen/blob/a8940a7a79e22857a3e306a91fe923c48c63e716/Boek%202%20-%20Kosten,%20opbrengsten,%20elasticiteit%20en%20surplus/edities/chat-2026/bronnen/H3/2.3%20Surplus%20en%20welvaart%20%E2%80%93%20antwoorden.md</a:t>
             </a:r>
           </a:p>
         </p:txBody>
@@ -3137,13 +3137,13 @@
           <a:p xmlns:a="http://schemas.openxmlformats.org/drawingml/2006/main">
             <a:r>
               <a:rPr sz="1400"/>
-              <a:t>Bron: Leerlingenboek Boek 2, chat-2026, gedrukte pagina 104. https://github.com/meijer1973/4veco-lessen/blob/d53080f38ebbdbba319e6d9b89dcba86067a72be/Boek%202%20-%20Kosten,%20opbrengsten,%20elasticiteit%20en%20surplus/edities/chat-2026/boek/Boek_2_Compleet.pdf</a:t>
+              <a:t>Bron: Leerlingenboek Boek 2, chat-2026, gedrukte pagina 105. https://github.com/meijer1973/4veco-lessen/blob/a8940a7a79e22857a3e306a91fe923c48c63e716/Boek%202%20-%20Kosten,%20opbrengsten,%20elasticiteit%20en%20surplus/edities/chat-2026/boek/Boek_2_Compleet.pdf</a:t>
             </a:r>
           </a:p>
           <a:p xmlns:a="http://schemas.openxmlformats.org/drawingml/2006/main">
             <a:r>
               <a:rPr sz="1400"/>
-              <a:t>Antwoordmodel: https://github.com/meijer1973/4veco-lessen/blob/d53080f38ebbdbba319e6d9b89dcba86067a72be/Boek%202%20-%20Kosten,%20opbrengsten,%20elasticiteit%20en%20surplus/edities/chat-2026/bronnen/H3/2.3%20Surplus%20en%20welvaart%20%E2%80%93%20antwoorden.md</a:t>
+              <a:t>Antwoordmodel: https://github.com/meijer1973/4veco-lessen/blob/a8940a7a79e22857a3e306a91fe923c48c63e716/Boek%202%20-%20Kosten,%20opbrengsten,%20elasticiteit%20en%20surplus/edities/chat-2026/bronnen/H3/2.3%20Surplus%20en%20welvaart%20%E2%80%93%20antwoorden.md</a:t>
             </a:r>
           </a:p>
         </p:txBody>
@@ -3211,7 +3211,7 @@
   </p:cSld>
   <p:clrMap bg1="lt1" tx1="dk1" bg2="lt2" tx2="dk2" accent1="accent1" accent2="accent2" accent3="accent3" accent4="accent4" accent5="accent5" accent6="accent6" hlink="hlink" folHlink="folHlink"/>
   <p:sldLayoutIdLst>
-    <p:sldLayoutId xmlns:r="http://schemas.openxmlformats.org/officeDocument/2006/relationships" id="2147483649" r:id="R498f5156c7cf4466"/>
+    <p:sldLayoutId xmlns:r="http://schemas.openxmlformats.org/officeDocument/2006/relationships" id="2147483649" r:id="R948ea65cc58d4c8e"/>
   </p:sldLayoutIdLst>
   <p:txStyles>
     <p:titleStyle>
@@ -6465,7 +6465,7 @@
           <p:cNvPr id="29" name="Deze les: §2.3.4 Gemengde opgaven">
             <a:extLst xmlns:a="http://schemas.openxmlformats.org/drawingml/2006/main">
               <a:ext uri="{FF2B5EF4-FFF2-40B4-BE49-F238E27FC236}">
-                <a16:creationId xmlns:a16="http://schemas.microsoft.com/office/drawing/2014/main" id="{F6C521C1-3957-41FB-86A2-8C8CD8A23950}"/>
+                <a16:creationId xmlns:a16="http://schemas.microsoft.com/office/drawing/2014/main" id="{5C8B1842-41DB-4330-A17A-9F1B73E86627}"/>
               </a:ext>
             </a:extLst>
           </p:cNvPr>
@@ -6522,7 +6522,7 @@
           <p:cNvPr id="2" name="">
             <a:extLst xmlns:a="http://schemas.openxmlformats.org/drawingml/2006/main">
               <a:ext uri="{FF2B5EF4-FFF2-40B4-BE49-F238E27FC236}">
-                <a16:creationId xmlns:a16="http://schemas.microsoft.com/office/drawing/2014/main" id="{F5A6D6B3-D67A-479B-975C-3259E2BC4442}"/>
+                <a16:creationId xmlns:a16="http://schemas.microsoft.com/office/drawing/2014/main" id="{B29B9C56-728A-4E60-97E3-E5EE98FBC55C}"/>
               </a:ext>
             </a:extLst>
           </p:cNvPr>
@@ -6551,7 +6551,7 @@
           <p:cNvPr id="3" name="footer">
             <a:extLst xmlns:a="http://schemas.openxmlformats.org/drawingml/2006/main">
               <a:ext uri="{FF2B5EF4-FFF2-40B4-BE49-F238E27FC236}">
-                <a16:creationId xmlns:a16="http://schemas.microsoft.com/office/drawing/2014/main" id="{70075DC0-D8C2-4EA2-B66E-CE35B4277D55}"/>
+                <a16:creationId xmlns:a16="http://schemas.microsoft.com/office/drawing/2014/main" id="{207D21EF-C6FC-4B01-BC5A-51C3CEEA81FA}"/>
               </a:ext>
             </a:extLst>
           </p:cNvPr>
@@ -6608,7 +6608,7 @@
           <p:cNvPr id="4" name="slide-number">
             <a:extLst xmlns:a="http://schemas.openxmlformats.org/drawingml/2006/main">
               <a:ext uri="{FF2B5EF4-FFF2-40B4-BE49-F238E27FC236}">
-                <a16:creationId xmlns:a16="http://schemas.microsoft.com/office/drawing/2014/main" id="{0EDE47C7-9826-4CC9-8578-D7AEF9B9116F}"/>
+                <a16:creationId xmlns:a16="http://schemas.microsoft.com/office/drawing/2014/main" id="{EE6166CD-6DF0-412F-AB51-F85CDCCCEDC8}"/>
               </a:ext>
             </a:extLst>
           </p:cNvPr>
@@ -6665,7 +6665,7 @@
           <p:cNvPr id="5" name="phase">
             <a:extLst xmlns:a="http://schemas.openxmlformats.org/drawingml/2006/main">
               <a:ext uri="{FF2B5EF4-FFF2-40B4-BE49-F238E27FC236}">
-                <a16:creationId xmlns:a16="http://schemas.microsoft.com/office/drawing/2014/main" id="{BD5588C4-D4F4-475F-8F8A-74F2FFD5CCD9}"/>
+                <a16:creationId xmlns:a16="http://schemas.microsoft.com/office/drawing/2014/main" id="{5983B6A0-54A4-47FA-B1A6-90B5522B7CD4}"/>
               </a:ext>
             </a:extLst>
           </p:cNvPr>
@@ -6722,7 +6722,7 @@
           <p:cNvPr id="6" name="Lesroute">
             <a:extLst xmlns:a="http://schemas.openxmlformats.org/drawingml/2006/main">
               <a:ext uri="{FF2B5EF4-FFF2-40B4-BE49-F238E27FC236}">
-                <a16:creationId xmlns:a16="http://schemas.microsoft.com/office/drawing/2014/main" id="{DDE2B004-9F95-4D69-A25C-143DE416E512}"/>
+                <a16:creationId xmlns:a16="http://schemas.microsoft.com/office/drawing/2014/main" id="{6D600E6D-9455-487C-84D8-21EAC5C810E3}"/>
               </a:ext>
             </a:extLst>
           </p:cNvPr>
@@ -6779,7 +6779,7 @@
           <p:cNvPr id="7" name="route-number-1">
             <a:extLst xmlns:a="http://schemas.openxmlformats.org/drawingml/2006/main">
               <a:ext uri="{FF2B5EF4-FFF2-40B4-BE49-F238E27FC236}">
-                <a16:creationId xmlns:a16="http://schemas.microsoft.com/office/drawing/2014/main" id="{AEA279A7-70C7-4D1F-B9A5-A7DA0A6522F8}"/>
+                <a16:creationId xmlns:a16="http://schemas.microsoft.com/office/drawing/2014/main" id="{047B29D2-45C1-4F01-8933-5B041A666349}"/>
               </a:ext>
             </a:extLst>
           </p:cNvPr>
@@ -6836,7 +6836,7 @@
           <p:cNvPr id="8" name="route-1">
             <a:extLst xmlns:a="http://schemas.openxmlformats.org/drawingml/2006/main">
               <a:ext uri="{FF2B5EF4-FFF2-40B4-BE49-F238E27FC236}">
-                <a16:creationId xmlns:a16="http://schemas.microsoft.com/office/drawing/2014/main" id="{2BBEF516-2C31-4F23-9C4B-CAF059DB3DF8}"/>
+                <a16:creationId xmlns:a16="http://schemas.microsoft.com/office/drawing/2014/main" id="{9346DC88-1F5B-4F1D-9B97-45394A4CE0B1}"/>
               </a:ext>
             </a:extLst>
           </p:cNvPr>
@@ -6893,7 +6893,7 @@
           <p:cNvPr id="9" name="route-number-2">
             <a:extLst xmlns:a="http://schemas.openxmlformats.org/drawingml/2006/main">
               <a:ext uri="{FF2B5EF4-FFF2-40B4-BE49-F238E27FC236}">
-                <a16:creationId xmlns:a16="http://schemas.microsoft.com/office/drawing/2014/main" id="{4499567B-C609-4EFF-A040-6D8BB3C826D4}"/>
+                <a16:creationId xmlns:a16="http://schemas.microsoft.com/office/drawing/2014/main" id="{EEC1B006-1D22-42A2-9CF2-E914C2235751}"/>
               </a:ext>
             </a:extLst>
           </p:cNvPr>
@@ -6950,7 +6950,7 @@
           <p:cNvPr id="10" name="route-2">
             <a:extLst xmlns:a="http://schemas.openxmlformats.org/drawingml/2006/main">
               <a:ext uri="{FF2B5EF4-FFF2-40B4-BE49-F238E27FC236}">
-                <a16:creationId xmlns:a16="http://schemas.microsoft.com/office/drawing/2014/main" id="{19841AF3-2A2E-42C5-BCBE-0FE3A39838ED}"/>
+                <a16:creationId xmlns:a16="http://schemas.microsoft.com/office/drawing/2014/main" id="{860ED57F-E3A2-4FE9-8E8E-30850A28126E}"/>
               </a:ext>
             </a:extLst>
           </p:cNvPr>
@@ -7007,7 +7007,7 @@
           <p:cNvPr id="11" name="route-number-3">
             <a:extLst xmlns:a="http://schemas.openxmlformats.org/drawingml/2006/main">
               <a:ext uri="{FF2B5EF4-FFF2-40B4-BE49-F238E27FC236}">
-                <a16:creationId xmlns:a16="http://schemas.microsoft.com/office/drawing/2014/main" id="{9B91C1F2-ADBB-461A-AAEC-B97DAD173855}"/>
+                <a16:creationId xmlns:a16="http://schemas.microsoft.com/office/drawing/2014/main" id="{C5372DE4-C838-416B-A0BB-A7188F021CDC}"/>
               </a:ext>
             </a:extLst>
           </p:cNvPr>
@@ -7064,7 +7064,7 @@
           <p:cNvPr id="12" name="route-3">
             <a:extLst xmlns:a="http://schemas.openxmlformats.org/drawingml/2006/main">
               <a:ext uri="{FF2B5EF4-FFF2-40B4-BE49-F238E27FC236}">
-                <a16:creationId xmlns:a16="http://schemas.microsoft.com/office/drawing/2014/main" id="{3CA1550F-B3FD-4F86-A51C-446921C96F1A}"/>
+                <a16:creationId xmlns:a16="http://schemas.microsoft.com/office/drawing/2014/main" id="{53A1B688-67A9-4855-881B-A9AC6489E71D}"/>
               </a:ext>
             </a:extLst>
           </p:cNvPr>
@@ -7121,7 +7121,7 @@
           <p:cNvPr id="13" name="route-number-4">
             <a:extLst xmlns:a="http://schemas.openxmlformats.org/drawingml/2006/main">
               <a:ext uri="{FF2B5EF4-FFF2-40B4-BE49-F238E27FC236}">
-                <a16:creationId xmlns:a16="http://schemas.microsoft.com/office/drawing/2014/main" id="{0F12DD99-C17C-4CF6-BCE7-28A7BF844E12}"/>
+                <a16:creationId xmlns:a16="http://schemas.microsoft.com/office/drawing/2014/main" id="{E2159E95-7F59-4C1F-9B54-1C4DDA3A9302}"/>
               </a:ext>
             </a:extLst>
           </p:cNvPr>
@@ -7178,7 +7178,7 @@
           <p:cNvPr id="14" name="route-4">
             <a:extLst xmlns:a="http://schemas.openxmlformats.org/drawingml/2006/main">
               <a:ext uri="{FF2B5EF4-FFF2-40B4-BE49-F238E27FC236}">
-                <a16:creationId xmlns:a16="http://schemas.microsoft.com/office/drawing/2014/main" id="{DABCC613-876A-41B1-98EF-0E0F16BD29C7}"/>
+                <a16:creationId xmlns:a16="http://schemas.microsoft.com/office/drawing/2014/main" id="{F32C66C0-16CD-4E66-9C98-8C3C15BE0297}"/>
               </a:ext>
             </a:extLst>
           </p:cNvPr>
@@ -7235,7 +7235,7 @@
           <p:cNvPr id="15" name="route-number-5">
             <a:extLst xmlns:a="http://schemas.openxmlformats.org/drawingml/2006/main">
               <a:ext uri="{FF2B5EF4-FFF2-40B4-BE49-F238E27FC236}">
-                <a16:creationId xmlns:a16="http://schemas.microsoft.com/office/drawing/2014/main" id="{9B8B2794-4EED-4058-B680-08F0B72BC187}"/>
+                <a16:creationId xmlns:a16="http://schemas.microsoft.com/office/drawing/2014/main" id="{A5A36F1A-7E60-407A-8C50-DACEB4D15820}"/>
               </a:ext>
             </a:extLst>
           </p:cNvPr>
@@ -7292,7 +7292,7 @@
           <p:cNvPr id="16" name="route-5">
             <a:extLst xmlns:a="http://schemas.openxmlformats.org/drawingml/2006/main">
               <a:ext uri="{FF2B5EF4-FFF2-40B4-BE49-F238E27FC236}">
-                <a16:creationId xmlns:a16="http://schemas.microsoft.com/office/drawing/2014/main" id="{C8004F2E-6AE4-49EE-838C-92733C9B70C8}"/>
+                <a16:creationId xmlns:a16="http://schemas.microsoft.com/office/drawing/2014/main" id="{5B774EF8-8419-47F1-A7AB-18E842A022F0}"/>
               </a:ext>
             </a:extLst>
           </p:cNvPr>
@@ -7349,7 +7349,7 @@
           <p:cNvPr id="17" name="route-number-6">
             <a:extLst xmlns:a="http://schemas.openxmlformats.org/drawingml/2006/main">
               <a:ext uri="{FF2B5EF4-FFF2-40B4-BE49-F238E27FC236}">
-                <a16:creationId xmlns:a16="http://schemas.microsoft.com/office/drawing/2014/main" id="{6252BC5D-132B-4717-AFFF-18199F35E0AB}"/>
+                <a16:creationId xmlns:a16="http://schemas.microsoft.com/office/drawing/2014/main" id="{F9D91CA1-6D76-4019-A90E-AC6CDC6ADBA3}"/>
               </a:ext>
             </a:extLst>
           </p:cNvPr>
@@ -7406,7 +7406,7 @@
           <p:cNvPr id="18" name="route-6">
             <a:extLst xmlns:a="http://schemas.openxmlformats.org/drawingml/2006/main">
               <a:ext uri="{FF2B5EF4-FFF2-40B4-BE49-F238E27FC236}">
-                <a16:creationId xmlns:a16="http://schemas.microsoft.com/office/drawing/2014/main" id="{049FC0A3-7826-4AD0-8D2C-CB287AF9340D}"/>
+                <a16:creationId xmlns:a16="http://schemas.microsoft.com/office/drawing/2014/main" id="{2F7151F7-EC4E-45B2-BD40-2E8CDEDA823A}"/>
               </a:ext>
             </a:extLst>
           </p:cNvPr>
@@ -7463,7 +7463,7 @@
           <p:cNvPr id="19" name="route-number-7">
             <a:extLst xmlns:a="http://schemas.openxmlformats.org/drawingml/2006/main">
               <a:ext uri="{FF2B5EF4-FFF2-40B4-BE49-F238E27FC236}">
-                <a16:creationId xmlns:a16="http://schemas.microsoft.com/office/drawing/2014/main" id="{FA547BED-B896-4460-B400-7EABCFE0B1E3}"/>
+                <a16:creationId xmlns:a16="http://schemas.microsoft.com/office/drawing/2014/main" id="{7666E309-4010-4B54-933C-C83AB24EA7C4}"/>
               </a:ext>
             </a:extLst>
           </p:cNvPr>
@@ -7520,7 +7520,7 @@
           <p:cNvPr id="20" name="route-7">
             <a:extLst xmlns:a="http://schemas.openxmlformats.org/drawingml/2006/main">
               <a:ext uri="{FF2B5EF4-FFF2-40B4-BE49-F238E27FC236}">
-                <a16:creationId xmlns:a16="http://schemas.microsoft.com/office/drawing/2014/main" id="{946F965E-D5EF-4686-860D-12A4D4966B8B}"/>
+                <a16:creationId xmlns:a16="http://schemas.microsoft.com/office/drawing/2014/main" id="{7C998BAE-7A5E-4CCB-A822-6274C4F045CD}"/>
               </a:ext>
             </a:extLst>
           </p:cNvPr>
@@ -7577,7 +7577,7 @@
           <p:cNvPr id="21" name="Lesdoelen">
             <a:extLst xmlns:a="http://schemas.openxmlformats.org/drawingml/2006/main">
               <a:ext uri="{FF2B5EF4-FFF2-40B4-BE49-F238E27FC236}">
-                <a16:creationId xmlns:a16="http://schemas.microsoft.com/office/drawing/2014/main" id="{A60738B5-F147-48D4-8B02-5862DAC1F2BD}"/>
+                <a16:creationId xmlns:a16="http://schemas.microsoft.com/office/drawing/2014/main" id="{1F830281-AD32-47A4-859A-5984BF4FA632}"/>
               </a:ext>
             </a:extLst>
           </p:cNvPr>
@@ -7634,7 +7634,7 @@
           <p:cNvPr id="22" name="overview-goals">
             <a:extLst xmlns:a="http://schemas.openxmlformats.org/drawingml/2006/main">
               <a:ext uri="{FF2B5EF4-FFF2-40B4-BE49-F238E27FC236}">
-                <a16:creationId xmlns:a16="http://schemas.microsoft.com/office/drawing/2014/main" id="{D517281C-0E38-436A-ABB5-97334135D6E4}"/>
+                <a16:creationId xmlns:a16="http://schemas.microsoft.com/office/drawing/2014/main" id="{677E8B28-F8D9-4B36-AC42-FADB2AC7614E}"/>
               </a:ext>
             </a:extLst>
           </p:cNvPr>
@@ -7737,7 +7737,7 @@
           <p:cNvPr id="23" name="">
             <a:extLst xmlns:a="http://schemas.openxmlformats.org/drawingml/2006/main">
               <a:ext uri="{FF2B5EF4-FFF2-40B4-BE49-F238E27FC236}">
-                <a16:creationId xmlns:a16="http://schemas.microsoft.com/office/drawing/2014/main" id="{76EFD98E-61E4-4AEC-80EF-2D309C19616F}"/>
+                <a16:creationId xmlns:a16="http://schemas.microsoft.com/office/drawing/2014/main" id="{E6BA1A8B-6539-48FF-8439-C8FEBEA47C2D}"/>
               </a:ext>
             </a:extLst>
           </p:cNvPr>
@@ -7766,7 +7766,7 @@
           <p:cNvPr id="24" name="Startopdracht">
             <a:extLst xmlns:a="http://schemas.openxmlformats.org/drawingml/2006/main">
               <a:ext uri="{FF2B5EF4-FFF2-40B4-BE49-F238E27FC236}">
-                <a16:creationId xmlns:a16="http://schemas.microsoft.com/office/drawing/2014/main" id="{4414AEED-8085-4843-8875-FC05FAEEE268}"/>
+                <a16:creationId xmlns:a16="http://schemas.microsoft.com/office/drawing/2014/main" id="{63FC363D-5731-406F-AC32-828F67D3D144}"/>
               </a:ext>
             </a:extLst>
           </p:cNvPr>
@@ -7823,7 +7823,7 @@
           <p:cNvPr id="25" name="overview-start">
             <a:extLst xmlns:a="http://schemas.openxmlformats.org/drawingml/2006/main">
               <a:ext uri="{FF2B5EF4-FFF2-40B4-BE49-F238E27FC236}">
-                <a16:creationId xmlns:a16="http://schemas.microsoft.com/office/drawing/2014/main" id="{974FC232-65CD-4BDC-A665-F2BFC9528C20}"/>
+                <a16:creationId xmlns:a16="http://schemas.microsoft.com/office/drawing/2014/main" id="{628B6998-534D-4FBC-9C55-7C890398B140}"/>
               </a:ext>
             </a:extLst>
           </p:cNvPr>
@@ -7870,7 +7870,7 @@
                 <a:ea typeface="Arial"/>
                 <a:cs typeface="Arial"/>
               </a:rPr>
-              <a:t>Pagina 101 · Opgave 1</a:t>
+              <a:t>Pagina 102 · Opgave 1</a:t>
             </a:r>
           </a:p>
           <a:p xmlns:a="http://schemas.openxmlformats.org/drawingml/2006/main">
@@ -7893,7 +7893,7 @@
                 <a:ea typeface="Arial"/>
                 <a:cs typeface="Arial"/>
               </a:rPr>
-              <a:t>Steun: theorie p. 82–84</a:t>
+              <a:t>Steun: theorie p. 83–85</a:t>
             </a:r>
           </a:p>
         </p:txBody>
@@ -7903,7 +7903,7 @@
           <p:cNvPr id="26" name="">
             <a:extLst xmlns:a="http://schemas.openxmlformats.org/drawingml/2006/main">
               <a:ext uri="{FF2B5EF4-FFF2-40B4-BE49-F238E27FC236}">
-                <a16:creationId xmlns:a16="http://schemas.microsoft.com/office/drawing/2014/main" id="{4EAED2A8-A035-43CB-9242-08D04D66433B}"/>
+                <a16:creationId xmlns:a16="http://schemas.microsoft.com/office/drawing/2014/main" id="{4D045CC5-50CA-4016-9BB6-3B2E3B13B9EE}"/>
               </a:ext>
             </a:extLst>
           </p:cNvPr>
@@ -7932,7 +7932,7 @@
           <p:cNvPr id="27" name="Huiswerk">
             <a:extLst xmlns:a="http://schemas.openxmlformats.org/drawingml/2006/main">
               <a:ext uri="{FF2B5EF4-FFF2-40B4-BE49-F238E27FC236}">
-                <a16:creationId xmlns:a16="http://schemas.microsoft.com/office/drawing/2014/main" id="{FC627ECF-A3E3-40D1-9B41-59D49C3CE034}"/>
+                <a16:creationId xmlns:a16="http://schemas.microsoft.com/office/drawing/2014/main" id="{5E5E35E6-E754-4F50-BA87-90E967764965}"/>
               </a:ext>
             </a:extLst>
           </p:cNvPr>
@@ -7989,7 +7989,7 @@
           <p:cNvPr id="28" name="overview-homework">
             <a:extLst xmlns:a="http://schemas.openxmlformats.org/drawingml/2006/main">
               <a:ext uri="{FF2B5EF4-FFF2-40B4-BE49-F238E27FC236}">
-                <a16:creationId xmlns:a16="http://schemas.microsoft.com/office/drawing/2014/main" id="{5DF2B1B8-458C-40A5-9669-4961981F63A2}"/>
+                <a16:creationId xmlns:a16="http://schemas.microsoft.com/office/drawing/2014/main" id="{4799A859-06F8-4FA0-A666-DE5B86A1FC8F}"/>
               </a:ext>
             </a:extLst>
           </p:cNvPr>
@@ -8113,7 +8113,7 @@
     </p:spTree>
     <p:extLst>
       <p:ext uri="{BB962C8B-B14F-4D97-AF65-F5344CB8AC3E}">
-        <p14:creationId xmlns:p14="http://schemas.microsoft.com/office/powerpoint/2010/main" val="1213690649"/>
+        <p14:creationId xmlns:p14="http://schemas.microsoft.com/office/powerpoint/2010/main" val="14859812"/>
       </p:ext>
     </p:extLst>
   </p:cSld>
@@ -8144,7 +8144,7 @@
           <p:cNvPr id="7" name="Opgave 3 · Hulpcijfers uit de bron">
             <a:extLst xmlns:a="http://schemas.openxmlformats.org/drawingml/2006/main">
               <a:ext uri="{FF2B5EF4-FFF2-40B4-BE49-F238E27FC236}">
-                <a16:creationId xmlns:a16="http://schemas.microsoft.com/office/drawing/2014/main" id="{ED43ED92-8535-44AC-ADD3-B905390F1831}"/>
+                <a16:creationId xmlns:a16="http://schemas.microsoft.com/office/drawing/2014/main" id="{039223B3-15D2-44B2-AD4C-EF339BDF2175}"/>
               </a:ext>
             </a:extLst>
           </p:cNvPr>
@@ -8201,7 +8201,7 @@
           <p:cNvPr id="2" name="">
             <a:extLst xmlns:a="http://schemas.openxmlformats.org/drawingml/2006/main">
               <a:ext uri="{FF2B5EF4-FFF2-40B4-BE49-F238E27FC236}">
-                <a16:creationId xmlns:a16="http://schemas.microsoft.com/office/drawing/2014/main" id="{BA2F25EF-B4EF-4B7B-B434-BF98C160B37B}"/>
+                <a16:creationId xmlns:a16="http://schemas.microsoft.com/office/drawing/2014/main" id="{37FE8384-315A-4411-A3CB-EC711CBC7CAC}"/>
               </a:ext>
             </a:extLst>
           </p:cNvPr>
@@ -8230,7 +8230,7 @@
           <p:cNvPr id="3" name="footer">
             <a:extLst xmlns:a="http://schemas.openxmlformats.org/drawingml/2006/main">
               <a:ext uri="{FF2B5EF4-FFF2-40B4-BE49-F238E27FC236}">
-                <a16:creationId xmlns:a16="http://schemas.microsoft.com/office/drawing/2014/main" id="{36424EEC-666F-4D85-90A2-18A354E2AA64}"/>
+                <a16:creationId xmlns:a16="http://schemas.microsoft.com/office/drawing/2014/main" id="{F1CF54E9-C780-47C2-95B7-E1E0DE661F24}"/>
               </a:ext>
             </a:extLst>
           </p:cNvPr>
@@ -8277,7 +8277,7 @@
                 <a:ea typeface="Arial"/>
                 <a:cs typeface="Arial"/>
               </a:rPr>
-              <a:t>§2.3.4 Gemengde opgaven · Opgave 3 · Boekpagina 104–105</a:t>
+              <a:t>§2.3.4 Gemengde opgaven · Opgave 3 · Boekpagina 105–106</a:t>
             </a:r>
           </a:p>
         </p:txBody>
@@ -8287,7 +8287,7 @@
           <p:cNvPr id="4" name="slide-number">
             <a:extLst xmlns:a="http://schemas.openxmlformats.org/drawingml/2006/main">
               <a:ext uri="{FF2B5EF4-FFF2-40B4-BE49-F238E27FC236}">
-                <a16:creationId xmlns:a16="http://schemas.microsoft.com/office/drawing/2014/main" id="{9EAE5D30-80C7-4B08-91E5-ED0F73326365}"/>
+                <a16:creationId xmlns:a16="http://schemas.microsoft.com/office/drawing/2014/main" id="{F033658E-1FCD-4BF8-9307-46841DAAC9AA}"/>
               </a:ext>
             </a:extLst>
           </p:cNvPr>
@@ -8399,7 +8399,7 @@
                           <a:ea typeface="Arial"/>
                           <a:cs typeface="Arial"/>
                         </a:rPr>
-                        <a:t>Qd</a:t>
+                        <a:t>Qv</a:t>
                       </a:r>
                     </a:p>
                   </a:txBody>
@@ -8423,7 +8423,7 @@
                           <a:ea typeface="Arial"/>
                           <a:cs typeface="Arial"/>
                         </a:rPr>
-                        <a:t>Qs</a:t>
+                        <a:t>Qa</a:t>
                       </a:r>
                     </a:p>
                   </a:txBody>
@@ -8758,10 +8758,10 @@
       </p:graphicFrame>
       <p:sp>
         <p:nvSpPr>
-          <p:cNvPr id="6" name="Omdat Qd = 35 en Qs = 50, is de boekingsgrens van 30 bindend">
-            <a:extLst xmlns:a="http://schemas.openxmlformats.org/drawingml/2006/main">
-              <a:ext uri="{FF2B5EF4-FFF2-40B4-BE49-F238E27FC236}">
-                <a16:creationId xmlns:a16="http://schemas.microsoft.com/office/drawing/2014/main" id="{4079E46A-0A7D-4DFC-AD48-30A0A7142BAE}"/>
+          <p:cNvPr id="6" name="Omdat Qv = 35 en Qa = 50, is de boekingsgrens van 30 bindend">
+            <a:extLst xmlns:a="http://schemas.openxmlformats.org/drawingml/2006/main">
+              <a:ext uri="{FF2B5EF4-FFF2-40B4-BE49-F238E27FC236}">
+                <a16:creationId xmlns:a16="http://schemas.microsoft.com/office/drawing/2014/main" id="{30C5BF18-4B58-41F7-974E-C53932CF9F27}"/>
               </a:ext>
             </a:extLst>
           </p:cNvPr>
@@ -8808,7 +8808,7 @@
                 <a:ea typeface="Arial"/>
                 <a:cs typeface="Arial"/>
               </a:rPr>
-              <a:t>Omdat Qd = 35 en Qs = 50, is de boekingsgrens van 30 bindend.</a:t>
+              <a:t>Omdat Qv = 35 en Qa = 50, is de boekingsgrens van 30 bindend.</a:t>
             </a:r>
           </a:p>
         </p:txBody>
@@ -8816,7 +8816,7 @@
     </p:spTree>
     <p:extLst>
       <p:ext uri="{BB962C8B-B14F-4D97-AF65-F5344CB8AC3E}">
-        <p14:creationId xmlns:p14="http://schemas.microsoft.com/office/powerpoint/2010/main" val="640595663"/>
+        <p14:creationId xmlns:p14="http://schemas.microsoft.com/office/powerpoint/2010/main" val="697558689"/>
       </p:ext>
     </p:extLst>
   </p:cSld>
@@ -8847,7 +8847,7 @@
           <p:cNvPr id="11" name="Opgave 3 · Vragen 1–3">
             <a:extLst xmlns:a="http://schemas.openxmlformats.org/drawingml/2006/main">
               <a:ext uri="{FF2B5EF4-FFF2-40B4-BE49-F238E27FC236}">
-                <a16:creationId xmlns:a16="http://schemas.microsoft.com/office/drawing/2014/main" id="{04557453-E0A3-4BFE-BB5F-36859CBA2BCB}"/>
+                <a16:creationId xmlns:a16="http://schemas.microsoft.com/office/drawing/2014/main" id="{42698A12-DF33-484F-B0BB-1231EE717CEB}"/>
               </a:ext>
             </a:extLst>
           </p:cNvPr>
@@ -8904,7 +8904,7 @@
           <p:cNvPr id="2" name="">
             <a:extLst xmlns:a="http://schemas.openxmlformats.org/drawingml/2006/main">
               <a:ext uri="{FF2B5EF4-FFF2-40B4-BE49-F238E27FC236}">
-                <a16:creationId xmlns:a16="http://schemas.microsoft.com/office/drawing/2014/main" id="{FAA6277D-5BCD-4B32-B87C-78302E91B7B5}"/>
+                <a16:creationId xmlns:a16="http://schemas.microsoft.com/office/drawing/2014/main" id="{BFCB9A17-896E-4BAA-8589-6B777E426CCE}"/>
               </a:ext>
             </a:extLst>
           </p:cNvPr>
@@ -8933,7 +8933,7 @@
           <p:cNvPr id="3" name="footer">
             <a:extLst xmlns:a="http://schemas.openxmlformats.org/drawingml/2006/main">
               <a:ext uri="{FF2B5EF4-FFF2-40B4-BE49-F238E27FC236}">
-                <a16:creationId xmlns:a16="http://schemas.microsoft.com/office/drawing/2014/main" id="{8DE4B026-C9C9-4948-B0F8-A651A1CBEC99}"/>
+                <a16:creationId xmlns:a16="http://schemas.microsoft.com/office/drawing/2014/main" id="{4357703B-ADC1-441A-8C35-F491C528E20F}"/>
               </a:ext>
             </a:extLst>
           </p:cNvPr>
@@ -8980,7 +8980,7 @@
                 <a:ea typeface="Arial"/>
                 <a:cs typeface="Arial"/>
               </a:rPr>
-              <a:t>§2.3.4 Gemengde opgaven · Opgave 3 · Boekpagina 104–105</a:t>
+              <a:t>§2.3.4 Gemengde opgaven · Opgave 3 · Boekpagina 105–106</a:t>
             </a:r>
           </a:p>
         </p:txBody>
@@ -8990,7 +8990,7 @@
           <p:cNvPr id="4" name="slide-number">
             <a:extLst xmlns:a="http://schemas.openxmlformats.org/drawingml/2006/main">
               <a:ext uri="{FF2B5EF4-FFF2-40B4-BE49-F238E27FC236}">
-                <a16:creationId xmlns:a16="http://schemas.microsoft.com/office/drawing/2014/main" id="{1106F64C-22C4-428D-B172-DD8C919EAF49}"/>
+                <a16:creationId xmlns:a16="http://schemas.microsoft.com/office/drawing/2014/main" id="{FA7B1306-5DBF-452D-A900-1FB7EBE3FF07}"/>
               </a:ext>
             </a:extLst>
           </p:cNvPr>
@@ -9047,7 +9047,7 @@
           <p:cNvPr id="5" name="1)">
             <a:extLst xmlns:a="http://schemas.openxmlformats.org/drawingml/2006/main">
               <a:ext uri="{FF2B5EF4-FFF2-40B4-BE49-F238E27FC236}">
-                <a16:creationId xmlns:a16="http://schemas.microsoft.com/office/drawing/2014/main" id="{80E5A284-790B-49C5-8ADD-ADD8EB487239}"/>
+                <a16:creationId xmlns:a16="http://schemas.microsoft.com/office/drawing/2014/main" id="{A9410EE9-D707-4E68-B22D-29A2DFE0EB22}"/>
               </a:ext>
             </a:extLst>
           </p:cNvPr>
@@ -9104,7 +9104,7 @@
           <p:cNvPr id="6" name="Selecteer de gegevens die nodig zijn om het vrije evenwicht ">
             <a:extLst xmlns:a="http://schemas.openxmlformats.org/drawingml/2006/main">
               <a:ext uri="{FF2B5EF4-FFF2-40B4-BE49-F238E27FC236}">
-                <a16:creationId xmlns:a16="http://schemas.microsoft.com/office/drawing/2014/main" id="{D2C8EB04-7229-4C19-A19A-37DE3FE4A3AF}"/>
+                <a16:creationId xmlns:a16="http://schemas.microsoft.com/office/drawing/2014/main" id="{64F442F3-5B44-410F-8A12-6271FCB6F770}"/>
               </a:ext>
             </a:extLst>
           </p:cNvPr>
@@ -9161,7 +9161,7 @@
           <p:cNvPr id="7" name="2)">
             <a:extLst xmlns:a="http://schemas.openxmlformats.org/drawingml/2006/main">
               <a:ext uri="{FF2B5EF4-FFF2-40B4-BE49-F238E27FC236}">
-                <a16:creationId xmlns:a16="http://schemas.microsoft.com/office/drawing/2014/main" id="{BB2B8047-4A04-4A84-812E-6FC586DC715A}"/>
+                <a16:creationId xmlns:a16="http://schemas.microsoft.com/office/drawing/2014/main" id="{B217BE8E-CCE2-4F2E-9504-BAB7EA327B2F}"/>
               </a:ext>
             </a:extLst>
           </p:cNvPr>
@@ -9218,7 +9218,7 @@
           <p:cNvPr id="8" name="Bereken bij het vrije evenwicht CS, PS en TS.">
             <a:extLst xmlns:a="http://schemas.openxmlformats.org/drawingml/2006/main">
               <a:ext uri="{FF2B5EF4-FFF2-40B4-BE49-F238E27FC236}">
-                <a16:creationId xmlns:a16="http://schemas.microsoft.com/office/drawing/2014/main" id="{D7A19FD5-D54D-4241-B377-CF5921368DB5}"/>
+                <a16:creationId xmlns:a16="http://schemas.microsoft.com/office/drawing/2014/main" id="{64F36B47-FA96-417A-8859-55024B5CCC61}"/>
               </a:ext>
             </a:extLst>
           </p:cNvPr>
@@ -9275,7 +9275,7 @@
           <p:cNvPr id="9" name="3)">
             <a:extLst xmlns:a="http://schemas.openxmlformats.org/drawingml/2006/main">
               <a:ext uri="{FF2B5EF4-FFF2-40B4-BE49-F238E27FC236}">
-                <a16:creationId xmlns:a16="http://schemas.microsoft.com/office/drawing/2014/main" id="{76BD7F9E-F5B9-40A5-AEBB-55145DC39DBB}"/>
+                <a16:creationId xmlns:a16="http://schemas.microsoft.com/office/drawing/2014/main" id="{E60F1F38-3E95-44D4-A9F9-DB5E6F63F0E4}"/>
               </a:ext>
             </a:extLst>
           </p:cNvPr>
@@ -9332,7 +9332,7 @@
           <p:cNvPr id="10" name="Bereken bij 30 transacties en P = € 45 met de gegeven alloca">
             <a:extLst xmlns:a="http://schemas.openxmlformats.org/drawingml/2006/main">
               <a:ext uri="{FF2B5EF4-FFF2-40B4-BE49-F238E27FC236}">
-                <a16:creationId xmlns:a16="http://schemas.microsoft.com/office/drawing/2014/main" id="{5B7F9F3C-56A8-43B9-AAD5-CA4BD016E68C}"/>
+                <a16:creationId xmlns:a16="http://schemas.microsoft.com/office/drawing/2014/main" id="{9D3196D6-B056-493E-A8A9-3430AF57D920}"/>
               </a:ext>
             </a:extLst>
           </p:cNvPr>
@@ -9387,7 +9387,7 @@
     </p:spTree>
     <p:extLst>
       <p:ext uri="{BB962C8B-B14F-4D97-AF65-F5344CB8AC3E}">
-        <p14:creationId xmlns:p14="http://schemas.microsoft.com/office/powerpoint/2010/main" val="487332287"/>
+        <p14:creationId xmlns:p14="http://schemas.microsoft.com/office/powerpoint/2010/main" val="1055581868"/>
       </p:ext>
     </p:extLst>
   </p:cSld>
@@ -9418,7 +9418,7 @@
           <p:cNvPr id="11" name="Opgave 3 · Vragen 4–6">
             <a:extLst xmlns:a="http://schemas.openxmlformats.org/drawingml/2006/main">
               <a:ext uri="{FF2B5EF4-FFF2-40B4-BE49-F238E27FC236}">
-                <a16:creationId xmlns:a16="http://schemas.microsoft.com/office/drawing/2014/main" id="{DDB67FB8-3018-4014-90D7-81F0407BDBA6}"/>
+                <a16:creationId xmlns:a16="http://schemas.microsoft.com/office/drawing/2014/main" id="{231F50BC-1D0A-4603-AC62-297E0244347B}"/>
               </a:ext>
             </a:extLst>
           </p:cNvPr>
@@ -9475,7 +9475,7 @@
           <p:cNvPr id="2" name="">
             <a:extLst xmlns:a="http://schemas.openxmlformats.org/drawingml/2006/main">
               <a:ext uri="{FF2B5EF4-FFF2-40B4-BE49-F238E27FC236}">
-                <a16:creationId xmlns:a16="http://schemas.microsoft.com/office/drawing/2014/main" id="{2FFEC500-ED94-4DAD-844D-4F0B2A67ACAA}"/>
+                <a16:creationId xmlns:a16="http://schemas.microsoft.com/office/drawing/2014/main" id="{A71C95F8-90C0-4DB3-A89F-8FE15CA193FF}"/>
               </a:ext>
             </a:extLst>
           </p:cNvPr>
@@ -9504,7 +9504,7 @@
           <p:cNvPr id="3" name="footer">
             <a:extLst xmlns:a="http://schemas.openxmlformats.org/drawingml/2006/main">
               <a:ext uri="{FF2B5EF4-FFF2-40B4-BE49-F238E27FC236}">
-                <a16:creationId xmlns:a16="http://schemas.microsoft.com/office/drawing/2014/main" id="{EB9DC080-DE8C-4BE9-8F2C-D08021AE849E}"/>
+                <a16:creationId xmlns:a16="http://schemas.microsoft.com/office/drawing/2014/main" id="{CFE2063C-EDF9-4425-8861-3C9D7F8B72B1}"/>
               </a:ext>
             </a:extLst>
           </p:cNvPr>
@@ -9551,7 +9551,7 @@
                 <a:ea typeface="Arial"/>
                 <a:cs typeface="Arial"/>
               </a:rPr>
-              <a:t>§2.3.4 Gemengde opgaven · Opgave 3 · Boekpagina 104–105</a:t>
+              <a:t>§2.3.4 Gemengde opgaven · Opgave 3 · Boekpagina 105–106</a:t>
             </a:r>
           </a:p>
         </p:txBody>
@@ -9561,7 +9561,7 @@
           <p:cNvPr id="4" name="slide-number">
             <a:extLst xmlns:a="http://schemas.openxmlformats.org/drawingml/2006/main">
               <a:ext uri="{FF2B5EF4-FFF2-40B4-BE49-F238E27FC236}">
-                <a16:creationId xmlns:a16="http://schemas.microsoft.com/office/drawing/2014/main" id="{37F85963-54AC-4453-A809-5ACDD267B433}"/>
+                <a16:creationId xmlns:a16="http://schemas.microsoft.com/office/drawing/2014/main" id="{DACF9F05-18CA-425C-B2E4-D958B304F433}"/>
               </a:ext>
             </a:extLst>
           </p:cNvPr>
@@ -9618,7 +9618,7 @@
           <p:cNvPr id="5" name="4)">
             <a:extLst xmlns:a="http://schemas.openxmlformats.org/drawingml/2006/main">
               <a:ext uri="{FF2B5EF4-FFF2-40B4-BE49-F238E27FC236}">
-                <a16:creationId xmlns:a16="http://schemas.microsoft.com/office/drawing/2014/main" id="{86024EC1-E2BD-4653-B791-C697FC8128B1}"/>
+                <a16:creationId xmlns:a16="http://schemas.microsoft.com/office/drawing/2014/main" id="{8943F675-0C1B-41A1-9BB6-F24BADE60AF1}"/>
               </a:ext>
             </a:extLst>
           </p:cNvPr>
@@ -9675,7 +9675,7 @@
           <p:cNvPr id="6" name="Bereken het welvaartsverlies en arceer dit in de basisgrafie">
             <a:extLst xmlns:a="http://schemas.openxmlformats.org/drawingml/2006/main">
               <a:ext uri="{FF2B5EF4-FFF2-40B4-BE49-F238E27FC236}">
-                <a16:creationId xmlns:a16="http://schemas.microsoft.com/office/drawing/2014/main" id="{1767E763-BEED-474C-8D0A-DB2CFC8AABAC}"/>
+                <a16:creationId xmlns:a16="http://schemas.microsoft.com/office/drawing/2014/main" id="{CE129BAC-E781-4907-A789-4BC05FEE6DAE}"/>
               </a:ext>
             </a:extLst>
           </p:cNvPr>
@@ -9732,7 +9732,7 @@
           <p:cNvPr id="7" name="5)">
             <a:extLst xmlns:a="http://schemas.openxmlformats.org/drawingml/2006/main">
               <a:ext uri="{FF2B5EF4-FFF2-40B4-BE49-F238E27FC236}">
-                <a16:creationId xmlns:a16="http://schemas.microsoft.com/office/drawing/2014/main" id="{1C163330-C0D5-4795-A529-9DA04AC367BA}"/>
+                <a16:creationId xmlns:a16="http://schemas.microsoft.com/office/drawing/2014/main" id="{DA3D0339-0796-4566-B9FF-66CF36908CD3}"/>
               </a:ext>
             </a:extLst>
           </p:cNvPr>
@@ -9789,7 +9789,7 @@
           <p:cNvPr id="8" name="Een verhuurder zegt: ‘PS is bij de beperking hoger, dus de u">
             <a:extLst xmlns:a="http://schemas.openxmlformats.org/drawingml/2006/main">
               <a:ext uri="{FF2B5EF4-FFF2-40B4-BE49-F238E27FC236}">
-                <a16:creationId xmlns:a16="http://schemas.microsoft.com/office/drawing/2014/main" id="{F489534E-AF59-4B48-A8E5-C96034B5670C}"/>
+                <a16:creationId xmlns:a16="http://schemas.microsoft.com/office/drawing/2014/main" id="{37AF730D-7F26-4D32-B60C-D82FF9B02FEA}"/>
               </a:ext>
             </a:extLst>
           </p:cNvPr>
@@ -9846,7 +9846,7 @@
           <p:cNvPr id="9" name="6)">
             <a:extLst xmlns:a="http://schemas.openxmlformats.org/drawingml/2006/main">
               <a:ext uri="{FF2B5EF4-FFF2-40B4-BE49-F238E27FC236}">
-                <a16:creationId xmlns:a16="http://schemas.microsoft.com/office/drawing/2014/main" id="{EDF99D88-51F8-4058-8011-C8E0C94596A8}"/>
+                <a16:creationId xmlns:a16="http://schemas.microsoft.com/office/drawing/2014/main" id="{4B4A8A95-226B-4788-A2B4-D5E17A81567B}"/>
               </a:ext>
             </a:extLst>
           </p:cNvPr>
@@ -9903,7 +9903,7 @@
           <p:cNvPr id="10" name="Leg uit waarom de efficiëntievergelijking niet bepaalt welke">
             <a:extLst xmlns:a="http://schemas.openxmlformats.org/drawingml/2006/main">
               <a:ext uri="{FF2B5EF4-FFF2-40B4-BE49-F238E27FC236}">
-                <a16:creationId xmlns:a16="http://schemas.microsoft.com/office/drawing/2014/main" id="{6D2E170C-2FD2-4513-B79B-E4AEB277F45F}"/>
+                <a16:creationId xmlns:a16="http://schemas.microsoft.com/office/drawing/2014/main" id="{ED07D6C5-98A9-4812-A31E-0B99A87DD5B4}"/>
               </a:ext>
             </a:extLst>
           </p:cNvPr>
@@ -9958,7 +9958,7 @@
     </p:spTree>
     <p:extLst>
       <p:ext uri="{BB962C8B-B14F-4D97-AF65-F5344CB8AC3E}">
-        <p14:creationId xmlns:p14="http://schemas.microsoft.com/office/powerpoint/2010/main" val="716048418"/>
+        <p14:creationId xmlns:p14="http://schemas.microsoft.com/office/powerpoint/2010/main" val="1968606915"/>
       </p:ext>
     </p:extLst>
   </p:cSld>
@@ -9989,7 +9989,7 @@
           <p:cNvPr id="12" name="Opgave 3.1 · Vrij evenwicht">
             <a:extLst xmlns:a="http://schemas.openxmlformats.org/drawingml/2006/main">
               <a:ext uri="{FF2B5EF4-FFF2-40B4-BE49-F238E27FC236}">
-                <a16:creationId xmlns:a16="http://schemas.microsoft.com/office/drawing/2014/main" id="{92C6CA3D-6616-4ECF-865F-A71873FA5B42}"/>
+                <a16:creationId xmlns:a16="http://schemas.microsoft.com/office/drawing/2014/main" id="{67DD3A2A-B897-48F7-A33B-4F70119ADA4E}"/>
               </a:ext>
             </a:extLst>
           </p:cNvPr>
@@ -10046,7 +10046,7 @@
           <p:cNvPr id="2" name="">
             <a:extLst xmlns:a="http://schemas.openxmlformats.org/drawingml/2006/main">
               <a:ext uri="{FF2B5EF4-FFF2-40B4-BE49-F238E27FC236}">
-                <a16:creationId xmlns:a16="http://schemas.microsoft.com/office/drawing/2014/main" id="{947A7018-95FC-4A96-82D2-731844E5E4F8}"/>
+                <a16:creationId xmlns:a16="http://schemas.microsoft.com/office/drawing/2014/main" id="{1E904B1C-9F94-460D-852D-25C4825A116C}"/>
               </a:ext>
             </a:extLst>
           </p:cNvPr>
@@ -10075,7 +10075,7 @@
           <p:cNvPr id="3" name="footer">
             <a:extLst xmlns:a="http://schemas.openxmlformats.org/drawingml/2006/main">
               <a:ext uri="{FF2B5EF4-FFF2-40B4-BE49-F238E27FC236}">
-                <a16:creationId xmlns:a16="http://schemas.microsoft.com/office/drawing/2014/main" id="{AC35E779-214E-4A6D-BAEA-26BEA835BDED}"/>
+                <a16:creationId xmlns:a16="http://schemas.microsoft.com/office/drawing/2014/main" id="{12A387EF-34D6-452F-8E46-2418519DD0E0}"/>
               </a:ext>
             </a:extLst>
           </p:cNvPr>
@@ -10122,7 +10122,7 @@
                 <a:ea typeface="Arial"/>
                 <a:cs typeface="Arial"/>
               </a:rPr>
-              <a:t>§2.3.4 Gemengde opgaven · Opgave 3 · Boekpagina 104–105</a:t>
+              <a:t>§2.3.4 Gemengde opgaven · Opgave 3 · Boekpagina 105–106</a:t>
             </a:r>
           </a:p>
         </p:txBody>
@@ -10132,7 +10132,7 @@
           <p:cNvPr id="4" name="slide-number">
             <a:extLst xmlns:a="http://schemas.openxmlformats.org/drawingml/2006/main">
               <a:ext uri="{FF2B5EF4-FFF2-40B4-BE49-F238E27FC236}">
-                <a16:creationId xmlns:a16="http://schemas.microsoft.com/office/drawing/2014/main" id="{E7F77151-F8DD-42CC-A83B-24EFB7077758}"/>
+                <a16:creationId xmlns:a16="http://schemas.microsoft.com/office/drawing/2014/main" id="{9F341A40-91BC-4AA6-BA07-90D36B042E85}"/>
               </a:ext>
             </a:extLst>
           </p:cNvPr>
@@ -10196,7 +10196,7 @@
         </p:xfrm>
         <a:graphic xmlns:a="http://schemas.openxmlformats.org/drawingml/2006/main">
           <a:graphicData uri="http://schemas.openxmlformats.org/drawingml/2006/chart">
-            <c:chart xmlns:r="http://schemas.openxmlformats.org/officeDocument/2006/relationships" xmlns:c="http://schemas.openxmlformats.org/drawingml/2006/chart" r:id="Ra152cacbc61c4432"/>
+            <c:chart xmlns:r="http://schemas.openxmlformats.org/officeDocument/2006/relationships" xmlns:c="http://schemas.openxmlformats.org/drawingml/2006/chart" r:id="Re929db6482704e2d"/>
           </a:graphicData>
         </a:graphic>
       </p:graphicFrame>
@@ -10205,7 +10205,7 @@
           <p:cNvPr id="6" name="V">
             <a:extLst xmlns:a="http://schemas.openxmlformats.org/drawingml/2006/main">
               <a:ext uri="{FF2B5EF4-FFF2-40B4-BE49-F238E27FC236}">
-                <a16:creationId xmlns:a16="http://schemas.microsoft.com/office/drawing/2014/main" id="{89C7FD17-9ABF-464E-9E38-E73268FCCD77}"/>
+                <a16:creationId xmlns:a16="http://schemas.microsoft.com/office/drawing/2014/main" id="{0DB80588-E643-4BDD-8B99-387FCE2C0A75}"/>
               </a:ext>
             </a:extLst>
           </p:cNvPr>
@@ -10262,7 +10262,7 @@
           <p:cNvPr id="7" name="A = MK">
             <a:extLst xmlns:a="http://schemas.openxmlformats.org/drawingml/2006/main">
               <a:ext uri="{FF2B5EF4-FFF2-40B4-BE49-F238E27FC236}">
-                <a16:creationId xmlns:a16="http://schemas.microsoft.com/office/drawing/2014/main" id="{106A04FA-E38D-4437-AB06-F354AAB006DF}"/>
+                <a16:creationId xmlns:a16="http://schemas.microsoft.com/office/drawing/2014/main" id="{C03630B4-EE2E-406B-87E7-5827A4FDDA27}"/>
               </a:ext>
             </a:extLst>
           </p:cNvPr>
@@ -10319,7 +10319,7 @@
           <p:cNvPr id="8" name="E">
             <a:extLst xmlns:a="http://schemas.openxmlformats.org/drawingml/2006/main">
               <a:ext uri="{FF2B5EF4-FFF2-40B4-BE49-F238E27FC236}">
-                <a16:creationId xmlns:a16="http://schemas.microsoft.com/office/drawing/2014/main" id="{408C9420-5E17-4334-BC9C-BEF85E9FD9E0}"/>
+                <a16:creationId xmlns:a16="http://schemas.microsoft.com/office/drawing/2014/main" id="{C384E8E4-F373-42EA-8217-1EA5DF0C1A64}"/>
               </a:ext>
             </a:extLst>
           </p:cNvPr>
@@ -10376,7 +10376,7 @@
           <p:cNvPr id="9" name="Benodigd: V en A">
             <a:extLst xmlns:a="http://schemas.openxmlformats.org/drawingml/2006/main">
               <a:ext uri="{FF2B5EF4-FFF2-40B4-BE49-F238E27FC236}">
-                <a16:creationId xmlns:a16="http://schemas.microsoft.com/office/drawing/2014/main" id="{62BA42F7-B312-4E12-96E3-DC9176C289DD}"/>
+                <a16:creationId xmlns:a16="http://schemas.microsoft.com/office/drawing/2014/main" id="{77EB939D-A639-4EEB-B9F2-14266C1188A1}"/>
               </a:ext>
             </a:extLst>
           </p:cNvPr>
@@ -10433,7 +10433,7 @@
           <p:cNvPr id="10" name="80 − Q = 20 + 0,5Q&#10;60 = 1,5Q&#10;&#10;Qe = 40 huurfietsen&#10;Pe = 80 − ">
             <a:extLst xmlns:a="http://schemas.openxmlformats.org/drawingml/2006/main">
               <a:ext uri="{FF2B5EF4-FFF2-40B4-BE49-F238E27FC236}">
-                <a16:creationId xmlns:a16="http://schemas.microsoft.com/office/drawing/2014/main" id="{2CC46F1B-C5AB-4C85-82C8-CF9CE46F3614}"/>
+                <a16:creationId xmlns:a16="http://schemas.microsoft.com/office/drawing/2014/main" id="{D33D752F-7D8F-4832-93D3-A1F323FA7F1E}"/>
               </a:ext>
             </a:extLst>
           </p:cNvPr>
@@ -10587,7 +10587,7 @@
           <p:cNvPr id="11" name="Blauwe fietskleur:&#10;niet nodig.">
             <a:extLst xmlns:a="http://schemas.openxmlformats.org/drawingml/2006/main">
               <a:ext uri="{FF2B5EF4-FFF2-40B4-BE49-F238E27FC236}">
-                <a16:creationId xmlns:a16="http://schemas.microsoft.com/office/drawing/2014/main" id="{8AD3C6BB-B397-4315-9712-6293AFE3EBF2}"/>
+                <a16:creationId xmlns:a16="http://schemas.microsoft.com/office/drawing/2014/main" id="{28F8CE2A-ACD7-4DA2-80AE-AB7D425206D0}"/>
               </a:ext>
             </a:extLst>
           </p:cNvPr>
@@ -10665,7 +10665,7 @@
     </p:spTree>
     <p:extLst>
       <p:ext uri="{BB962C8B-B14F-4D97-AF65-F5344CB8AC3E}">
-        <p14:creationId xmlns:p14="http://schemas.microsoft.com/office/powerpoint/2010/main" val="286227533"/>
+        <p14:creationId xmlns:p14="http://schemas.microsoft.com/office/powerpoint/2010/main" val="508441515"/>
       </p:ext>
     </p:extLst>
   </p:cSld>
@@ -10696,7 +10696,7 @@
           <p:cNvPr id="16" name="Opgave 3.2 · Surplus in het vrije evenwicht">
             <a:extLst xmlns:a="http://schemas.openxmlformats.org/drawingml/2006/main">
               <a:ext uri="{FF2B5EF4-FFF2-40B4-BE49-F238E27FC236}">
-                <a16:creationId xmlns:a16="http://schemas.microsoft.com/office/drawing/2014/main" id="{CC3FCDF0-BDEA-4ED3-9CF7-6AD498E68A15}"/>
+                <a16:creationId xmlns:a16="http://schemas.microsoft.com/office/drawing/2014/main" id="{B6A58900-C6CD-4CD2-9A63-E2435456A6D3}"/>
               </a:ext>
             </a:extLst>
           </p:cNvPr>
@@ -10753,7 +10753,7 @@
           <p:cNvPr id="2" name="">
             <a:extLst xmlns:a="http://schemas.openxmlformats.org/drawingml/2006/main">
               <a:ext uri="{FF2B5EF4-FFF2-40B4-BE49-F238E27FC236}">
-                <a16:creationId xmlns:a16="http://schemas.microsoft.com/office/drawing/2014/main" id="{DD2945F5-F621-46AC-B397-2084016740C7}"/>
+                <a16:creationId xmlns:a16="http://schemas.microsoft.com/office/drawing/2014/main" id="{F8580FEC-0988-4180-8314-59D3B3CC263A}"/>
               </a:ext>
             </a:extLst>
           </p:cNvPr>
@@ -10782,7 +10782,7 @@
           <p:cNvPr id="3" name="footer">
             <a:extLst xmlns:a="http://schemas.openxmlformats.org/drawingml/2006/main">
               <a:ext uri="{FF2B5EF4-FFF2-40B4-BE49-F238E27FC236}">
-                <a16:creationId xmlns:a16="http://schemas.microsoft.com/office/drawing/2014/main" id="{2DBB0AEA-806C-465F-9764-6D628F6E3A19}"/>
+                <a16:creationId xmlns:a16="http://schemas.microsoft.com/office/drawing/2014/main" id="{C0B56762-FB3F-4B66-869D-37F640F110C4}"/>
               </a:ext>
             </a:extLst>
           </p:cNvPr>
@@ -10829,7 +10829,7 @@
                 <a:ea typeface="Arial"/>
                 <a:cs typeface="Arial"/>
               </a:rPr>
-              <a:t>§2.3.4 Gemengde opgaven · Opgave 3 · Boekpagina 104–105</a:t>
+              <a:t>§2.3.4 Gemengde opgaven · Opgave 3 · Boekpagina 105–106</a:t>
             </a:r>
           </a:p>
         </p:txBody>
@@ -10839,7 +10839,7 @@
           <p:cNvPr id="4" name="slide-number">
             <a:extLst xmlns:a="http://schemas.openxmlformats.org/drawingml/2006/main">
               <a:ext uri="{FF2B5EF4-FFF2-40B4-BE49-F238E27FC236}">
-                <a16:creationId xmlns:a16="http://schemas.microsoft.com/office/drawing/2014/main" id="{5ED40A76-DAB0-4A29-9820-EAF490253A84}"/>
+                <a16:creationId xmlns:a16="http://schemas.microsoft.com/office/drawing/2014/main" id="{33AE5763-6DCB-4EA0-88CD-EDD98506482B}"/>
               </a:ext>
             </a:extLst>
           </p:cNvPr>
@@ -10896,7 +10896,7 @@
           <p:cNvPr id="5" name="area-CS">
             <a:extLst xmlns:a="http://schemas.openxmlformats.org/drawingml/2006/main">
               <a:ext uri="{FF2B5EF4-FFF2-40B4-BE49-F238E27FC236}">
-                <a16:creationId xmlns:a16="http://schemas.microsoft.com/office/drawing/2014/main" id="{437B1F66-191B-4787-945B-A51B4335245C}"/>
+                <a16:creationId xmlns:a16="http://schemas.microsoft.com/office/drawing/2014/main" id="{CC625657-D00D-44F2-B832-3C1912821368}"/>
               </a:ext>
             </a:extLst>
           </p:cNvPr>
@@ -10939,7 +10939,7 @@
           <p:cNvPr id="6" name="area-PS">
             <a:extLst xmlns:a="http://schemas.openxmlformats.org/drawingml/2006/main">
               <a:ext uri="{FF2B5EF4-FFF2-40B4-BE49-F238E27FC236}">
-                <a16:creationId xmlns:a16="http://schemas.microsoft.com/office/drawing/2014/main" id="{05237908-1001-4855-8CED-4FC2BBFA1BF3}"/>
+                <a16:creationId xmlns:a16="http://schemas.microsoft.com/office/drawing/2014/main" id="{5798CD26-3BFD-4545-A5FA-5192C1F70A84}"/>
               </a:ext>
             </a:extLst>
           </p:cNvPr>
@@ -10989,7 +10989,7 @@
         </p:xfrm>
         <a:graphic xmlns:a="http://schemas.openxmlformats.org/drawingml/2006/main">
           <a:graphicData uri="http://schemas.openxmlformats.org/drawingml/2006/chart">
-            <c:chart xmlns:r="http://schemas.openxmlformats.org/officeDocument/2006/relationships" xmlns:c="http://schemas.openxmlformats.org/drawingml/2006/chart" r:id="R14fce75c3f0f443f"/>
+            <c:chart xmlns:r="http://schemas.openxmlformats.org/officeDocument/2006/relationships" xmlns:c="http://schemas.openxmlformats.org/drawingml/2006/chart" r:id="Ra100c6d6a142459f"/>
           </a:graphicData>
         </a:graphic>
       </p:graphicFrame>
@@ -10998,7 +10998,7 @@
           <p:cNvPr id="8" name="V">
             <a:extLst xmlns:a="http://schemas.openxmlformats.org/drawingml/2006/main">
               <a:ext uri="{FF2B5EF4-FFF2-40B4-BE49-F238E27FC236}">
-                <a16:creationId xmlns:a16="http://schemas.microsoft.com/office/drawing/2014/main" id="{EA34F669-95A3-4B78-96FD-9385CF163005}"/>
+                <a16:creationId xmlns:a16="http://schemas.microsoft.com/office/drawing/2014/main" id="{0B05D795-F484-4DB9-B2EB-1D4196790006}"/>
               </a:ext>
             </a:extLst>
           </p:cNvPr>
@@ -11055,7 +11055,7 @@
           <p:cNvPr id="9" name="A = MK">
             <a:extLst xmlns:a="http://schemas.openxmlformats.org/drawingml/2006/main">
               <a:ext uri="{FF2B5EF4-FFF2-40B4-BE49-F238E27FC236}">
-                <a16:creationId xmlns:a16="http://schemas.microsoft.com/office/drawing/2014/main" id="{D803FC89-A778-448F-8B3E-4380E237F412}"/>
+                <a16:creationId xmlns:a16="http://schemas.microsoft.com/office/drawing/2014/main" id="{3F2A2AF1-924A-4C47-9A04-A79DC70E3867}"/>
               </a:ext>
             </a:extLst>
           </p:cNvPr>
@@ -11112,7 +11112,7 @@
           <p:cNvPr id="10" name="E">
             <a:extLst xmlns:a="http://schemas.openxmlformats.org/drawingml/2006/main">
               <a:ext uri="{FF2B5EF4-FFF2-40B4-BE49-F238E27FC236}">
-                <a16:creationId xmlns:a16="http://schemas.microsoft.com/office/drawing/2014/main" id="{8C99EB95-781A-473A-A1CB-F9DCB082C2F7}"/>
+                <a16:creationId xmlns:a16="http://schemas.microsoft.com/office/drawing/2014/main" id="{EC1819F0-A20F-432F-B9E8-7306ECF1E61B}"/>
               </a:ext>
             </a:extLst>
           </p:cNvPr>
@@ -11169,7 +11169,7 @@
           <p:cNvPr id="11" name="CS">
             <a:extLst xmlns:a="http://schemas.openxmlformats.org/drawingml/2006/main">
               <a:ext uri="{FF2B5EF4-FFF2-40B4-BE49-F238E27FC236}">
-                <a16:creationId xmlns:a16="http://schemas.microsoft.com/office/drawing/2014/main" id="{F1CF2178-ADAD-4B91-B3AF-C5C827C8552D}"/>
+                <a16:creationId xmlns:a16="http://schemas.microsoft.com/office/drawing/2014/main" id="{72A647F6-1777-4B97-8250-5F84CC5BE7EF}"/>
               </a:ext>
             </a:extLst>
           </p:cNvPr>
@@ -11226,7 +11226,7 @@
           <p:cNvPr id="12" name="PS">
             <a:extLst xmlns:a="http://schemas.openxmlformats.org/drawingml/2006/main">
               <a:ext uri="{FF2B5EF4-FFF2-40B4-BE49-F238E27FC236}">
-                <a16:creationId xmlns:a16="http://schemas.microsoft.com/office/drawing/2014/main" id="{4B0CF15A-C4A1-4B49-9449-247FFB253865}"/>
+                <a16:creationId xmlns:a16="http://schemas.microsoft.com/office/drawing/2014/main" id="{82D223B8-E59A-47C8-B305-0A7193B73287}"/>
               </a:ext>
             </a:extLst>
           </p:cNvPr>
@@ -11283,7 +11283,7 @@
           <p:cNvPr id="13" name="Basis: 40 huurfietsen">
             <a:extLst xmlns:a="http://schemas.openxmlformats.org/drawingml/2006/main">
               <a:ext uri="{FF2B5EF4-FFF2-40B4-BE49-F238E27FC236}">
-                <a16:creationId xmlns:a16="http://schemas.microsoft.com/office/drawing/2014/main" id="{8C95F75B-75B3-45AD-AB48-42344764164D}"/>
+                <a16:creationId xmlns:a16="http://schemas.microsoft.com/office/drawing/2014/main" id="{B940282D-D261-4E81-9242-0328FC3E881F}"/>
               </a:ext>
             </a:extLst>
           </p:cNvPr>
@@ -11340,7 +11340,7 @@
           <p:cNvPr id="14" name="CS = ½ × 40 × (80 − 40)&#10;     = € 800&#10;&#10;PS = ½ × 40 × (40 − 20">
             <a:extLst xmlns:a="http://schemas.openxmlformats.org/drawingml/2006/main">
               <a:ext uri="{FF2B5EF4-FFF2-40B4-BE49-F238E27FC236}">
-                <a16:creationId xmlns:a16="http://schemas.microsoft.com/office/drawing/2014/main" id="{7B2E21B1-2329-4840-8DF9-BDDAE8406B6A}"/>
+                <a16:creationId xmlns:a16="http://schemas.microsoft.com/office/drawing/2014/main" id="{14CA34C1-53C9-4FA6-AA40-7B5D4FB7D63C}"/>
               </a:ext>
             </a:extLst>
           </p:cNvPr>
@@ -11471,7 +11471,7 @@
           <p:cNvPr id="15" name="TS = 800 + 400&#10;     = € 1.200">
             <a:extLst xmlns:a="http://schemas.openxmlformats.org/drawingml/2006/main">
               <a:ext uri="{FF2B5EF4-FFF2-40B4-BE49-F238E27FC236}">
-                <a16:creationId xmlns:a16="http://schemas.microsoft.com/office/drawing/2014/main" id="{A1DC4A37-E214-4FD2-B515-4F69A139C2D9}"/>
+                <a16:creationId xmlns:a16="http://schemas.microsoft.com/office/drawing/2014/main" id="{6C144B35-D2D0-4DA2-85C0-FF41C0EE16A2}"/>
               </a:ext>
             </a:extLst>
           </p:cNvPr>
@@ -11549,7 +11549,7 @@
     </p:spTree>
     <p:extLst>
       <p:ext uri="{BB962C8B-B14F-4D97-AF65-F5344CB8AC3E}">
-        <p14:creationId xmlns:p14="http://schemas.microsoft.com/office/powerpoint/2010/main" val="320701521"/>
+        <p14:creationId xmlns:p14="http://schemas.microsoft.com/office/powerpoint/2010/main" val="315534579"/>
       </p:ext>
     </p:extLst>
   </p:cSld>
@@ -11580,7 +11580,7 @@
           <p:cNvPr id="8" name="Opgave 3.3 · Werkelijke handel en toewijzing">
             <a:extLst xmlns:a="http://schemas.openxmlformats.org/drawingml/2006/main">
               <a:ext uri="{FF2B5EF4-FFF2-40B4-BE49-F238E27FC236}">
-                <a16:creationId xmlns:a16="http://schemas.microsoft.com/office/drawing/2014/main" id="{20CEF6C9-65DF-41B0-9FEC-8B9534D08271}"/>
+                <a16:creationId xmlns:a16="http://schemas.microsoft.com/office/drawing/2014/main" id="{0104D971-47C4-423E-93CF-AFA989751B64}"/>
               </a:ext>
             </a:extLst>
           </p:cNvPr>
@@ -11637,7 +11637,7 @@
           <p:cNvPr id="2" name="">
             <a:extLst xmlns:a="http://schemas.openxmlformats.org/drawingml/2006/main">
               <a:ext uri="{FF2B5EF4-FFF2-40B4-BE49-F238E27FC236}">
-                <a16:creationId xmlns:a16="http://schemas.microsoft.com/office/drawing/2014/main" id="{7CCF9885-44F6-452D-8E3C-AD37F39D7A59}"/>
+                <a16:creationId xmlns:a16="http://schemas.microsoft.com/office/drawing/2014/main" id="{79BB4B83-2C0B-4D9F-8799-80E12C8221FB}"/>
               </a:ext>
             </a:extLst>
           </p:cNvPr>
@@ -11666,7 +11666,7 @@
           <p:cNvPr id="3" name="footer">
             <a:extLst xmlns:a="http://schemas.openxmlformats.org/drawingml/2006/main">
               <a:ext uri="{FF2B5EF4-FFF2-40B4-BE49-F238E27FC236}">
-                <a16:creationId xmlns:a16="http://schemas.microsoft.com/office/drawing/2014/main" id="{A022ED63-2987-47C6-AA70-D36D94A54F40}"/>
+                <a16:creationId xmlns:a16="http://schemas.microsoft.com/office/drawing/2014/main" id="{EFBCCAE8-F5FD-4E78-91D8-40359EE167AF}"/>
               </a:ext>
             </a:extLst>
           </p:cNvPr>
@@ -11713,7 +11713,7 @@
                 <a:ea typeface="Arial"/>
                 <a:cs typeface="Arial"/>
               </a:rPr>
-              <a:t>§2.3.4 Gemengde opgaven · Opgave 3 · Boekpagina 104–105</a:t>
+              <a:t>§2.3.4 Gemengde opgaven · Opgave 3 · Boekpagina 105–106</a:t>
             </a:r>
           </a:p>
         </p:txBody>
@@ -11723,7 +11723,7 @@
           <p:cNvPr id="4" name="slide-number">
             <a:extLst xmlns:a="http://schemas.openxmlformats.org/drawingml/2006/main">
               <a:ext uri="{FF2B5EF4-FFF2-40B4-BE49-F238E27FC236}">
-                <a16:creationId xmlns:a16="http://schemas.microsoft.com/office/drawing/2014/main" id="{67019FC8-B6F6-4BDF-9B02-2587DD8CA0D2}"/>
+                <a16:creationId xmlns:a16="http://schemas.microsoft.com/office/drawing/2014/main" id="{3E24982D-E9D7-4721-AFAC-5E94D1637802}"/>
               </a:ext>
             </a:extLst>
           </p:cNvPr>
@@ -11883,7 +11883,7 @@
                           <a:ea typeface="Arial"/>
                           <a:cs typeface="Arial"/>
                         </a:rPr>
-                        <a:t>Gevraagd: Qd</a:t>
+                        <a:t>Gevraagd: Qv</a:t>
                       </a:r>
                     </a:p>
                   </a:txBody>
@@ -11907,7 +11907,7 @@
                           <a:ea typeface="Arial"/>
                           <a:cs typeface="Arial"/>
                         </a:rPr>
-                        <a:t>45 = 80 − Qd</a:t>
+                        <a:t>45 = 80 − Qv</a:t>
                       </a:r>
                     </a:p>
                   </a:txBody>
@@ -11957,7 +11957,7 @@
                           <a:ea typeface="Arial"/>
                           <a:cs typeface="Arial"/>
                         </a:rPr>
-                        <a:t>Aangeboden: Qs</a:t>
+                        <a:t>Aangeboden: Qa</a:t>
                       </a:r>
                     </a:p>
                   </a:txBody>
@@ -11981,7 +11981,7 @@
                           <a:ea typeface="Arial"/>
                           <a:cs typeface="Arial"/>
                         </a:rPr>
-                        <a:t>45 = 20 + 0,5Qs</a:t>
+                        <a:t>45 = 20 + 0,5Qa</a:t>
                       </a:r>
                     </a:p>
                   </a:txBody>
@@ -12099,7 +12099,7 @@
           <p:cNvPr id="6" name="De 30 hoogste betalingsbereidheden en de 30 laagste MK">
             <a:extLst xmlns:a="http://schemas.openxmlformats.org/drawingml/2006/main">
               <a:ext uri="{FF2B5EF4-FFF2-40B4-BE49-F238E27FC236}">
-                <a16:creationId xmlns:a16="http://schemas.microsoft.com/office/drawing/2014/main" id="{FF4EBE27-0B67-4A6E-8BA2-98CB8FD0D925}"/>
+                <a16:creationId xmlns:a16="http://schemas.microsoft.com/office/drawing/2014/main" id="{841221F4-3A97-42A5-B0F6-EB033EC9E12A}"/>
               </a:ext>
             </a:extLst>
           </p:cNvPr>
@@ -12156,7 +12156,7 @@
           <p:cNvPr id="7" name="Rand bij Q = 30:&#10;V: 80 − 30 = € 50       A = MK: 20 + 0,5 × ">
             <a:extLst xmlns:a="http://schemas.openxmlformats.org/drawingml/2006/main">
               <a:ext uri="{FF2B5EF4-FFF2-40B4-BE49-F238E27FC236}">
-                <a16:creationId xmlns:a16="http://schemas.microsoft.com/office/drawing/2014/main" id="{B18D1860-B006-4E35-A15B-99F68B2E621C}"/>
+                <a16:creationId xmlns:a16="http://schemas.microsoft.com/office/drawing/2014/main" id="{0BCC6CF9-46F8-4571-AE37-BDE9436EF1D0}"/>
               </a:ext>
             </a:extLst>
           </p:cNvPr>
@@ -12234,7 +12234,7 @@
     </p:spTree>
     <p:extLst>
       <p:ext uri="{BB962C8B-B14F-4D97-AF65-F5344CB8AC3E}">
-        <p14:creationId xmlns:p14="http://schemas.microsoft.com/office/powerpoint/2010/main" val="204600860"/>
+        <p14:creationId xmlns:p14="http://schemas.microsoft.com/office/powerpoint/2010/main" val="1357271480"/>
       </p:ext>
     </p:extLst>
   </p:cSld>
@@ -12265,7 +12265,7 @@
           <p:cNvPr id="17" name="Opgave 3.3 · CS bij dertig transacties">
             <a:extLst xmlns:a="http://schemas.openxmlformats.org/drawingml/2006/main">
               <a:ext uri="{FF2B5EF4-FFF2-40B4-BE49-F238E27FC236}">
-                <a16:creationId xmlns:a16="http://schemas.microsoft.com/office/drawing/2014/main" id="{CC2BAF98-9897-4AD3-9B04-8426A6A3C6A0}"/>
+                <a16:creationId xmlns:a16="http://schemas.microsoft.com/office/drawing/2014/main" id="{018763CF-090C-43BF-B4D5-C4DDB3DB8FDB}"/>
               </a:ext>
             </a:extLst>
           </p:cNvPr>
@@ -12322,7 +12322,7 @@
           <p:cNvPr id="2" name="">
             <a:extLst xmlns:a="http://schemas.openxmlformats.org/drawingml/2006/main">
               <a:ext uri="{FF2B5EF4-FFF2-40B4-BE49-F238E27FC236}">
-                <a16:creationId xmlns:a16="http://schemas.microsoft.com/office/drawing/2014/main" id="{04B9958D-B8F3-4D6D-BF21-88F18022BBCD}"/>
+                <a16:creationId xmlns:a16="http://schemas.microsoft.com/office/drawing/2014/main" id="{AB6B03E7-6217-4E66-BA03-CBB5FA0CCDC2}"/>
               </a:ext>
             </a:extLst>
           </p:cNvPr>
@@ -12351,7 +12351,7 @@
           <p:cNvPr id="3" name="footer">
             <a:extLst xmlns:a="http://schemas.openxmlformats.org/drawingml/2006/main">
               <a:ext uri="{FF2B5EF4-FFF2-40B4-BE49-F238E27FC236}">
-                <a16:creationId xmlns:a16="http://schemas.microsoft.com/office/drawing/2014/main" id="{13B3579F-AD51-4A0B-A973-F8221D734AC2}"/>
+                <a16:creationId xmlns:a16="http://schemas.microsoft.com/office/drawing/2014/main" id="{38FDCF57-3EB0-478B-9850-6E72993E6F2A}"/>
               </a:ext>
             </a:extLst>
           </p:cNvPr>
@@ -12398,7 +12398,7 @@
                 <a:ea typeface="Arial"/>
                 <a:cs typeface="Arial"/>
               </a:rPr>
-              <a:t>§2.3.4 Gemengde opgaven · Opgave 3 · Boekpagina 104–105</a:t>
+              <a:t>§2.3.4 Gemengde opgaven · Opgave 3 · Boekpagina 105–106</a:t>
             </a:r>
           </a:p>
         </p:txBody>
@@ -12408,7 +12408,7 @@
           <p:cNvPr id="4" name="slide-number">
             <a:extLst xmlns:a="http://schemas.openxmlformats.org/drawingml/2006/main">
               <a:ext uri="{FF2B5EF4-FFF2-40B4-BE49-F238E27FC236}">
-                <a16:creationId xmlns:a16="http://schemas.microsoft.com/office/drawing/2014/main" id="{26DB4B9E-C611-44AF-885E-5668B00645E1}"/>
+                <a16:creationId xmlns:a16="http://schemas.microsoft.com/office/drawing/2014/main" id="{DEB0E6D2-14CC-4D9B-9942-A4EFBB05EFA7}"/>
               </a:ext>
             </a:extLst>
           </p:cNvPr>
@@ -12465,7 +12465,7 @@
           <p:cNvPr id="5" name="area-CS-rectangle">
             <a:extLst xmlns:a="http://schemas.openxmlformats.org/drawingml/2006/main">
               <a:ext uri="{FF2B5EF4-FFF2-40B4-BE49-F238E27FC236}">
-                <a16:creationId xmlns:a16="http://schemas.microsoft.com/office/drawing/2014/main" id="{9BAF34EF-1D31-47CB-AB99-393B06935087}"/>
+                <a16:creationId xmlns:a16="http://schemas.microsoft.com/office/drawing/2014/main" id="{9067CE59-D9BE-4681-84B3-57B6509D0A9E}"/>
               </a:ext>
             </a:extLst>
           </p:cNvPr>
@@ -12511,7 +12511,7 @@
           <p:cNvPr id="6" name="area-CS-triangle">
             <a:extLst xmlns:a="http://schemas.openxmlformats.org/drawingml/2006/main">
               <a:ext uri="{FF2B5EF4-FFF2-40B4-BE49-F238E27FC236}">
-                <a16:creationId xmlns:a16="http://schemas.microsoft.com/office/drawing/2014/main" id="{DBCE331B-AC0E-499E-AAD0-A9A33FCC0813}"/>
+                <a16:creationId xmlns:a16="http://schemas.microsoft.com/office/drawing/2014/main" id="{7B6A5379-9F36-4BA4-843A-0179FCE44283}"/>
               </a:ext>
             </a:extLst>
           </p:cNvPr>
@@ -12561,7 +12561,7 @@
         </p:xfrm>
         <a:graphic xmlns:a="http://schemas.openxmlformats.org/drawingml/2006/main">
           <a:graphicData uri="http://schemas.openxmlformats.org/drawingml/2006/chart">
-            <c:chart xmlns:r="http://schemas.openxmlformats.org/officeDocument/2006/relationships" xmlns:c="http://schemas.openxmlformats.org/drawingml/2006/chart" r:id="R5b5c3c976f974bf6"/>
+            <c:chart xmlns:r="http://schemas.openxmlformats.org/officeDocument/2006/relationships" xmlns:c="http://schemas.openxmlformats.org/drawingml/2006/chart" r:id="R3547a652dfa04b84"/>
           </a:graphicData>
         </a:graphic>
       </p:graphicFrame>
@@ -12570,7 +12570,7 @@
           <p:cNvPr id="8" name="V">
             <a:extLst xmlns:a="http://schemas.openxmlformats.org/drawingml/2006/main">
               <a:ext uri="{FF2B5EF4-FFF2-40B4-BE49-F238E27FC236}">
-                <a16:creationId xmlns:a16="http://schemas.microsoft.com/office/drawing/2014/main" id="{ADF6E213-A751-4899-BEB8-79813CF178F7}"/>
+                <a16:creationId xmlns:a16="http://schemas.microsoft.com/office/drawing/2014/main" id="{99E81492-42AF-4689-B381-52795A908106}"/>
               </a:ext>
             </a:extLst>
           </p:cNvPr>
@@ -12627,7 +12627,7 @@
           <p:cNvPr id="9" name="A = MK">
             <a:extLst xmlns:a="http://schemas.openxmlformats.org/drawingml/2006/main">
               <a:ext uri="{FF2B5EF4-FFF2-40B4-BE49-F238E27FC236}">
-                <a16:creationId xmlns:a16="http://schemas.microsoft.com/office/drawing/2014/main" id="{B0671134-6F4A-4373-B5A8-CA7A7E18EC30}"/>
+                <a16:creationId xmlns:a16="http://schemas.microsoft.com/office/drawing/2014/main" id="{45BD9229-903D-44E0-83D9-A16C3BF7C155}"/>
               </a:ext>
             </a:extLst>
           </p:cNvPr>
@@ -12684,7 +12684,7 @@
           <p:cNvPr id="10" name="P = 45">
             <a:extLst xmlns:a="http://schemas.openxmlformats.org/drawingml/2006/main">
               <a:ext uri="{FF2B5EF4-FFF2-40B4-BE49-F238E27FC236}">
-                <a16:creationId xmlns:a16="http://schemas.microsoft.com/office/drawing/2014/main" id="{C7181795-AACC-4632-824E-1FC9391012EC}"/>
+                <a16:creationId xmlns:a16="http://schemas.microsoft.com/office/drawing/2014/main" id="{EC556FD9-89E1-4C36-BF45-AC4340E758C2}"/>
               </a:ext>
             </a:extLst>
           </p:cNvPr>
@@ -12741,7 +12741,7 @@
           <p:cNvPr id="11" name="Q = 30">
             <a:extLst xmlns:a="http://schemas.openxmlformats.org/drawingml/2006/main">
               <a:ext uri="{FF2B5EF4-FFF2-40B4-BE49-F238E27FC236}">
-                <a16:creationId xmlns:a16="http://schemas.microsoft.com/office/drawing/2014/main" id="{DB6B8EC4-8FB4-44C9-B203-D14EF5FFA175}"/>
+                <a16:creationId xmlns:a16="http://schemas.microsoft.com/office/drawing/2014/main" id="{B5403ACC-7DC7-4542-825D-017DBF1D2993}"/>
               </a:ext>
             </a:extLst>
           </p:cNvPr>
@@ -12798,7 +12798,7 @@
           <p:cNvPr id="12" name="50">
             <a:extLst xmlns:a="http://schemas.openxmlformats.org/drawingml/2006/main">
               <a:ext uri="{FF2B5EF4-FFF2-40B4-BE49-F238E27FC236}">
-                <a16:creationId xmlns:a16="http://schemas.microsoft.com/office/drawing/2014/main" id="{D8C3DA92-7F2C-4A9C-8CDF-C36FF80F8DC3}"/>
+                <a16:creationId xmlns:a16="http://schemas.microsoft.com/office/drawing/2014/main" id="{9A9B1DEA-1F73-4758-9997-878DED4BDC9B}"/>
               </a:ext>
             </a:extLst>
           </p:cNvPr>
@@ -12855,7 +12855,7 @@
           <p:cNvPr id="13" name="CS">
             <a:extLst xmlns:a="http://schemas.openxmlformats.org/drawingml/2006/main">
               <a:ext uri="{FF2B5EF4-FFF2-40B4-BE49-F238E27FC236}">
-                <a16:creationId xmlns:a16="http://schemas.microsoft.com/office/drawing/2014/main" id="{42834278-30E6-42D1-A904-4415C6A18C7E}"/>
+                <a16:creationId xmlns:a16="http://schemas.microsoft.com/office/drawing/2014/main" id="{0360D275-D6E3-4404-9951-B851AD60C352}"/>
               </a:ext>
             </a:extLst>
           </p:cNvPr>
@@ -12912,7 +12912,7 @@
           <p:cNvPr id="14" name="Rechthoek + driehoek">
             <a:extLst xmlns:a="http://schemas.openxmlformats.org/drawingml/2006/main">
               <a:ext uri="{FF2B5EF4-FFF2-40B4-BE49-F238E27FC236}">
-                <a16:creationId xmlns:a16="http://schemas.microsoft.com/office/drawing/2014/main" id="{3E1E296D-774D-481A-8547-DDECFC79B7F1}"/>
+                <a16:creationId xmlns:a16="http://schemas.microsoft.com/office/drawing/2014/main" id="{491EF8F9-7F57-4A9B-9ED7-BBD78CE297E1}"/>
               </a:ext>
             </a:extLst>
           </p:cNvPr>
@@ -12969,7 +12969,7 @@
           <p:cNvPr id="15" name="30 × (50 − 45) = 150&#10;&#10;½ × 30 × (80 − 50)&#10;= 450&#10;&#10;Hoogten: € 5">
             <a:extLst xmlns:a="http://schemas.openxmlformats.org/drawingml/2006/main">
               <a:ext uri="{FF2B5EF4-FFF2-40B4-BE49-F238E27FC236}">
-                <a16:creationId xmlns:a16="http://schemas.microsoft.com/office/drawing/2014/main" id="{2C1EB413-37BD-449E-B27C-18C3047ED98B}"/>
+                <a16:creationId xmlns:a16="http://schemas.microsoft.com/office/drawing/2014/main" id="{156260D2-42C9-4F0C-AACD-A7F1D1F91A76}"/>
               </a:ext>
             </a:extLst>
           </p:cNvPr>
@@ -13128,7 +13128,7 @@
           <p:cNvPr id="16" name="CS = 150 + 450&#10;     = € 600">
             <a:extLst xmlns:a="http://schemas.openxmlformats.org/drawingml/2006/main">
               <a:ext uri="{FF2B5EF4-FFF2-40B4-BE49-F238E27FC236}">
-                <a16:creationId xmlns:a16="http://schemas.microsoft.com/office/drawing/2014/main" id="{DD1CFF9A-6720-4092-BD7C-85A68D770D90}"/>
+                <a16:creationId xmlns:a16="http://schemas.microsoft.com/office/drawing/2014/main" id="{B4E04B23-C701-4196-9582-86DDC3E516FB}"/>
               </a:ext>
             </a:extLst>
           </p:cNvPr>
@@ -13206,7 +13206,7 @@
     </p:spTree>
     <p:extLst>
       <p:ext uri="{BB962C8B-B14F-4D97-AF65-F5344CB8AC3E}">
-        <p14:creationId xmlns:p14="http://schemas.microsoft.com/office/powerpoint/2010/main" val="1965535896"/>
+        <p14:creationId xmlns:p14="http://schemas.microsoft.com/office/powerpoint/2010/main" val="2054101929"/>
       </p:ext>
     </p:extLst>
   </p:cSld>
@@ -13237,7 +13237,7 @@
           <p:cNvPr id="17" name="Opgave 3.3 · PS bij dertig transacties">
             <a:extLst xmlns:a="http://schemas.openxmlformats.org/drawingml/2006/main">
               <a:ext uri="{FF2B5EF4-FFF2-40B4-BE49-F238E27FC236}">
-                <a16:creationId xmlns:a16="http://schemas.microsoft.com/office/drawing/2014/main" id="{34C7268F-5D80-41C1-881F-8CD1E1F92910}"/>
+                <a16:creationId xmlns:a16="http://schemas.microsoft.com/office/drawing/2014/main" id="{661457D7-424A-4953-832C-63225ADDE17E}"/>
               </a:ext>
             </a:extLst>
           </p:cNvPr>
@@ -13294,7 +13294,7 @@
           <p:cNvPr id="2" name="">
             <a:extLst xmlns:a="http://schemas.openxmlformats.org/drawingml/2006/main">
               <a:ext uri="{FF2B5EF4-FFF2-40B4-BE49-F238E27FC236}">
-                <a16:creationId xmlns:a16="http://schemas.microsoft.com/office/drawing/2014/main" id="{2821B204-C536-452F-B65A-8919D70B6CDF}"/>
+                <a16:creationId xmlns:a16="http://schemas.microsoft.com/office/drawing/2014/main" id="{F1B5A1B0-C0E7-441D-B36A-4CB23537631B}"/>
               </a:ext>
             </a:extLst>
           </p:cNvPr>
@@ -13323,7 +13323,7 @@
           <p:cNvPr id="3" name="footer">
             <a:extLst xmlns:a="http://schemas.openxmlformats.org/drawingml/2006/main">
               <a:ext uri="{FF2B5EF4-FFF2-40B4-BE49-F238E27FC236}">
-                <a16:creationId xmlns:a16="http://schemas.microsoft.com/office/drawing/2014/main" id="{630F9A09-5698-4E6A-8C62-57C105A462AF}"/>
+                <a16:creationId xmlns:a16="http://schemas.microsoft.com/office/drawing/2014/main" id="{C20DD652-451C-4477-B81B-65691D52B1D8}"/>
               </a:ext>
             </a:extLst>
           </p:cNvPr>
@@ -13370,7 +13370,7 @@
                 <a:ea typeface="Arial"/>
                 <a:cs typeface="Arial"/>
               </a:rPr>
-              <a:t>§2.3.4 Gemengde opgaven · Opgave 3 · Boekpagina 104–105</a:t>
+              <a:t>§2.3.4 Gemengde opgaven · Opgave 3 · Boekpagina 105–106</a:t>
             </a:r>
           </a:p>
         </p:txBody>
@@ -13380,7 +13380,7 @@
           <p:cNvPr id="4" name="slide-number">
             <a:extLst xmlns:a="http://schemas.openxmlformats.org/drawingml/2006/main">
               <a:ext uri="{FF2B5EF4-FFF2-40B4-BE49-F238E27FC236}">
-                <a16:creationId xmlns:a16="http://schemas.microsoft.com/office/drawing/2014/main" id="{59C635E6-B43C-41B7-B3AB-FE4ACD03096F}"/>
+                <a16:creationId xmlns:a16="http://schemas.microsoft.com/office/drawing/2014/main" id="{247054BF-5CC9-423A-94A5-3C578FBD1839}"/>
               </a:ext>
             </a:extLst>
           </p:cNvPr>
@@ -13437,7 +13437,7 @@
           <p:cNvPr id="5" name="area-PS-rectangle">
             <a:extLst xmlns:a="http://schemas.openxmlformats.org/drawingml/2006/main">
               <a:ext uri="{FF2B5EF4-FFF2-40B4-BE49-F238E27FC236}">
-                <a16:creationId xmlns:a16="http://schemas.microsoft.com/office/drawing/2014/main" id="{B7C0E583-6B04-4BDA-B414-D1A22ABD7145}"/>
+                <a16:creationId xmlns:a16="http://schemas.microsoft.com/office/drawing/2014/main" id="{BE55CF44-251C-4D3B-85DB-793111F366E5}"/>
               </a:ext>
             </a:extLst>
           </p:cNvPr>
@@ -13483,7 +13483,7 @@
           <p:cNvPr id="6" name="area-PS-triangle">
             <a:extLst xmlns:a="http://schemas.openxmlformats.org/drawingml/2006/main">
               <a:ext uri="{FF2B5EF4-FFF2-40B4-BE49-F238E27FC236}">
-                <a16:creationId xmlns:a16="http://schemas.microsoft.com/office/drawing/2014/main" id="{B154486C-3F1E-43DA-902A-8E8159DFF83A}"/>
+                <a16:creationId xmlns:a16="http://schemas.microsoft.com/office/drawing/2014/main" id="{D3AEF066-A5F3-4936-AD9C-8B5CFB112A14}"/>
               </a:ext>
             </a:extLst>
           </p:cNvPr>
@@ -13533,7 +13533,7 @@
         </p:xfrm>
         <a:graphic xmlns:a="http://schemas.openxmlformats.org/drawingml/2006/main">
           <a:graphicData uri="http://schemas.openxmlformats.org/drawingml/2006/chart">
-            <c:chart xmlns:r="http://schemas.openxmlformats.org/officeDocument/2006/relationships" xmlns:c="http://schemas.openxmlformats.org/drawingml/2006/chart" r:id="R957d4304c8484f28"/>
+            <c:chart xmlns:r="http://schemas.openxmlformats.org/officeDocument/2006/relationships" xmlns:c="http://schemas.openxmlformats.org/drawingml/2006/chart" r:id="R63513fdd89f64b02"/>
           </a:graphicData>
         </a:graphic>
       </p:graphicFrame>
@@ -13542,7 +13542,7 @@
           <p:cNvPr id="8" name="V">
             <a:extLst xmlns:a="http://schemas.openxmlformats.org/drawingml/2006/main">
               <a:ext uri="{FF2B5EF4-FFF2-40B4-BE49-F238E27FC236}">
-                <a16:creationId xmlns:a16="http://schemas.microsoft.com/office/drawing/2014/main" id="{7BDE19E5-8DEE-4BFF-9F57-E7A77E09242D}"/>
+                <a16:creationId xmlns:a16="http://schemas.microsoft.com/office/drawing/2014/main" id="{CBD86C5E-8B53-4F38-8641-1BC94A3C1271}"/>
               </a:ext>
             </a:extLst>
           </p:cNvPr>
@@ -13599,7 +13599,7 @@
           <p:cNvPr id="9" name="A = MK">
             <a:extLst xmlns:a="http://schemas.openxmlformats.org/drawingml/2006/main">
               <a:ext uri="{FF2B5EF4-FFF2-40B4-BE49-F238E27FC236}">
-                <a16:creationId xmlns:a16="http://schemas.microsoft.com/office/drawing/2014/main" id="{E640333F-F6B9-4CE0-B14D-FC53BF31812C}"/>
+                <a16:creationId xmlns:a16="http://schemas.microsoft.com/office/drawing/2014/main" id="{6EBE9770-9B8F-4E63-843B-41645E2C34B9}"/>
               </a:ext>
             </a:extLst>
           </p:cNvPr>
@@ -13656,7 +13656,7 @@
           <p:cNvPr id="10" name="P = 45">
             <a:extLst xmlns:a="http://schemas.openxmlformats.org/drawingml/2006/main">
               <a:ext uri="{FF2B5EF4-FFF2-40B4-BE49-F238E27FC236}">
-                <a16:creationId xmlns:a16="http://schemas.microsoft.com/office/drawing/2014/main" id="{77820C72-9572-42F2-BDC6-8658B02F0634}"/>
+                <a16:creationId xmlns:a16="http://schemas.microsoft.com/office/drawing/2014/main" id="{D3F87213-5E0A-459B-8F98-6D00AFD97C00}"/>
               </a:ext>
             </a:extLst>
           </p:cNvPr>
@@ -13713,7 +13713,7 @@
           <p:cNvPr id="11" name="Q = 30">
             <a:extLst xmlns:a="http://schemas.openxmlformats.org/drawingml/2006/main">
               <a:ext uri="{FF2B5EF4-FFF2-40B4-BE49-F238E27FC236}">
-                <a16:creationId xmlns:a16="http://schemas.microsoft.com/office/drawing/2014/main" id="{8F4CA8BF-192D-424C-BEE5-50581C25FDAA}"/>
+                <a16:creationId xmlns:a16="http://schemas.microsoft.com/office/drawing/2014/main" id="{52179919-4E9A-4DBE-BF0C-21B44A58B7B1}"/>
               </a:ext>
             </a:extLst>
           </p:cNvPr>
@@ -13770,7 +13770,7 @@
           <p:cNvPr id="12" name="35">
             <a:extLst xmlns:a="http://schemas.openxmlformats.org/drawingml/2006/main">
               <a:ext uri="{FF2B5EF4-FFF2-40B4-BE49-F238E27FC236}">
-                <a16:creationId xmlns:a16="http://schemas.microsoft.com/office/drawing/2014/main" id="{BA8223DD-42FC-4C0B-942D-FCA5B2A7E2D0}"/>
+                <a16:creationId xmlns:a16="http://schemas.microsoft.com/office/drawing/2014/main" id="{5E6BAE50-3324-4192-B36C-91EABA6571CC}"/>
               </a:ext>
             </a:extLst>
           </p:cNvPr>
@@ -13827,7 +13827,7 @@
           <p:cNvPr id="13" name="PS">
             <a:extLst xmlns:a="http://schemas.openxmlformats.org/drawingml/2006/main">
               <a:ext uri="{FF2B5EF4-FFF2-40B4-BE49-F238E27FC236}">
-                <a16:creationId xmlns:a16="http://schemas.microsoft.com/office/drawing/2014/main" id="{89512C04-EF41-43F1-9456-EA3A0D7B74BA}"/>
+                <a16:creationId xmlns:a16="http://schemas.microsoft.com/office/drawing/2014/main" id="{D051CE10-A4B5-4FB1-93F7-3CC02C589BB8}"/>
               </a:ext>
             </a:extLst>
           </p:cNvPr>
@@ -13884,7 +13884,7 @@
           <p:cNvPr id="14" name="Rechthoek + driehoek">
             <a:extLst xmlns:a="http://schemas.openxmlformats.org/drawingml/2006/main">
               <a:ext uri="{FF2B5EF4-FFF2-40B4-BE49-F238E27FC236}">
-                <a16:creationId xmlns:a16="http://schemas.microsoft.com/office/drawing/2014/main" id="{F74FA6AF-6B56-4319-AC58-91B2A6A5F2B5}"/>
+                <a16:creationId xmlns:a16="http://schemas.microsoft.com/office/drawing/2014/main" id="{41127714-CD80-4F3A-B873-1785A21E2D33}"/>
               </a:ext>
             </a:extLst>
           </p:cNvPr>
@@ -13941,7 +13941,7 @@
           <p:cNvPr id="15" name="30 × (45 − 35) = 300&#10;&#10;½ × 30 × (35 − 20)&#10;= 225&#10;&#10;Hoogten: € 1">
             <a:extLst xmlns:a="http://schemas.openxmlformats.org/drawingml/2006/main">
               <a:ext uri="{FF2B5EF4-FFF2-40B4-BE49-F238E27FC236}">
-                <a16:creationId xmlns:a16="http://schemas.microsoft.com/office/drawing/2014/main" id="{9B49FBD5-140B-476E-A006-896D8F672625}"/>
+                <a16:creationId xmlns:a16="http://schemas.microsoft.com/office/drawing/2014/main" id="{BDC9A4A5-86B2-41EF-A052-D18FC94E4102}"/>
               </a:ext>
             </a:extLst>
           </p:cNvPr>
@@ -14100,7 +14100,7 @@
           <p:cNvPr id="16" name="PS = 300 + 225&#10;     = € 525">
             <a:extLst xmlns:a="http://schemas.openxmlformats.org/drawingml/2006/main">
               <a:ext uri="{FF2B5EF4-FFF2-40B4-BE49-F238E27FC236}">
-                <a16:creationId xmlns:a16="http://schemas.microsoft.com/office/drawing/2014/main" id="{AACD1992-038E-4DEF-A3FE-810326AFA7C7}"/>
+                <a16:creationId xmlns:a16="http://schemas.microsoft.com/office/drawing/2014/main" id="{299A07BD-4E71-47E7-B589-5A90F95B7F6E}"/>
               </a:ext>
             </a:extLst>
           </p:cNvPr>
@@ -14178,7 +14178,7 @@
     </p:spTree>
     <p:extLst>
       <p:ext uri="{BB962C8B-B14F-4D97-AF65-F5344CB8AC3E}">
-        <p14:creationId xmlns:p14="http://schemas.microsoft.com/office/powerpoint/2010/main" val="109125031"/>
+        <p14:creationId xmlns:p14="http://schemas.microsoft.com/office/powerpoint/2010/main" val="223576046"/>
       </p:ext>
     </p:extLst>
   </p:cSld>
@@ -14209,7 +14209,7 @@
           <p:cNvPr id="8" name="Opgave 3.3 · Twee situaties vergelijken">
             <a:extLst xmlns:a="http://schemas.openxmlformats.org/drawingml/2006/main">
               <a:ext uri="{FF2B5EF4-FFF2-40B4-BE49-F238E27FC236}">
-                <a16:creationId xmlns:a16="http://schemas.microsoft.com/office/drawing/2014/main" id="{EF4B3A38-963C-4D9B-B658-E67CB7F0259F}"/>
+                <a16:creationId xmlns:a16="http://schemas.microsoft.com/office/drawing/2014/main" id="{4A8A8DFA-7734-4882-A4AE-388D5860410A}"/>
               </a:ext>
             </a:extLst>
           </p:cNvPr>
@@ -14266,7 +14266,7 @@
           <p:cNvPr id="2" name="">
             <a:extLst xmlns:a="http://schemas.openxmlformats.org/drawingml/2006/main">
               <a:ext uri="{FF2B5EF4-FFF2-40B4-BE49-F238E27FC236}">
-                <a16:creationId xmlns:a16="http://schemas.microsoft.com/office/drawing/2014/main" id="{6B681B8F-EF34-4489-BB1B-09EE1A3A0052}"/>
+                <a16:creationId xmlns:a16="http://schemas.microsoft.com/office/drawing/2014/main" id="{5C472CE1-2884-4558-B7B6-E25DAFFB4DCD}"/>
               </a:ext>
             </a:extLst>
           </p:cNvPr>
@@ -14295,7 +14295,7 @@
           <p:cNvPr id="3" name="footer">
             <a:extLst xmlns:a="http://schemas.openxmlformats.org/drawingml/2006/main">
               <a:ext uri="{FF2B5EF4-FFF2-40B4-BE49-F238E27FC236}">
-                <a16:creationId xmlns:a16="http://schemas.microsoft.com/office/drawing/2014/main" id="{819722D7-0629-4F53-9964-E1D0A91DF063}"/>
+                <a16:creationId xmlns:a16="http://schemas.microsoft.com/office/drawing/2014/main" id="{72E74192-AC65-4765-9957-38E9FABCC42F}"/>
               </a:ext>
             </a:extLst>
           </p:cNvPr>
@@ -14342,7 +14342,7 @@
                 <a:ea typeface="Arial"/>
                 <a:cs typeface="Arial"/>
               </a:rPr>
-              <a:t>§2.3.4 Gemengde opgaven · Opgave 3 · Boekpagina 104–105</a:t>
+              <a:t>§2.3.4 Gemengde opgaven · Opgave 3 · Boekpagina 105–106</a:t>
             </a:r>
           </a:p>
         </p:txBody>
@@ -14352,7 +14352,7 @@
           <p:cNvPr id="4" name="slide-number">
             <a:extLst xmlns:a="http://schemas.openxmlformats.org/drawingml/2006/main">
               <a:ext uri="{FF2B5EF4-FFF2-40B4-BE49-F238E27FC236}">
-                <a16:creationId xmlns:a16="http://schemas.microsoft.com/office/drawing/2014/main" id="{71CAAD63-E0CB-4F81-9E89-8FD290D82CD1}"/>
+                <a16:creationId xmlns:a16="http://schemas.microsoft.com/office/drawing/2014/main" id="{0384B809-F29E-48F2-A941-0D21592BCA69}"/>
               </a:ext>
             </a:extLst>
           </p:cNvPr>
@@ -14825,7 +14825,7 @@
           <p:cNvPr id="6" name="Onder de regel: TS = 600 + 525 = € 1.125">
             <a:extLst xmlns:a="http://schemas.openxmlformats.org/drawingml/2006/main">
               <a:ext uri="{FF2B5EF4-FFF2-40B4-BE49-F238E27FC236}">
-                <a16:creationId xmlns:a16="http://schemas.microsoft.com/office/drawing/2014/main" id="{901B6980-E2AC-4093-8A0D-4C2392964DD5}"/>
+                <a16:creationId xmlns:a16="http://schemas.microsoft.com/office/drawing/2014/main" id="{50C24827-394A-42F0-89AD-43E6FDD9C373}"/>
               </a:ext>
             </a:extLst>
           </p:cNvPr>
@@ -14882,7 +14882,7 @@
           <p:cNvPr id="7" name="Verhuurders krijgen meer voordeel; het gezamenlijke voordeel">
             <a:extLst xmlns:a="http://schemas.openxmlformats.org/drawingml/2006/main">
               <a:ext uri="{FF2B5EF4-FFF2-40B4-BE49-F238E27FC236}">
-                <a16:creationId xmlns:a16="http://schemas.microsoft.com/office/drawing/2014/main" id="{14D7FF0A-E5D7-435A-B0C0-D3357D65800D}"/>
+                <a16:creationId xmlns:a16="http://schemas.microsoft.com/office/drawing/2014/main" id="{4ADCD598-BB18-4E55-885C-58152525F2FC}"/>
               </a:ext>
             </a:extLst>
           </p:cNvPr>
@@ -14937,7 +14937,7 @@
     </p:spTree>
     <p:extLst>
       <p:ext uri="{BB962C8B-B14F-4D97-AF65-F5344CB8AC3E}">
-        <p14:creationId xmlns:p14="http://schemas.microsoft.com/office/powerpoint/2010/main" val="304748738"/>
+        <p14:creationId xmlns:p14="http://schemas.microsoft.com/office/powerpoint/2010/main" val="31196141"/>
       </p:ext>
     </p:extLst>
   </p:cSld>
@@ -14968,7 +14968,7 @@
           <p:cNvPr id="23" name="Opgave 3.4 · Welvaartsverlies">
             <a:extLst xmlns:a="http://schemas.openxmlformats.org/drawingml/2006/main">
               <a:ext uri="{FF2B5EF4-FFF2-40B4-BE49-F238E27FC236}">
-                <a16:creationId xmlns:a16="http://schemas.microsoft.com/office/drawing/2014/main" id="{92EF4000-D26E-44C2-8D23-186EAD4C64D3}"/>
+                <a16:creationId xmlns:a16="http://schemas.microsoft.com/office/drawing/2014/main" id="{04016B7C-AD4D-480C-9D8F-D1CB8DF62350}"/>
               </a:ext>
             </a:extLst>
           </p:cNvPr>
@@ -15025,7 +15025,7 @@
           <p:cNvPr id="2" name="">
             <a:extLst xmlns:a="http://schemas.openxmlformats.org/drawingml/2006/main">
               <a:ext uri="{FF2B5EF4-FFF2-40B4-BE49-F238E27FC236}">
-                <a16:creationId xmlns:a16="http://schemas.microsoft.com/office/drawing/2014/main" id="{65E72326-0A8D-40C9-9F5F-BB08367AC286}"/>
+                <a16:creationId xmlns:a16="http://schemas.microsoft.com/office/drawing/2014/main" id="{CBEC5F38-4347-4AD1-8E36-61B0F42BCB62}"/>
               </a:ext>
             </a:extLst>
           </p:cNvPr>
@@ -15054,7 +15054,7 @@
           <p:cNvPr id="3" name="footer">
             <a:extLst xmlns:a="http://schemas.openxmlformats.org/drawingml/2006/main">
               <a:ext uri="{FF2B5EF4-FFF2-40B4-BE49-F238E27FC236}">
-                <a16:creationId xmlns:a16="http://schemas.microsoft.com/office/drawing/2014/main" id="{D9969708-C32E-4D78-844C-EFC2260740AB}"/>
+                <a16:creationId xmlns:a16="http://schemas.microsoft.com/office/drawing/2014/main" id="{5C31EF38-C1D8-4E67-B387-31642002E6C0}"/>
               </a:ext>
             </a:extLst>
           </p:cNvPr>
@@ -15101,7 +15101,7 @@
                 <a:ea typeface="Arial"/>
                 <a:cs typeface="Arial"/>
               </a:rPr>
-              <a:t>§2.3.4 Gemengde opgaven · Opgave 3 · Boekpagina 104–105</a:t>
+              <a:t>§2.3.4 Gemengde opgaven · Opgave 3 · Boekpagina 105–106</a:t>
             </a:r>
           </a:p>
         </p:txBody>
@@ -15111,7 +15111,7 @@
           <p:cNvPr id="4" name="slide-number">
             <a:extLst xmlns:a="http://schemas.openxmlformats.org/drawingml/2006/main">
               <a:ext uri="{FF2B5EF4-FFF2-40B4-BE49-F238E27FC236}">
-                <a16:creationId xmlns:a16="http://schemas.microsoft.com/office/drawing/2014/main" id="{2BD99AC9-D396-4294-B146-AD10D1EF754B}"/>
+                <a16:creationId xmlns:a16="http://schemas.microsoft.com/office/drawing/2014/main" id="{69F0A297-81DE-4490-B198-4FFA2CE36D81}"/>
               </a:ext>
             </a:extLst>
           </p:cNvPr>
@@ -15168,7 +15168,7 @@
           <p:cNvPr id="5" name="area-loss">
             <a:extLst xmlns:a="http://schemas.openxmlformats.org/drawingml/2006/main">
               <a:ext uri="{FF2B5EF4-FFF2-40B4-BE49-F238E27FC236}">
-                <a16:creationId xmlns:a16="http://schemas.microsoft.com/office/drawing/2014/main" id="{7C725274-B459-4498-8592-E27DA357BA10}"/>
+                <a16:creationId xmlns:a16="http://schemas.microsoft.com/office/drawing/2014/main" id="{6D3CF918-B093-4112-8293-6FA9EED96EF8}"/>
               </a:ext>
             </a:extLst>
           </p:cNvPr>
@@ -15218,7 +15218,7 @@
         </p:xfrm>
         <a:graphic xmlns:a="http://schemas.openxmlformats.org/drawingml/2006/main">
           <a:graphicData uri="http://schemas.openxmlformats.org/drawingml/2006/chart">
-            <c:chart xmlns:r="http://schemas.openxmlformats.org/officeDocument/2006/relationships" xmlns:c="http://schemas.openxmlformats.org/drawingml/2006/chart" r:id="Rd6730dfcd9d84cf5"/>
+            <c:chart xmlns:r="http://schemas.openxmlformats.org/officeDocument/2006/relationships" xmlns:c="http://schemas.openxmlformats.org/drawingml/2006/chart" r:id="R3ab974c71e5b4f46"/>
           </a:graphicData>
         </a:graphic>
       </p:graphicFrame>
@@ -15227,7 +15227,7 @@
           <p:cNvPr id="7" name="V">
             <a:extLst xmlns:a="http://schemas.openxmlformats.org/drawingml/2006/main">
               <a:ext uri="{FF2B5EF4-FFF2-40B4-BE49-F238E27FC236}">
-                <a16:creationId xmlns:a16="http://schemas.microsoft.com/office/drawing/2014/main" id="{2D726BFE-E2F4-48F0-AA8E-BA726802CB14}"/>
+                <a16:creationId xmlns:a16="http://schemas.microsoft.com/office/drawing/2014/main" id="{30DDAE6F-725E-4F4B-A572-E92F66F84F81}"/>
               </a:ext>
             </a:extLst>
           </p:cNvPr>
@@ -15284,7 +15284,7 @@
           <p:cNvPr id="8" name="A = MK">
             <a:extLst xmlns:a="http://schemas.openxmlformats.org/drawingml/2006/main">
               <a:ext uri="{FF2B5EF4-FFF2-40B4-BE49-F238E27FC236}">
-                <a16:creationId xmlns:a16="http://schemas.microsoft.com/office/drawing/2014/main" id="{61B9AC3D-92EE-4CF8-B840-16FAFD6F3180}"/>
+                <a16:creationId xmlns:a16="http://schemas.microsoft.com/office/drawing/2014/main" id="{9A218344-572B-44F0-AF71-261970C9710C}"/>
               </a:ext>
             </a:extLst>
           </p:cNvPr>
@@ -15341,7 +15341,7 @@
           <p:cNvPr id="9" name="E">
             <a:extLst xmlns:a="http://schemas.openxmlformats.org/drawingml/2006/main">
               <a:ext uri="{FF2B5EF4-FFF2-40B4-BE49-F238E27FC236}">
-                <a16:creationId xmlns:a16="http://schemas.microsoft.com/office/drawing/2014/main" id="{548AEA8F-C00B-46E6-83D4-2076EB47C587}"/>
+                <a16:creationId xmlns:a16="http://schemas.microsoft.com/office/drawing/2014/main" id="{4B996BCE-9BEB-45CC-B145-968C3BA4C2C3}"/>
               </a:ext>
             </a:extLst>
           </p:cNvPr>
@@ -15398,7 +15398,7 @@
           <p:cNvPr id="10" name="P = 45">
             <a:extLst xmlns:a="http://schemas.openxmlformats.org/drawingml/2006/main">
               <a:ext uri="{FF2B5EF4-FFF2-40B4-BE49-F238E27FC236}">
-                <a16:creationId xmlns:a16="http://schemas.microsoft.com/office/drawing/2014/main" id="{09728EFD-A01F-4A40-8259-2DAB01339D69}"/>
+                <a16:creationId xmlns:a16="http://schemas.microsoft.com/office/drawing/2014/main" id="{737B0F73-B14F-4929-8780-AFF80C5EBE40}"/>
               </a:ext>
             </a:extLst>
           </p:cNvPr>
@@ -15455,7 +15455,7 @@
           <p:cNvPr id="11" name="Q = 30">
             <a:extLst xmlns:a="http://schemas.openxmlformats.org/drawingml/2006/main">
               <a:ext uri="{FF2B5EF4-FFF2-40B4-BE49-F238E27FC236}">
-                <a16:creationId xmlns:a16="http://schemas.microsoft.com/office/drawing/2014/main" id="{0A19136C-3FA9-4106-B24F-ADA2974EB4C6}"/>
+                <a16:creationId xmlns:a16="http://schemas.microsoft.com/office/drawing/2014/main" id="{CA24A49B-5C13-41AF-98BC-DC96E6047E55}"/>
               </a:ext>
             </a:extLst>
           </p:cNvPr>
@@ -15512,7 +15512,7 @@
           <p:cNvPr id="12" name="loss-hatch-31">
             <a:extLst xmlns:a="http://schemas.openxmlformats.org/drawingml/2006/main">
               <a:ext uri="{FF2B5EF4-FFF2-40B4-BE49-F238E27FC236}">
-                <a16:creationId xmlns:a16="http://schemas.microsoft.com/office/drawing/2014/main" id="{952CBA0C-B472-4F0D-B395-EA34387B7FED}"/>
+                <a16:creationId xmlns:a16="http://schemas.microsoft.com/office/drawing/2014/main" id="{4D4CFFB8-7A28-4509-A3BF-2F436EB6FBD3}"/>
               </a:ext>
             </a:extLst>
           </p:cNvPr>
@@ -15541,7 +15541,7 @@
           <p:cNvPr id="13" name="loss-hatch-32.5">
             <a:extLst xmlns:a="http://schemas.openxmlformats.org/drawingml/2006/main">
               <a:ext uri="{FF2B5EF4-FFF2-40B4-BE49-F238E27FC236}">
-                <a16:creationId xmlns:a16="http://schemas.microsoft.com/office/drawing/2014/main" id="{15A31B51-43EA-4CEF-93A9-22EC5D3D9125}"/>
+                <a16:creationId xmlns:a16="http://schemas.microsoft.com/office/drawing/2014/main" id="{F23B772B-1755-4051-A158-2EA4716579F6}"/>
               </a:ext>
             </a:extLst>
           </p:cNvPr>
@@ -15570,7 +15570,7 @@
           <p:cNvPr id="14" name="loss-hatch-34">
             <a:extLst xmlns:a="http://schemas.openxmlformats.org/drawingml/2006/main">
               <a:ext uri="{FF2B5EF4-FFF2-40B4-BE49-F238E27FC236}">
-                <a16:creationId xmlns:a16="http://schemas.microsoft.com/office/drawing/2014/main" id="{B9AB0131-E05A-4FD9-A854-5097C97F6237}"/>
+                <a16:creationId xmlns:a16="http://schemas.microsoft.com/office/drawing/2014/main" id="{6D0E2531-F117-4986-866D-E093CBF5BC7A}"/>
               </a:ext>
             </a:extLst>
           </p:cNvPr>
@@ -15599,7 +15599,7 @@
           <p:cNvPr id="15" name="loss-hatch-35.5">
             <a:extLst xmlns:a="http://schemas.openxmlformats.org/drawingml/2006/main">
               <a:ext uri="{FF2B5EF4-FFF2-40B4-BE49-F238E27FC236}">
-                <a16:creationId xmlns:a16="http://schemas.microsoft.com/office/drawing/2014/main" id="{874B72D7-7930-4A78-A316-48C1FDE0B4DF}"/>
+                <a16:creationId xmlns:a16="http://schemas.microsoft.com/office/drawing/2014/main" id="{6806B510-B61A-4BD1-A4D8-FEC41DEC551B}"/>
               </a:ext>
             </a:extLst>
           </p:cNvPr>
@@ -15628,7 +15628,7 @@
           <p:cNvPr id="16" name="loss-hatch-37">
             <a:extLst xmlns:a="http://schemas.openxmlformats.org/drawingml/2006/main">
               <a:ext uri="{FF2B5EF4-FFF2-40B4-BE49-F238E27FC236}">
-                <a16:creationId xmlns:a16="http://schemas.microsoft.com/office/drawing/2014/main" id="{AC841004-8E16-4709-990F-E502AD8F456E}"/>
+                <a16:creationId xmlns:a16="http://schemas.microsoft.com/office/drawing/2014/main" id="{89A431B7-C022-4B97-B9E9-9A4440D28DE1}"/>
               </a:ext>
             </a:extLst>
           </p:cNvPr>
@@ -15657,7 +15657,7 @@
           <p:cNvPr id="17" name="loss-hatch-38.5">
             <a:extLst xmlns:a="http://schemas.openxmlformats.org/drawingml/2006/main">
               <a:ext uri="{FF2B5EF4-FFF2-40B4-BE49-F238E27FC236}">
-                <a16:creationId xmlns:a16="http://schemas.microsoft.com/office/drawing/2014/main" id="{DEA8F0E8-399E-4013-8C12-724F2FBDCEC2}"/>
+                <a16:creationId xmlns:a16="http://schemas.microsoft.com/office/drawing/2014/main" id="{2D5DCB15-ECDF-4D90-B24D-54A40C3EA133}"/>
               </a:ext>
             </a:extLst>
           </p:cNvPr>
@@ -15686,7 +15686,7 @@
           <p:cNvPr id="18" name="Welvaartsverlies">
             <a:extLst xmlns:a="http://schemas.openxmlformats.org/drawingml/2006/main">
               <a:ext uri="{FF2B5EF4-FFF2-40B4-BE49-F238E27FC236}">
-                <a16:creationId xmlns:a16="http://schemas.microsoft.com/office/drawing/2014/main" id="{57B07624-2705-4816-A2DA-D54ED0A642FD}"/>
+                <a16:creationId xmlns:a16="http://schemas.microsoft.com/office/drawing/2014/main" id="{EA8071CF-009E-480C-826F-82C43AEEFB7D}"/>
               </a:ext>
             </a:extLst>
           </p:cNvPr>
@@ -15743,7 +15743,7 @@
           <p:cNvPr id="19" name="loss-leader">
             <a:extLst xmlns:a="http://schemas.openxmlformats.org/drawingml/2006/main">
               <a:ext uri="{FF2B5EF4-FFF2-40B4-BE49-F238E27FC236}">
-                <a16:creationId xmlns:a16="http://schemas.microsoft.com/office/drawing/2014/main" id="{F9DD2612-3779-4FE8-8929-6B25D18E2E02}"/>
+                <a16:creationId xmlns:a16="http://schemas.microsoft.com/office/drawing/2014/main" id="{7FADF6A3-EDD6-4D13-A7A4-23010DB0F59F}"/>
               </a:ext>
             </a:extLst>
           </p:cNvPr>
@@ -15772,7 +15772,7 @@
           <p:cNvPr id="20" name="Verschil in TS">
             <a:extLst xmlns:a="http://schemas.openxmlformats.org/drawingml/2006/main">
               <a:ext uri="{FF2B5EF4-FFF2-40B4-BE49-F238E27FC236}">
-                <a16:creationId xmlns:a16="http://schemas.microsoft.com/office/drawing/2014/main" id="{925C9527-C5C3-437E-A9E0-33FC7D84BA67}"/>
+                <a16:creationId xmlns:a16="http://schemas.microsoft.com/office/drawing/2014/main" id="{55C578CA-7D47-40A4-AFFA-4089360D80CA}"/>
               </a:ext>
             </a:extLst>
           </p:cNvPr>
@@ -15829,7 +15829,7 @@
           <p:cNvPr id="21" name="1.200 − 1.125 = € 75&#10;&#10;Basis: 40 − 30 = 10&#10;huurfietsen&#10;Hoogte">
             <a:extLst xmlns:a="http://schemas.openxmlformats.org/drawingml/2006/main">
               <a:ext uri="{FF2B5EF4-FFF2-40B4-BE49-F238E27FC236}">
-                <a16:creationId xmlns:a16="http://schemas.microsoft.com/office/drawing/2014/main" id="{F58DC38D-2D98-44CC-86DE-53BC76AF833C}"/>
+                <a16:creationId xmlns:a16="http://schemas.microsoft.com/office/drawing/2014/main" id="{D136079E-05BB-4A69-8908-5F72AC33C96D}"/>
               </a:ext>
             </a:extLst>
           </p:cNvPr>
@@ -15983,7 +15983,7 @@
           <p:cNvPr id="22" name="½ × 10 × 15 = € 75">
             <a:extLst xmlns:a="http://schemas.openxmlformats.org/drawingml/2006/main">
               <a:ext uri="{FF2B5EF4-FFF2-40B4-BE49-F238E27FC236}">
-                <a16:creationId xmlns:a16="http://schemas.microsoft.com/office/drawing/2014/main" id="{7D865AD4-9CCC-4DC8-A834-55DEFD8A529D}"/>
+                <a16:creationId xmlns:a16="http://schemas.microsoft.com/office/drawing/2014/main" id="{EA5DDC03-F0C7-44DC-89DE-A09FFDB39E98}"/>
               </a:ext>
             </a:extLst>
           </p:cNvPr>
@@ -16038,7 +16038,7 @@
     </p:spTree>
     <p:extLst>
       <p:ext uri="{BB962C8B-B14F-4D97-AF65-F5344CB8AC3E}">
-        <p14:creationId xmlns:p14="http://schemas.microsoft.com/office/powerpoint/2010/main" val="1644446956"/>
+        <p14:creationId xmlns:p14="http://schemas.microsoft.com/office/powerpoint/2010/main" val="885642352"/>
       </p:ext>
     </p:extLst>
   </p:cSld>
@@ -16069,7 +16069,7 @@
           <p:cNvPr id="16" name="Aanpak bij gemengde opgaven">
             <a:extLst xmlns:a="http://schemas.openxmlformats.org/drawingml/2006/main">
               <a:ext uri="{FF2B5EF4-FFF2-40B4-BE49-F238E27FC236}">
-                <a16:creationId xmlns:a16="http://schemas.microsoft.com/office/drawing/2014/main" id="{E1991C1D-EFAC-4E6E-9F17-4C3AF5E4F4C0}"/>
+                <a16:creationId xmlns:a16="http://schemas.microsoft.com/office/drawing/2014/main" id="{0FA77918-B474-46D7-87BE-5B890694F3E2}"/>
               </a:ext>
             </a:extLst>
           </p:cNvPr>
@@ -16126,7 +16126,7 @@
           <p:cNvPr id="2" name="">
             <a:extLst xmlns:a="http://schemas.openxmlformats.org/drawingml/2006/main">
               <a:ext uri="{FF2B5EF4-FFF2-40B4-BE49-F238E27FC236}">
-                <a16:creationId xmlns:a16="http://schemas.microsoft.com/office/drawing/2014/main" id="{D9A398C0-49D1-41DD-9047-0B0971732F0D}"/>
+                <a16:creationId xmlns:a16="http://schemas.microsoft.com/office/drawing/2014/main" id="{956E4310-1FEC-4C10-8897-F17999A41410}"/>
               </a:ext>
             </a:extLst>
           </p:cNvPr>
@@ -16155,7 +16155,7 @@
           <p:cNvPr id="3" name="footer">
             <a:extLst xmlns:a="http://schemas.openxmlformats.org/drawingml/2006/main">
               <a:ext uri="{FF2B5EF4-FFF2-40B4-BE49-F238E27FC236}">
-                <a16:creationId xmlns:a16="http://schemas.microsoft.com/office/drawing/2014/main" id="{E730BFDC-EF19-48B4-AC73-052B44552EF2}"/>
+                <a16:creationId xmlns:a16="http://schemas.microsoft.com/office/drawing/2014/main" id="{53CF00F7-6167-4D11-A19A-D5697B8568EA}"/>
               </a:ext>
             </a:extLst>
           </p:cNvPr>
@@ -16212,7 +16212,7 @@
           <p:cNvPr id="4" name="slide-number">
             <a:extLst xmlns:a="http://schemas.openxmlformats.org/drawingml/2006/main">
               <a:ext uri="{FF2B5EF4-FFF2-40B4-BE49-F238E27FC236}">
-                <a16:creationId xmlns:a16="http://schemas.microsoft.com/office/drawing/2014/main" id="{F0BC1E85-16B2-49FE-8351-DA394B731F82}"/>
+                <a16:creationId xmlns:a16="http://schemas.microsoft.com/office/drawing/2014/main" id="{E5AF6472-6077-43B6-B2E9-5437102E6934}"/>
               </a:ext>
             </a:extLst>
           </p:cNvPr>
@@ -16269,7 +16269,7 @@
           <p:cNvPr id="5" name="1 · Hoeveelheid">
             <a:extLst xmlns:a="http://schemas.openxmlformats.org/drawingml/2006/main">
               <a:ext uri="{FF2B5EF4-FFF2-40B4-BE49-F238E27FC236}">
-                <a16:creationId xmlns:a16="http://schemas.microsoft.com/office/drawing/2014/main" id="{0112B717-4E5A-41DF-A6E7-DF221797BE7D}"/>
+                <a16:creationId xmlns:a16="http://schemas.microsoft.com/office/drawing/2014/main" id="{EC06718A-621B-4181-A914-06CA335D3424}"/>
               </a:ext>
             </a:extLst>
           </p:cNvPr>
@@ -16326,7 +16326,7 @@
           <p:cNvPr id="6" name="Vrij evenwicht of werkelijke transacties?">
             <a:extLst xmlns:a="http://schemas.openxmlformats.org/drawingml/2006/main">
               <a:ext uri="{FF2B5EF4-FFF2-40B4-BE49-F238E27FC236}">
-                <a16:creationId xmlns:a16="http://schemas.microsoft.com/office/drawing/2014/main" id="{1E84248B-9C0D-4D51-BB84-7E9C1F3D0BE5}"/>
+                <a16:creationId xmlns:a16="http://schemas.microsoft.com/office/drawing/2014/main" id="{B2DE6908-7D26-4CCE-8673-B68AA444E9DD}"/>
               </a:ext>
             </a:extLst>
           </p:cNvPr>
@@ -16383,7 +16383,7 @@
           <p:cNvPr id="7" name="">
             <a:extLst xmlns:a="http://schemas.openxmlformats.org/drawingml/2006/main">
               <a:ext uri="{FF2B5EF4-FFF2-40B4-BE49-F238E27FC236}">
-                <a16:creationId xmlns:a16="http://schemas.microsoft.com/office/drawing/2014/main" id="{1415279F-C490-4C93-BAA6-246E5EE43225}"/>
+                <a16:creationId xmlns:a16="http://schemas.microsoft.com/office/drawing/2014/main" id="{9EA4DA36-9F0D-4C6E-85ED-311F52F55E1E}"/>
               </a:ext>
             </a:extLst>
           </p:cNvPr>
@@ -16412,7 +16412,7 @@
           <p:cNvPr id="8" name="2 · Gebied">
             <a:extLst xmlns:a="http://schemas.openxmlformats.org/drawingml/2006/main">
               <a:ext uri="{FF2B5EF4-FFF2-40B4-BE49-F238E27FC236}">
-                <a16:creationId xmlns:a16="http://schemas.microsoft.com/office/drawing/2014/main" id="{C6135D40-DFEB-4AEA-B3B9-8D7C2832C252}"/>
+                <a16:creationId xmlns:a16="http://schemas.microsoft.com/office/drawing/2014/main" id="{798E6388-B27C-4C24-ADCC-0C668B409B5D}"/>
               </a:ext>
             </a:extLst>
           </p:cNvPr>
@@ -16469,7 +16469,7 @@
           <p:cNvPr id="9" name="Wie handelt? Waar stoppen CS en PS?">
             <a:extLst xmlns:a="http://schemas.openxmlformats.org/drawingml/2006/main">
               <a:ext uri="{FF2B5EF4-FFF2-40B4-BE49-F238E27FC236}">
-                <a16:creationId xmlns:a16="http://schemas.microsoft.com/office/drawing/2014/main" id="{FB83860C-5907-43E3-B290-756C900A2357}"/>
+                <a16:creationId xmlns:a16="http://schemas.microsoft.com/office/drawing/2014/main" id="{7886EB2B-53C3-454A-9D91-5CC0FCC6E822}"/>
               </a:ext>
             </a:extLst>
           </p:cNvPr>
@@ -16526,7 +16526,7 @@
           <p:cNvPr id="10" name="">
             <a:extLst xmlns:a="http://schemas.openxmlformats.org/drawingml/2006/main">
               <a:ext uri="{FF2B5EF4-FFF2-40B4-BE49-F238E27FC236}">
-                <a16:creationId xmlns:a16="http://schemas.microsoft.com/office/drawing/2014/main" id="{E9B1A33E-35EC-4C6E-98C7-0F1E958FF7D7}"/>
+                <a16:creationId xmlns:a16="http://schemas.microsoft.com/office/drawing/2014/main" id="{656A083C-ACE2-499F-ABF3-D6B03DF42E7C}"/>
               </a:ext>
             </a:extLst>
           </p:cNvPr>
@@ -16555,7 +16555,7 @@
           <p:cNvPr id="11" name="3 · Berekening">
             <a:extLst xmlns:a="http://schemas.openxmlformats.org/drawingml/2006/main">
               <a:ext uri="{FF2B5EF4-FFF2-40B4-BE49-F238E27FC236}">
-                <a16:creationId xmlns:a16="http://schemas.microsoft.com/office/drawing/2014/main" id="{8A89C489-0E6C-4D82-98EB-81BEB5A77FCB}"/>
+                <a16:creationId xmlns:a16="http://schemas.microsoft.com/office/drawing/2014/main" id="{BC9231C8-E2B1-4928-8210-8A829B2621AD}"/>
               </a:ext>
             </a:extLst>
           </p:cNvPr>
@@ -16612,7 +16612,7 @@
           <p:cNvPr id="12" name="Basis en hoogte, euro’s, daarna CS + PS.">
             <a:extLst xmlns:a="http://schemas.openxmlformats.org/drawingml/2006/main">
               <a:ext uri="{FF2B5EF4-FFF2-40B4-BE49-F238E27FC236}">
-                <a16:creationId xmlns:a16="http://schemas.microsoft.com/office/drawing/2014/main" id="{7EF5E1C4-43FE-41E5-A7E0-F44B50FACB73}"/>
+                <a16:creationId xmlns:a16="http://schemas.microsoft.com/office/drawing/2014/main" id="{B7113EB1-004D-4433-9ACD-D53F12F9F263}"/>
               </a:ext>
             </a:extLst>
           </p:cNvPr>
@@ -16669,7 +16669,7 @@
           <p:cNvPr id="13" name="">
             <a:extLst xmlns:a="http://schemas.openxmlformats.org/drawingml/2006/main">
               <a:ext uri="{FF2B5EF4-FFF2-40B4-BE49-F238E27FC236}">
-                <a16:creationId xmlns:a16="http://schemas.microsoft.com/office/drawing/2014/main" id="{FDD55606-2729-4C86-BA09-278D4A8B7B81}"/>
+                <a16:creationId xmlns:a16="http://schemas.microsoft.com/office/drawing/2014/main" id="{A2A01FA4-62AA-4822-A7C9-4E0FF3B67054}"/>
               </a:ext>
             </a:extLst>
           </p:cNvPr>
@@ -16698,7 +16698,7 @@
           <p:cNvPr id="14" name="4 · Beoordeling">
             <a:extLst xmlns:a="http://schemas.openxmlformats.org/drawingml/2006/main">
               <a:ext uri="{FF2B5EF4-FFF2-40B4-BE49-F238E27FC236}">
-                <a16:creationId xmlns:a16="http://schemas.microsoft.com/office/drawing/2014/main" id="{D401356E-E27A-49CE-93A7-F3B0172A6F19}"/>
+                <a16:creationId xmlns:a16="http://schemas.microsoft.com/office/drawing/2014/main" id="{DCD3AECF-7C65-48B0-ADF7-BD3BCC742262}"/>
               </a:ext>
             </a:extLst>
           </p:cNvPr>
@@ -16755,7 +16755,7 @@
           <p:cNvPr id="15" name="Verlies, haalbare verbetering en eerlijkheid.">
             <a:extLst xmlns:a="http://schemas.openxmlformats.org/drawingml/2006/main">
               <a:ext uri="{FF2B5EF4-FFF2-40B4-BE49-F238E27FC236}">
-                <a16:creationId xmlns:a16="http://schemas.microsoft.com/office/drawing/2014/main" id="{343F63FA-2BBB-46A9-B766-59419324410E}"/>
+                <a16:creationId xmlns:a16="http://schemas.microsoft.com/office/drawing/2014/main" id="{6D225525-E335-455B-968D-7CFA80EF2AFC}"/>
               </a:ext>
             </a:extLst>
           </p:cNvPr>
@@ -16810,7 +16810,7 @@
     </p:spTree>
     <p:extLst>
       <p:ext uri="{BB962C8B-B14F-4D97-AF65-F5344CB8AC3E}">
-        <p14:creationId xmlns:p14="http://schemas.microsoft.com/office/powerpoint/2010/main" val="1194754753"/>
+        <p14:creationId xmlns:p14="http://schemas.microsoft.com/office/powerpoint/2010/main" val="1642958320"/>
       </p:ext>
     </p:extLst>
   </p:cSld>
@@ -16841,7 +16841,7 @@
           <p:cNvPr id="9" name="Opgave 3.5 · De mogelijke 31e transactie">
             <a:extLst xmlns:a="http://schemas.openxmlformats.org/drawingml/2006/main">
               <a:ext uri="{FF2B5EF4-FFF2-40B4-BE49-F238E27FC236}">
-                <a16:creationId xmlns:a16="http://schemas.microsoft.com/office/drawing/2014/main" id="{2F358BA1-4B91-45BC-882D-378BA623E5F6}"/>
+                <a16:creationId xmlns:a16="http://schemas.microsoft.com/office/drawing/2014/main" id="{BBDC40DF-A522-4262-9875-C9580D2D542D}"/>
               </a:ext>
             </a:extLst>
           </p:cNvPr>
@@ -16898,7 +16898,7 @@
           <p:cNvPr id="2" name="">
             <a:extLst xmlns:a="http://schemas.openxmlformats.org/drawingml/2006/main">
               <a:ext uri="{FF2B5EF4-FFF2-40B4-BE49-F238E27FC236}">
-                <a16:creationId xmlns:a16="http://schemas.microsoft.com/office/drawing/2014/main" id="{F9F9F0D4-610D-45F7-8F85-5946F9297844}"/>
+                <a16:creationId xmlns:a16="http://schemas.microsoft.com/office/drawing/2014/main" id="{43ABB9C6-47E3-4123-A222-ED8AF60ECDC5}"/>
               </a:ext>
             </a:extLst>
           </p:cNvPr>
@@ -16927,7 +16927,7 @@
           <p:cNvPr id="3" name="footer">
             <a:extLst xmlns:a="http://schemas.openxmlformats.org/drawingml/2006/main">
               <a:ext uri="{FF2B5EF4-FFF2-40B4-BE49-F238E27FC236}">
-                <a16:creationId xmlns:a16="http://schemas.microsoft.com/office/drawing/2014/main" id="{0013A63F-11FF-45F8-96B5-BD2D5614C7A6}"/>
+                <a16:creationId xmlns:a16="http://schemas.microsoft.com/office/drawing/2014/main" id="{49DE94B9-3A4B-4D68-B15A-9A9DE93036C0}"/>
               </a:ext>
             </a:extLst>
           </p:cNvPr>
@@ -16974,7 +16974,7 @@
                 <a:ea typeface="Arial"/>
                 <a:cs typeface="Arial"/>
               </a:rPr>
-              <a:t>§2.3.4 Gemengde opgaven · Opgave 3 · Boekpagina 104–105</a:t>
+              <a:t>§2.3.4 Gemengde opgaven · Opgave 3 · Boekpagina 105–106</a:t>
             </a:r>
           </a:p>
         </p:txBody>
@@ -16984,7 +16984,7 @@
           <p:cNvPr id="4" name="slide-number">
             <a:extLst xmlns:a="http://schemas.openxmlformats.org/drawingml/2006/main">
               <a:ext uri="{FF2B5EF4-FFF2-40B4-BE49-F238E27FC236}">
-                <a16:creationId xmlns:a16="http://schemas.microsoft.com/office/drawing/2014/main" id="{96C37485-A781-4BAA-BA0F-817439625E43}"/>
+                <a16:creationId xmlns:a16="http://schemas.microsoft.com/office/drawing/2014/main" id="{414EB5FB-4D04-4995-9369-C9FB7A33CF31}"/>
               </a:ext>
             </a:extLst>
           </p:cNvPr>
@@ -17041,7 +17041,7 @@
           <p:cNvPr id="5" name="PS stijgt: € 400 naar € 525. TS daalt: € 1.200 naar € 1.125.">
             <a:extLst xmlns:a="http://schemas.openxmlformats.org/drawingml/2006/main">
               <a:ext uri="{FF2B5EF4-FFF2-40B4-BE49-F238E27FC236}">
-                <a16:creationId xmlns:a16="http://schemas.microsoft.com/office/drawing/2014/main" id="{98D13A5D-9DA7-4D9F-AEF8-4FC8DAC8F4AE}"/>
+                <a16:creationId xmlns:a16="http://schemas.microsoft.com/office/drawing/2014/main" id="{B9319E97-C88E-45B2-88BC-DA23B22D2C1F}"/>
               </a:ext>
             </a:extLst>
           </p:cNvPr>
@@ -17270,7 +17270,7 @@
           <p:cNvPr id="7" name="Haalbaar: technische ruimte en kosteloze verruiming.&#10;Niemand">
             <a:extLst xmlns:a="http://schemas.openxmlformats.org/drawingml/2006/main">
               <a:ext uri="{FF2B5EF4-FFF2-40B4-BE49-F238E27FC236}">
-                <a16:creationId xmlns:a16="http://schemas.microsoft.com/office/drawing/2014/main" id="{832F42CB-ABBB-478A-AB08-4F634F02608A}"/>
+                <a16:creationId xmlns:a16="http://schemas.microsoft.com/office/drawing/2014/main" id="{21F3D857-5CFB-4A90-B53D-7F3E75D448DB}"/>
               </a:ext>
             </a:extLst>
           </p:cNvPr>
@@ -17350,7 +17350,7 @@
           <p:cNvPr id="8" name="Een Paretoverbetering is mogelijk. De beperking is niet Pare">
             <a:extLst xmlns:a="http://schemas.openxmlformats.org/drawingml/2006/main">
               <a:ext uri="{FF2B5EF4-FFF2-40B4-BE49-F238E27FC236}">
-                <a16:creationId xmlns:a16="http://schemas.microsoft.com/office/drawing/2014/main" id="{3FE9CB4F-44B3-4F6F-955E-F0E35FA3CE1A}"/>
+                <a16:creationId xmlns:a16="http://schemas.microsoft.com/office/drawing/2014/main" id="{64E161A6-28BB-4A2F-836C-0E84B395FB50}"/>
               </a:ext>
             </a:extLst>
           </p:cNvPr>
@@ -17405,7 +17405,7 @@
     </p:spTree>
     <p:extLst>
       <p:ext uri="{BB962C8B-B14F-4D97-AF65-F5344CB8AC3E}">
-        <p14:creationId xmlns:p14="http://schemas.microsoft.com/office/powerpoint/2010/main" val="1795998005"/>
+        <p14:creationId xmlns:p14="http://schemas.microsoft.com/office/powerpoint/2010/main" val="740082481"/>
       </p:ext>
     </p:extLst>
   </p:cSld>
@@ -17436,7 +17436,7 @@
           <p:cNvPr id="8" name="Opgave 3.6 · Efficiëntie en eerlijkheid">
             <a:extLst xmlns:a="http://schemas.openxmlformats.org/drawingml/2006/main">
               <a:ext uri="{FF2B5EF4-FFF2-40B4-BE49-F238E27FC236}">
-                <a16:creationId xmlns:a16="http://schemas.microsoft.com/office/drawing/2014/main" id="{2703A4EC-C367-4E21-BA66-8087D532C24D}"/>
+                <a16:creationId xmlns:a16="http://schemas.microsoft.com/office/drawing/2014/main" id="{39818AE8-8AEC-44AC-B6F8-9AF9BA7B64EE}"/>
               </a:ext>
             </a:extLst>
           </p:cNvPr>
@@ -17493,7 +17493,7 @@
           <p:cNvPr id="2" name="">
             <a:extLst xmlns:a="http://schemas.openxmlformats.org/drawingml/2006/main">
               <a:ext uri="{FF2B5EF4-FFF2-40B4-BE49-F238E27FC236}">
-                <a16:creationId xmlns:a16="http://schemas.microsoft.com/office/drawing/2014/main" id="{3267F5D2-F241-4806-A68D-B9D589D90DB9}"/>
+                <a16:creationId xmlns:a16="http://schemas.microsoft.com/office/drawing/2014/main" id="{650A990C-2474-4B5E-B22B-15B08455AC15}"/>
               </a:ext>
             </a:extLst>
           </p:cNvPr>
@@ -17522,7 +17522,7 @@
           <p:cNvPr id="3" name="footer">
             <a:extLst xmlns:a="http://schemas.openxmlformats.org/drawingml/2006/main">
               <a:ext uri="{FF2B5EF4-FFF2-40B4-BE49-F238E27FC236}">
-                <a16:creationId xmlns:a16="http://schemas.microsoft.com/office/drawing/2014/main" id="{6BEFE111-B40C-445C-A0E4-3654076AE019}"/>
+                <a16:creationId xmlns:a16="http://schemas.microsoft.com/office/drawing/2014/main" id="{72ED4191-4093-4D76-B7C2-66DE5465BCB0}"/>
               </a:ext>
             </a:extLst>
           </p:cNvPr>
@@ -17569,7 +17569,7 @@
                 <a:ea typeface="Arial"/>
                 <a:cs typeface="Arial"/>
               </a:rPr>
-              <a:t>§2.3.4 Gemengde opgaven · Opgave 3 · Boekpagina 104–105</a:t>
+              <a:t>§2.3.4 Gemengde opgaven · Opgave 3 · Boekpagina 105–106</a:t>
             </a:r>
           </a:p>
         </p:txBody>
@@ -17579,7 +17579,7 @@
           <p:cNvPr id="4" name="slide-number">
             <a:extLst xmlns:a="http://schemas.openxmlformats.org/drawingml/2006/main">
               <a:ext uri="{FF2B5EF4-FFF2-40B4-BE49-F238E27FC236}">
-                <a16:creationId xmlns:a16="http://schemas.microsoft.com/office/drawing/2014/main" id="{ECD9BECE-2601-4710-889F-CA157F60E96E}"/>
+                <a16:creationId xmlns:a16="http://schemas.microsoft.com/office/drawing/2014/main" id="{79627C3C-81D4-4345-A7D5-E22AF83CEFC7}"/>
               </a:ext>
             </a:extLst>
           </p:cNvPr>
@@ -17858,7 +17858,7 @@
           <p:cNvPr id="6" name="De efficiëntievergelijking bepaalt niet welke verdeling eerl">
             <a:extLst xmlns:a="http://schemas.openxmlformats.org/drawingml/2006/main">
               <a:ext uri="{FF2B5EF4-FFF2-40B4-BE49-F238E27FC236}">
-                <a16:creationId xmlns:a16="http://schemas.microsoft.com/office/drawing/2014/main" id="{757849E5-EE52-4E6C-862A-11F63754B1B9}"/>
+                <a16:creationId xmlns:a16="http://schemas.microsoft.com/office/drawing/2014/main" id="{F39F6FD7-E06D-47F0-B811-DC6C9F21426D}"/>
               </a:ext>
             </a:extLst>
           </p:cNvPr>
@@ -17915,7 +17915,7 @@
           <p:cNvPr id="7" name="Verbeter één ontbrekende stap of verklaring in je eigen antw">
             <a:extLst xmlns:a="http://schemas.openxmlformats.org/drawingml/2006/main">
               <a:ext uri="{FF2B5EF4-FFF2-40B4-BE49-F238E27FC236}">
-                <a16:creationId xmlns:a16="http://schemas.microsoft.com/office/drawing/2014/main" id="{88CB9EEA-1ED9-48EA-A07C-3924E81E6B0E}"/>
+                <a16:creationId xmlns:a16="http://schemas.microsoft.com/office/drawing/2014/main" id="{D8FB7853-7F54-418C-B98E-EC3CB8A0986E}"/>
               </a:ext>
             </a:extLst>
           </p:cNvPr>
@@ -17970,7 +17970,7 @@
     </p:spTree>
     <p:extLst>
       <p:ext uri="{BB962C8B-B14F-4D97-AF65-F5344CB8AC3E}">
-        <p14:creationId xmlns:p14="http://schemas.microsoft.com/office/powerpoint/2010/main" val="1816921801"/>
+        <p14:creationId xmlns:p14="http://schemas.microsoft.com/office/powerpoint/2010/main" val="1459129243"/>
       </p:ext>
     </p:extLst>
   </p:cSld>
@@ -18001,7 +18001,7 @@
           <p:cNvPr id="29" name="Deze les: §2.3.4 Gemengde opgaven">
             <a:extLst xmlns:a="http://schemas.openxmlformats.org/drawingml/2006/main">
               <a:ext uri="{FF2B5EF4-FFF2-40B4-BE49-F238E27FC236}">
-                <a16:creationId xmlns:a16="http://schemas.microsoft.com/office/drawing/2014/main" id="{35626A1C-CE02-4185-B3D2-252BE76D2F9D}"/>
+                <a16:creationId xmlns:a16="http://schemas.microsoft.com/office/drawing/2014/main" id="{D137202F-A384-477E-8540-22BF17FEE576}"/>
               </a:ext>
             </a:extLst>
           </p:cNvPr>
@@ -18058,7 +18058,7 @@
           <p:cNvPr id="2" name="">
             <a:extLst xmlns:a="http://schemas.openxmlformats.org/drawingml/2006/main">
               <a:ext uri="{FF2B5EF4-FFF2-40B4-BE49-F238E27FC236}">
-                <a16:creationId xmlns:a16="http://schemas.microsoft.com/office/drawing/2014/main" id="{5099E949-B10C-4BC4-8FC4-E094EAF4A661}"/>
+                <a16:creationId xmlns:a16="http://schemas.microsoft.com/office/drawing/2014/main" id="{AE1C70E8-3024-4E0A-8C8A-CEBA8FD04283}"/>
               </a:ext>
             </a:extLst>
           </p:cNvPr>
@@ -18087,7 +18087,7 @@
           <p:cNvPr id="3" name="footer">
             <a:extLst xmlns:a="http://schemas.openxmlformats.org/drawingml/2006/main">
               <a:ext uri="{FF2B5EF4-FFF2-40B4-BE49-F238E27FC236}">
-                <a16:creationId xmlns:a16="http://schemas.microsoft.com/office/drawing/2014/main" id="{A3F6C44E-C6F4-42DD-9DE8-FEFC98A1D2E7}"/>
+                <a16:creationId xmlns:a16="http://schemas.microsoft.com/office/drawing/2014/main" id="{16F159CE-EB1B-4A89-920B-22669DC3895B}"/>
               </a:ext>
             </a:extLst>
           </p:cNvPr>
@@ -18144,7 +18144,7 @@
           <p:cNvPr id="4" name="slide-number">
             <a:extLst xmlns:a="http://schemas.openxmlformats.org/drawingml/2006/main">
               <a:ext uri="{FF2B5EF4-FFF2-40B4-BE49-F238E27FC236}">
-                <a16:creationId xmlns:a16="http://schemas.microsoft.com/office/drawing/2014/main" id="{C547693E-E8C7-42EB-BC59-E93498E819B9}"/>
+                <a16:creationId xmlns:a16="http://schemas.microsoft.com/office/drawing/2014/main" id="{D8C30103-939C-4640-A040-CE882A04E543}"/>
               </a:ext>
             </a:extLst>
           </p:cNvPr>
@@ -18201,7 +18201,7 @@
           <p:cNvPr id="5" name="phase">
             <a:extLst xmlns:a="http://schemas.openxmlformats.org/drawingml/2006/main">
               <a:ext uri="{FF2B5EF4-FFF2-40B4-BE49-F238E27FC236}">
-                <a16:creationId xmlns:a16="http://schemas.microsoft.com/office/drawing/2014/main" id="{36313627-9815-4494-9F85-942A28050CE4}"/>
+                <a16:creationId xmlns:a16="http://schemas.microsoft.com/office/drawing/2014/main" id="{B20548BC-4B51-402B-8DD7-EA01616F40FD}"/>
               </a:ext>
             </a:extLst>
           </p:cNvPr>
@@ -18258,7 +18258,7 @@
           <p:cNvPr id="6" name="Lesroute">
             <a:extLst xmlns:a="http://schemas.openxmlformats.org/drawingml/2006/main">
               <a:ext uri="{FF2B5EF4-FFF2-40B4-BE49-F238E27FC236}">
-                <a16:creationId xmlns:a16="http://schemas.microsoft.com/office/drawing/2014/main" id="{C5729E53-FFC9-4807-A5E7-FF0BF6E85B26}"/>
+                <a16:creationId xmlns:a16="http://schemas.microsoft.com/office/drawing/2014/main" id="{09AB153B-2575-4701-9776-536217D50896}"/>
               </a:ext>
             </a:extLst>
           </p:cNvPr>
@@ -18315,7 +18315,7 @@
           <p:cNvPr id="7" name="route-number-1">
             <a:extLst xmlns:a="http://schemas.openxmlformats.org/drawingml/2006/main">
               <a:ext uri="{FF2B5EF4-FFF2-40B4-BE49-F238E27FC236}">
-                <a16:creationId xmlns:a16="http://schemas.microsoft.com/office/drawing/2014/main" id="{CABA049C-D981-4E6E-91A2-56F787CF480B}"/>
+                <a16:creationId xmlns:a16="http://schemas.microsoft.com/office/drawing/2014/main" id="{CDBD0AC6-71C7-4C6B-874B-536FA21007BC}"/>
               </a:ext>
             </a:extLst>
           </p:cNvPr>
@@ -18372,7 +18372,7 @@
           <p:cNvPr id="8" name="route-1">
             <a:extLst xmlns:a="http://schemas.openxmlformats.org/drawingml/2006/main">
               <a:ext uri="{FF2B5EF4-FFF2-40B4-BE49-F238E27FC236}">
-                <a16:creationId xmlns:a16="http://schemas.microsoft.com/office/drawing/2014/main" id="{5CC37BD9-D3CB-4305-8233-728C6D24D65C}"/>
+                <a16:creationId xmlns:a16="http://schemas.microsoft.com/office/drawing/2014/main" id="{08E3F5DC-24AB-4219-89E2-E5212008C793}"/>
               </a:ext>
             </a:extLst>
           </p:cNvPr>
@@ -18429,7 +18429,7 @@
           <p:cNvPr id="9" name="route-number-2">
             <a:extLst xmlns:a="http://schemas.openxmlformats.org/drawingml/2006/main">
               <a:ext uri="{FF2B5EF4-FFF2-40B4-BE49-F238E27FC236}">
-                <a16:creationId xmlns:a16="http://schemas.microsoft.com/office/drawing/2014/main" id="{D79C80C0-6DB0-4A7C-96E7-B4D4DD29BC23}"/>
+                <a16:creationId xmlns:a16="http://schemas.microsoft.com/office/drawing/2014/main" id="{A76FC7D6-185F-49CD-933F-2CD087D33713}"/>
               </a:ext>
             </a:extLst>
           </p:cNvPr>
@@ -18486,7 +18486,7 @@
           <p:cNvPr id="10" name="route-2">
             <a:extLst xmlns:a="http://schemas.openxmlformats.org/drawingml/2006/main">
               <a:ext uri="{FF2B5EF4-FFF2-40B4-BE49-F238E27FC236}">
-                <a16:creationId xmlns:a16="http://schemas.microsoft.com/office/drawing/2014/main" id="{D5B0C560-1902-4D9A-BE88-190905E91FD1}"/>
+                <a16:creationId xmlns:a16="http://schemas.microsoft.com/office/drawing/2014/main" id="{E405674A-DDF6-482F-8FB9-1767859845B7}"/>
               </a:ext>
             </a:extLst>
           </p:cNvPr>
@@ -18543,7 +18543,7 @@
           <p:cNvPr id="11" name="route-number-3">
             <a:extLst xmlns:a="http://schemas.openxmlformats.org/drawingml/2006/main">
               <a:ext uri="{FF2B5EF4-FFF2-40B4-BE49-F238E27FC236}">
-                <a16:creationId xmlns:a16="http://schemas.microsoft.com/office/drawing/2014/main" id="{10801082-9ED0-4FC5-B033-75398409C1FE}"/>
+                <a16:creationId xmlns:a16="http://schemas.microsoft.com/office/drawing/2014/main" id="{FC524621-62F6-48F6-9212-DB5162B7EB35}"/>
               </a:ext>
             </a:extLst>
           </p:cNvPr>
@@ -18600,7 +18600,7 @@
           <p:cNvPr id="12" name="route-3">
             <a:extLst xmlns:a="http://schemas.openxmlformats.org/drawingml/2006/main">
               <a:ext uri="{FF2B5EF4-FFF2-40B4-BE49-F238E27FC236}">
-                <a16:creationId xmlns:a16="http://schemas.microsoft.com/office/drawing/2014/main" id="{FDCCBE08-66C1-43C4-A717-AA7BED10DECB}"/>
+                <a16:creationId xmlns:a16="http://schemas.microsoft.com/office/drawing/2014/main" id="{47B4A18E-FB51-4005-ADC5-F1884B3B95AF}"/>
               </a:ext>
             </a:extLst>
           </p:cNvPr>
@@ -18657,7 +18657,7 @@
           <p:cNvPr id="13" name="route-number-4">
             <a:extLst xmlns:a="http://schemas.openxmlformats.org/drawingml/2006/main">
               <a:ext uri="{FF2B5EF4-FFF2-40B4-BE49-F238E27FC236}">
-                <a16:creationId xmlns:a16="http://schemas.microsoft.com/office/drawing/2014/main" id="{B4B8D687-AE8E-4393-9A03-F6C5360C03A3}"/>
+                <a16:creationId xmlns:a16="http://schemas.microsoft.com/office/drawing/2014/main" id="{D407436A-3A3C-4AC7-AF9C-D1DB1B394A4F}"/>
               </a:ext>
             </a:extLst>
           </p:cNvPr>
@@ -18714,7 +18714,7 @@
           <p:cNvPr id="14" name="route-4">
             <a:extLst xmlns:a="http://schemas.openxmlformats.org/drawingml/2006/main">
               <a:ext uri="{FF2B5EF4-FFF2-40B4-BE49-F238E27FC236}">
-                <a16:creationId xmlns:a16="http://schemas.microsoft.com/office/drawing/2014/main" id="{08B9BD3F-06C0-482B-BF95-C07588F65B46}"/>
+                <a16:creationId xmlns:a16="http://schemas.microsoft.com/office/drawing/2014/main" id="{E57F5CB1-F6EB-40BB-A630-BBCEB7E25EF7}"/>
               </a:ext>
             </a:extLst>
           </p:cNvPr>
@@ -18771,7 +18771,7 @@
           <p:cNvPr id="15" name="route-number-5">
             <a:extLst xmlns:a="http://schemas.openxmlformats.org/drawingml/2006/main">
               <a:ext uri="{FF2B5EF4-FFF2-40B4-BE49-F238E27FC236}">
-                <a16:creationId xmlns:a16="http://schemas.microsoft.com/office/drawing/2014/main" id="{6CCFA66F-C646-47C4-88E6-B87152B5750E}"/>
+                <a16:creationId xmlns:a16="http://schemas.microsoft.com/office/drawing/2014/main" id="{F89CD65C-45B5-4269-8466-2A8FCF79A2B4}"/>
               </a:ext>
             </a:extLst>
           </p:cNvPr>
@@ -18828,7 +18828,7 @@
           <p:cNvPr id="16" name="route-5">
             <a:extLst xmlns:a="http://schemas.openxmlformats.org/drawingml/2006/main">
               <a:ext uri="{FF2B5EF4-FFF2-40B4-BE49-F238E27FC236}">
-                <a16:creationId xmlns:a16="http://schemas.microsoft.com/office/drawing/2014/main" id="{8D1FBFA4-4B5F-402C-AB5B-5406E8F1E896}"/>
+                <a16:creationId xmlns:a16="http://schemas.microsoft.com/office/drawing/2014/main" id="{ADDA359D-7F25-4B13-9C5C-E41FE8571799}"/>
               </a:ext>
             </a:extLst>
           </p:cNvPr>
@@ -18885,7 +18885,7 @@
           <p:cNvPr id="17" name="route-number-6">
             <a:extLst xmlns:a="http://schemas.openxmlformats.org/drawingml/2006/main">
               <a:ext uri="{FF2B5EF4-FFF2-40B4-BE49-F238E27FC236}">
-                <a16:creationId xmlns:a16="http://schemas.microsoft.com/office/drawing/2014/main" id="{80149550-A750-4147-A8F6-0A9F6545A932}"/>
+                <a16:creationId xmlns:a16="http://schemas.microsoft.com/office/drawing/2014/main" id="{39DEC50A-B8AA-464B-9936-73B847CFAD5C}"/>
               </a:ext>
             </a:extLst>
           </p:cNvPr>
@@ -18942,7 +18942,7 @@
           <p:cNvPr id="18" name="route-6">
             <a:extLst xmlns:a="http://schemas.openxmlformats.org/drawingml/2006/main">
               <a:ext uri="{FF2B5EF4-FFF2-40B4-BE49-F238E27FC236}">
-                <a16:creationId xmlns:a16="http://schemas.microsoft.com/office/drawing/2014/main" id="{C328D772-B97A-41FF-9DE7-A9232961940D}"/>
+                <a16:creationId xmlns:a16="http://schemas.microsoft.com/office/drawing/2014/main" id="{93F3FDEE-19D5-4B4A-A6A3-F720161443CB}"/>
               </a:ext>
             </a:extLst>
           </p:cNvPr>
@@ -18999,7 +18999,7 @@
           <p:cNvPr id="19" name="route-number-7">
             <a:extLst xmlns:a="http://schemas.openxmlformats.org/drawingml/2006/main">
               <a:ext uri="{FF2B5EF4-FFF2-40B4-BE49-F238E27FC236}">
-                <a16:creationId xmlns:a16="http://schemas.microsoft.com/office/drawing/2014/main" id="{C0E63495-7CD5-41F1-9352-786E731B06B6}"/>
+                <a16:creationId xmlns:a16="http://schemas.microsoft.com/office/drawing/2014/main" id="{209986FA-6C61-4F18-9515-B6F7238EBA00}"/>
               </a:ext>
             </a:extLst>
           </p:cNvPr>
@@ -19056,7 +19056,7 @@
           <p:cNvPr id="20" name="route-7">
             <a:extLst xmlns:a="http://schemas.openxmlformats.org/drawingml/2006/main">
               <a:ext uri="{FF2B5EF4-FFF2-40B4-BE49-F238E27FC236}">
-                <a16:creationId xmlns:a16="http://schemas.microsoft.com/office/drawing/2014/main" id="{A98F4F9E-D70F-47BD-8B77-F3E7FD1257EB}"/>
+                <a16:creationId xmlns:a16="http://schemas.microsoft.com/office/drawing/2014/main" id="{44E78808-4481-46FD-A57A-5BF050DB32A6}"/>
               </a:ext>
             </a:extLst>
           </p:cNvPr>
@@ -19113,7 +19113,7 @@
           <p:cNvPr id="21" name="Lesdoelen">
             <a:extLst xmlns:a="http://schemas.openxmlformats.org/drawingml/2006/main">
               <a:ext uri="{FF2B5EF4-FFF2-40B4-BE49-F238E27FC236}">
-                <a16:creationId xmlns:a16="http://schemas.microsoft.com/office/drawing/2014/main" id="{27988939-3EFA-42F0-8839-F625132E543C}"/>
+                <a16:creationId xmlns:a16="http://schemas.microsoft.com/office/drawing/2014/main" id="{F0D02F38-D96E-463F-9B7C-78CA24FA919F}"/>
               </a:ext>
             </a:extLst>
           </p:cNvPr>
@@ -19170,7 +19170,7 @@
           <p:cNvPr id="22" name="overview-goals">
             <a:extLst xmlns:a="http://schemas.openxmlformats.org/drawingml/2006/main">
               <a:ext uri="{FF2B5EF4-FFF2-40B4-BE49-F238E27FC236}">
-                <a16:creationId xmlns:a16="http://schemas.microsoft.com/office/drawing/2014/main" id="{DCC003E5-E236-4EA8-8668-B5829D9E5F2A}"/>
+                <a16:creationId xmlns:a16="http://schemas.microsoft.com/office/drawing/2014/main" id="{0F6471F1-90BA-4151-B08E-9DF4BC80DFB1}"/>
               </a:ext>
             </a:extLst>
           </p:cNvPr>
@@ -19273,7 +19273,7 @@
           <p:cNvPr id="23" name="">
             <a:extLst xmlns:a="http://schemas.openxmlformats.org/drawingml/2006/main">
               <a:ext uri="{FF2B5EF4-FFF2-40B4-BE49-F238E27FC236}">
-                <a16:creationId xmlns:a16="http://schemas.microsoft.com/office/drawing/2014/main" id="{10258436-1201-4EFC-8F7E-8CF536667373}"/>
+                <a16:creationId xmlns:a16="http://schemas.microsoft.com/office/drawing/2014/main" id="{B1F31532-4E84-433F-8E25-730784C8B0E4}"/>
               </a:ext>
             </a:extLst>
           </p:cNvPr>
@@ -19302,7 +19302,7 @@
           <p:cNvPr id="24" name="Startopdracht">
             <a:extLst xmlns:a="http://schemas.openxmlformats.org/drawingml/2006/main">
               <a:ext uri="{FF2B5EF4-FFF2-40B4-BE49-F238E27FC236}">
-                <a16:creationId xmlns:a16="http://schemas.microsoft.com/office/drawing/2014/main" id="{0D730DE5-883B-4226-A831-4DCC7A147E23}"/>
+                <a16:creationId xmlns:a16="http://schemas.microsoft.com/office/drawing/2014/main" id="{CCD3ECB1-EE70-4790-9005-E7FBA04373C1}"/>
               </a:ext>
             </a:extLst>
           </p:cNvPr>
@@ -19359,7 +19359,7 @@
           <p:cNvPr id="25" name="overview-start">
             <a:extLst xmlns:a="http://schemas.openxmlformats.org/drawingml/2006/main">
               <a:ext uri="{FF2B5EF4-FFF2-40B4-BE49-F238E27FC236}">
-                <a16:creationId xmlns:a16="http://schemas.microsoft.com/office/drawing/2014/main" id="{106F172E-36FA-4A86-8752-A0BD9884C80B}"/>
+                <a16:creationId xmlns:a16="http://schemas.microsoft.com/office/drawing/2014/main" id="{6368FBBE-A6A2-4788-8780-9EA297229980}"/>
               </a:ext>
             </a:extLst>
           </p:cNvPr>
@@ -19406,7 +19406,7 @@
                 <a:ea typeface="Arial"/>
                 <a:cs typeface="Arial"/>
               </a:rPr>
-              <a:t>Pagina 101 · Opgave 1</a:t>
+              <a:t>Pagina 102 · Opgave 1</a:t>
             </a:r>
           </a:p>
           <a:p xmlns:a="http://schemas.openxmlformats.org/drawingml/2006/main">
@@ -19429,7 +19429,7 @@
                 <a:ea typeface="Arial"/>
                 <a:cs typeface="Arial"/>
               </a:rPr>
-              <a:t>Steun: theorie p. 82–84</a:t>
+              <a:t>Steun: theorie p. 83–85</a:t>
             </a:r>
           </a:p>
         </p:txBody>
@@ -19439,7 +19439,7 @@
           <p:cNvPr id="26" name="">
             <a:extLst xmlns:a="http://schemas.openxmlformats.org/drawingml/2006/main">
               <a:ext uri="{FF2B5EF4-FFF2-40B4-BE49-F238E27FC236}">
-                <a16:creationId xmlns:a16="http://schemas.microsoft.com/office/drawing/2014/main" id="{05BB7AAA-2EFE-4605-833B-A79601F9D776}"/>
+                <a16:creationId xmlns:a16="http://schemas.microsoft.com/office/drawing/2014/main" id="{3FFA092E-322C-426C-A53D-25F05F670E79}"/>
               </a:ext>
             </a:extLst>
           </p:cNvPr>
@@ -19468,7 +19468,7 @@
           <p:cNvPr id="27" name="Huiswerk">
             <a:extLst xmlns:a="http://schemas.openxmlformats.org/drawingml/2006/main">
               <a:ext uri="{FF2B5EF4-FFF2-40B4-BE49-F238E27FC236}">
-                <a16:creationId xmlns:a16="http://schemas.microsoft.com/office/drawing/2014/main" id="{4A77A135-04AF-4E60-AC13-69E79F057304}"/>
+                <a16:creationId xmlns:a16="http://schemas.microsoft.com/office/drawing/2014/main" id="{EFB222B3-8950-438F-B40F-C0BBFB2FE300}"/>
               </a:ext>
             </a:extLst>
           </p:cNvPr>
@@ -19525,7 +19525,7 @@
           <p:cNvPr id="28" name="overview-homework">
             <a:extLst xmlns:a="http://schemas.openxmlformats.org/drawingml/2006/main">
               <a:ext uri="{FF2B5EF4-FFF2-40B4-BE49-F238E27FC236}">
-                <a16:creationId xmlns:a16="http://schemas.microsoft.com/office/drawing/2014/main" id="{A522F169-D48E-4BBD-8E5C-05C98152CDAE}"/>
+                <a16:creationId xmlns:a16="http://schemas.microsoft.com/office/drawing/2014/main" id="{BC515D35-D924-41F2-B1FE-7DDD1EC1D07C}"/>
               </a:ext>
             </a:extLst>
           </p:cNvPr>
@@ -19649,7 +19649,7 @@
     </p:spTree>
     <p:extLst>
       <p:ext uri="{BB962C8B-B14F-4D97-AF65-F5344CB8AC3E}">
-        <p14:creationId xmlns:p14="http://schemas.microsoft.com/office/powerpoint/2010/main" val="1942640616"/>
+        <p14:creationId xmlns:p14="http://schemas.microsoft.com/office/powerpoint/2010/main" val="1436199006"/>
       </p:ext>
     </p:extLst>
   </p:cSld>
@@ -19680,7 +19680,7 @@
           <p:cNvPr id="10" name="Kano’s: het vrije evenwicht">
             <a:extLst xmlns:a="http://schemas.openxmlformats.org/drawingml/2006/main">
               <a:ext uri="{FF2B5EF4-FFF2-40B4-BE49-F238E27FC236}">
-                <a16:creationId xmlns:a16="http://schemas.microsoft.com/office/drawing/2014/main" id="{0BF7AA5D-4254-4FAE-8E0E-462578763546}"/>
+                <a16:creationId xmlns:a16="http://schemas.microsoft.com/office/drawing/2014/main" id="{B1B47213-AF88-4F53-9644-815F49861F0A}"/>
               </a:ext>
             </a:extLst>
           </p:cNvPr>
@@ -19737,7 +19737,7 @@
           <p:cNvPr id="2" name="">
             <a:extLst xmlns:a="http://schemas.openxmlformats.org/drawingml/2006/main">
               <a:ext uri="{FF2B5EF4-FFF2-40B4-BE49-F238E27FC236}">
-                <a16:creationId xmlns:a16="http://schemas.microsoft.com/office/drawing/2014/main" id="{FF1173AE-8586-4DC1-B691-5D2C564BA14B}"/>
+                <a16:creationId xmlns:a16="http://schemas.microsoft.com/office/drawing/2014/main" id="{CA58EDA5-8191-4167-92DE-1366341FA5F6}"/>
               </a:ext>
             </a:extLst>
           </p:cNvPr>
@@ -19766,7 +19766,7 @@
           <p:cNvPr id="3" name="footer">
             <a:extLst xmlns:a="http://schemas.openxmlformats.org/drawingml/2006/main">
               <a:ext uri="{FF2B5EF4-FFF2-40B4-BE49-F238E27FC236}">
-                <a16:creationId xmlns:a16="http://schemas.microsoft.com/office/drawing/2014/main" id="{96B065B4-4970-48BF-9170-125AA2B2CACF}"/>
+                <a16:creationId xmlns:a16="http://schemas.microsoft.com/office/drawing/2014/main" id="{FBBB344A-2CC1-45A8-B9CE-1A6E2B51636C}"/>
               </a:ext>
             </a:extLst>
           </p:cNvPr>
@@ -19823,7 +19823,7 @@
           <p:cNvPr id="4" name="slide-number">
             <a:extLst xmlns:a="http://schemas.openxmlformats.org/drawingml/2006/main">
               <a:ext uri="{FF2B5EF4-FFF2-40B4-BE49-F238E27FC236}">
-                <a16:creationId xmlns:a16="http://schemas.microsoft.com/office/drawing/2014/main" id="{1E211898-F831-494C-88CA-26229D049A56}"/>
+                <a16:creationId xmlns:a16="http://schemas.microsoft.com/office/drawing/2014/main" id="{F512B243-CE2E-4ED5-9165-E3813D0E49D5}"/>
               </a:ext>
             </a:extLst>
           </p:cNvPr>
@@ -19880,7 +19880,7 @@
           <p:cNvPr id="5" name="Vraag: P = 42 − 2Q       Aanbod/MK: P = 6 + Q">
             <a:extLst xmlns:a="http://schemas.openxmlformats.org/drawingml/2006/main">
               <a:ext uri="{FF2B5EF4-FFF2-40B4-BE49-F238E27FC236}">
-                <a16:creationId xmlns:a16="http://schemas.microsoft.com/office/drawing/2014/main" id="{B0FF67A0-EC6D-4878-9F41-BAFE4F3C231A}"/>
+                <a16:creationId xmlns:a16="http://schemas.microsoft.com/office/drawing/2014/main" id="{D95B0541-F041-4F39-97E9-D5F0AE10232D}"/>
               </a:ext>
             </a:extLst>
           </p:cNvPr>
@@ -19937,7 +19937,7 @@
           <p:cNvPr id="6" name="P in € per kanoplaats · Q in kanoplaatsen">
             <a:extLst xmlns:a="http://schemas.openxmlformats.org/drawingml/2006/main">
               <a:ext uri="{FF2B5EF4-FFF2-40B4-BE49-F238E27FC236}">
-                <a16:creationId xmlns:a16="http://schemas.microsoft.com/office/drawing/2014/main" id="{8832D10B-FA65-4D77-B615-8CC39676F791}"/>
+                <a16:creationId xmlns:a16="http://schemas.microsoft.com/office/drawing/2014/main" id="{BE2B7A7F-7D4A-498A-B819-7182D12830C5}"/>
               </a:ext>
             </a:extLst>
           </p:cNvPr>
@@ -19994,7 +19994,7 @@
           <p:cNvPr id="7" name="42 − 2Q = 6 + Q        36 = 3Q">
             <a:extLst xmlns:a="http://schemas.openxmlformats.org/drawingml/2006/main">
               <a:ext uri="{FF2B5EF4-FFF2-40B4-BE49-F238E27FC236}">
-                <a16:creationId xmlns:a16="http://schemas.microsoft.com/office/drawing/2014/main" id="{06E5DFEF-330D-4987-B5A0-EBDA4A384516}"/>
+                <a16:creationId xmlns:a16="http://schemas.microsoft.com/office/drawing/2014/main" id="{DAF773A1-333A-4E80-A399-39AA424A709D}"/>
               </a:ext>
             </a:extLst>
           </p:cNvPr>
@@ -20051,7 +20051,7 @@
           <p:cNvPr id="8" name="Qe = 12 plaatsen          Pe = 42 − 2 × 12 = € 18">
             <a:extLst xmlns:a="http://schemas.openxmlformats.org/drawingml/2006/main">
               <a:ext uri="{FF2B5EF4-FFF2-40B4-BE49-F238E27FC236}">
-                <a16:creationId xmlns:a16="http://schemas.microsoft.com/office/drawing/2014/main" id="{66B25675-4645-40D4-BCCA-C9F7EDD294FE}"/>
+                <a16:creationId xmlns:a16="http://schemas.microsoft.com/office/drawing/2014/main" id="{4FCB0434-91E1-4FDB-B04C-34C3ADD3D21E}"/>
               </a:ext>
             </a:extLst>
           </p:cNvPr>
@@ -20425,7 +20425,7 @@
     </p:spTree>
     <p:extLst>
       <p:ext uri="{BB962C8B-B14F-4D97-AF65-F5344CB8AC3E}">
-        <p14:creationId xmlns:p14="http://schemas.microsoft.com/office/powerpoint/2010/main" val="284636479"/>
+        <p14:creationId xmlns:p14="http://schemas.microsoft.com/office/powerpoint/2010/main" val="347114475"/>
       </p:ext>
     </p:extLst>
   </p:cSld>
@@ -20456,7 +20456,7 @@
           <p:cNvPr id="10" name="Kano’s: acht werkelijke transacties">
             <a:extLst xmlns:a="http://schemas.openxmlformats.org/drawingml/2006/main">
               <a:ext uri="{FF2B5EF4-FFF2-40B4-BE49-F238E27FC236}">
-                <a16:creationId xmlns:a16="http://schemas.microsoft.com/office/drawing/2014/main" id="{F9322C04-8B57-4282-B11E-22DB6262322A}"/>
+                <a16:creationId xmlns:a16="http://schemas.microsoft.com/office/drawing/2014/main" id="{2504E14A-C4E2-4C9C-8C42-DE1527ECF761}"/>
               </a:ext>
             </a:extLst>
           </p:cNvPr>
@@ -20513,7 +20513,7 @@
           <p:cNvPr id="2" name="">
             <a:extLst xmlns:a="http://schemas.openxmlformats.org/drawingml/2006/main">
               <a:ext uri="{FF2B5EF4-FFF2-40B4-BE49-F238E27FC236}">
-                <a16:creationId xmlns:a16="http://schemas.microsoft.com/office/drawing/2014/main" id="{CCB17CDD-D579-439D-B67A-5DA92503804B}"/>
+                <a16:creationId xmlns:a16="http://schemas.microsoft.com/office/drawing/2014/main" id="{238F0C1C-049F-4F00-8485-FF934CA0867D}"/>
               </a:ext>
             </a:extLst>
           </p:cNvPr>
@@ -20542,7 +20542,7 @@
           <p:cNvPr id="3" name="footer">
             <a:extLst xmlns:a="http://schemas.openxmlformats.org/drawingml/2006/main">
               <a:ext uri="{FF2B5EF4-FFF2-40B4-BE49-F238E27FC236}">
-                <a16:creationId xmlns:a16="http://schemas.microsoft.com/office/drawing/2014/main" id="{59923836-AB26-4172-B8C1-1433119C8640}"/>
+                <a16:creationId xmlns:a16="http://schemas.microsoft.com/office/drawing/2014/main" id="{B6926550-5839-4B35-BFAF-ED1EF130B239}"/>
               </a:ext>
             </a:extLst>
           </p:cNvPr>
@@ -20599,7 +20599,7 @@
           <p:cNvPr id="4" name="slide-number">
             <a:extLst xmlns:a="http://schemas.openxmlformats.org/drawingml/2006/main">
               <a:ext uri="{FF2B5EF4-FFF2-40B4-BE49-F238E27FC236}">
-                <a16:creationId xmlns:a16="http://schemas.microsoft.com/office/drawing/2014/main" id="{8130179E-BBD3-4A2A-B83B-99DC333BF295}"/>
+                <a16:creationId xmlns:a16="http://schemas.microsoft.com/office/drawing/2014/main" id="{B0127C7F-9E2E-4517-914B-5371CB933EC4}"/>
               </a:ext>
             </a:extLst>
           </p:cNvPr>
@@ -20656,7 +20656,7 @@
           <p:cNvPr id="5" name="Boekingsgrens: 8 plaatsen tegen € 20 per plaats">
             <a:extLst xmlns:a="http://schemas.openxmlformats.org/drawingml/2006/main">
               <a:ext uri="{FF2B5EF4-FFF2-40B4-BE49-F238E27FC236}">
-                <a16:creationId xmlns:a16="http://schemas.microsoft.com/office/drawing/2014/main" id="{D746FFD8-FCC4-4E6C-BBE1-735056AFFDB9}"/>
+                <a16:creationId xmlns:a16="http://schemas.microsoft.com/office/drawing/2014/main" id="{18C69CA5-FD36-46AB-B521-F750CA4A8F80}"/>
               </a:ext>
             </a:extLst>
           </p:cNvPr>
@@ -20710,10 +20710,10 @@
       </p:sp>
       <p:sp>
         <p:nvSpPr>
-          <p:cNvPr id="6" name="Qd = 11 · Qs = 14 · Hoogste betalingsbereidheid, laagste MK">
-            <a:extLst xmlns:a="http://schemas.openxmlformats.org/drawingml/2006/main">
-              <a:ext uri="{FF2B5EF4-FFF2-40B4-BE49-F238E27FC236}">
-                <a16:creationId xmlns:a16="http://schemas.microsoft.com/office/drawing/2014/main" id="{D12A9102-555B-4FDD-B870-DF503F09B8A6}"/>
+          <p:cNvPr id="6" name="Qv = 11 · Qa = 14 · Hoogste betalingsbereidheid, laagste MK">
+            <a:extLst xmlns:a="http://schemas.openxmlformats.org/drawingml/2006/main">
+              <a:ext uri="{FF2B5EF4-FFF2-40B4-BE49-F238E27FC236}">
+                <a16:creationId xmlns:a16="http://schemas.microsoft.com/office/drawing/2014/main" id="{0699AE7D-439C-4244-B179-217836D03C4A}"/>
               </a:ext>
             </a:extLst>
           </p:cNvPr>
@@ -20760,7 +20760,7 @@
                 <a:ea typeface="Arial"/>
                 <a:cs typeface="Arial"/>
               </a:rPr>
-              <a:t>Qd = 11 · Qs = 14 · Hoogste betalingsbereidheid, laagste MK</a:t>
+              <a:t>Qv = 11 · Qa = 14 · Hoogste betalingsbereidheid, laagste MK</a:t>
             </a:r>
           </a:p>
         </p:txBody>
@@ -20770,7 +20770,7 @@
           <p:cNvPr id="7" name="Bij Q = 8: betalingsbereidheid = € 26, MK = € 14">
             <a:extLst xmlns:a="http://schemas.openxmlformats.org/drawingml/2006/main">
               <a:ext uri="{FF2B5EF4-FFF2-40B4-BE49-F238E27FC236}">
-                <a16:creationId xmlns:a16="http://schemas.microsoft.com/office/drawing/2014/main" id="{EB310F68-29D8-4FDA-92DC-FC5F11B34D6E}"/>
+                <a16:creationId xmlns:a16="http://schemas.microsoft.com/office/drawing/2014/main" id="{739C8613-4669-4AA7-B190-46E721DE9C7A}"/>
               </a:ext>
             </a:extLst>
           </p:cNvPr>
@@ -21145,7 +21145,7 @@
           <p:cNvPr id="9" name="TS = 112 + 80 = € 192">
             <a:extLst xmlns:a="http://schemas.openxmlformats.org/drawingml/2006/main">
               <a:ext uri="{FF2B5EF4-FFF2-40B4-BE49-F238E27FC236}">
-                <a16:creationId xmlns:a16="http://schemas.microsoft.com/office/drawing/2014/main" id="{ACD36F44-8092-4FDA-9B54-D859F4EBC04B}"/>
+                <a16:creationId xmlns:a16="http://schemas.microsoft.com/office/drawing/2014/main" id="{913B4A0F-1E00-4539-B39F-02338794D555}"/>
               </a:ext>
             </a:extLst>
           </p:cNvPr>
@@ -21200,7 +21200,7 @@
     </p:spTree>
     <p:extLst>
       <p:ext uri="{BB962C8B-B14F-4D97-AF65-F5344CB8AC3E}">
-        <p14:creationId xmlns:p14="http://schemas.microsoft.com/office/powerpoint/2010/main" val="1741132383"/>
+        <p14:creationId xmlns:p14="http://schemas.microsoft.com/office/powerpoint/2010/main" val="379411655"/>
       </p:ext>
     </p:extLst>
   </p:cSld>
@@ -21231,7 +21231,7 @@
           <p:cNvPr id="9" name="Kano’s: verlies en een mogelijke verbetering">
             <a:extLst xmlns:a="http://schemas.openxmlformats.org/drawingml/2006/main">
               <a:ext uri="{FF2B5EF4-FFF2-40B4-BE49-F238E27FC236}">
-                <a16:creationId xmlns:a16="http://schemas.microsoft.com/office/drawing/2014/main" id="{4CD0F4F2-CA97-41B9-A753-6E958CFCB909}"/>
+                <a16:creationId xmlns:a16="http://schemas.microsoft.com/office/drawing/2014/main" id="{BCAC79E2-A1BB-48F9-BA5F-55836A074F13}"/>
               </a:ext>
             </a:extLst>
           </p:cNvPr>
@@ -21288,7 +21288,7 @@
           <p:cNvPr id="2" name="">
             <a:extLst xmlns:a="http://schemas.openxmlformats.org/drawingml/2006/main">
               <a:ext uri="{FF2B5EF4-FFF2-40B4-BE49-F238E27FC236}">
-                <a16:creationId xmlns:a16="http://schemas.microsoft.com/office/drawing/2014/main" id="{108D11CC-CDA1-41A7-A7B9-A1EDAE2EEE5F}"/>
+                <a16:creationId xmlns:a16="http://schemas.microsoft.com/office/drawing/2014/main" id="{90E71B5A-2747-418B-8D58-0E00025A3DD8}"/>
               </a:ext>
             </a:extLst>
           </p:cNvPr>
@@ -21317,7 +21317,7 @@
           <p:cNvPr id="3" name="footer">
             <a:extLst xmlns:a="http://schemas.openxmlformats.org/drawingml/2006/main">
               <a:ext uri="{FF2B5EF4-FFF2-40B4-BE49-F238E27FC236}">
-                <a16:creationId xmlns:a16="http://schemas.microsoft.com/office/drawing/2014/main" id="{4C3988E5-A5AF-4361-AD8F-2274350E72F5}"/>
+                <a16:creationId xmlns:a16="http://schemas.microsoft.com/office/drawing/2014/main" id="{8615E03B-80D6-49E8-BC6B-F4E1D57D9805}"/>
               </a:ext>
             </a:extLst>
           </p:cNvPr>
@@ -21374,7 +21374,7 @@
           <p:cNvPr id="4" name="slide-number">
             <a:extLst xmlns:a="http://schemas.openxmlformats.org/drawingml/2006/main">
               <a:ext uri="{FF2B5EF4-FFF2-40B4-BE49-F238E27FC236}">
-                <a16:creationId xmlns:a16="http://schemas.microsoft.com/office/drawing/2014/main" id="{987B6E01-FC9D-4E4E-AA6A-8FBDB4987988}"/>
+                <a16:creationId xmlns:a16="http://schemas.microsoft.com/office/drawing/2014/main" id="{4E12B76D-D11A-475F-A92C-7BF7C3E7B35C}"/>
               </a:ext>
             </a:extLst>
           </p:cNvPr>
@@ -21431,7 +21431,7 @@
           <p:cNvPr id="5" name="Welvaartsverlies = 216 − 192 = € 24">
             <a:extLst xmlns:a="http://schemas.openxmlformats.org/drawingml/2006/main">
               <a:ext uri="{FF2B5EF4-FFF2-40B4-BE49-F238E27FC236}">
-                <a16:creationId xmlns:a16="http://schemas.microsoft.com/office/drawing/2014/main" id="{5FD1AEC4-04EA-4E08-94A8-274A19206D16}"/>
+                <a16:creationId xmlns:a16="http://schemas.microsoft.com/office/drawing/2014/main" id="{34914707-1A7E-4B9F-8F90-CC7725EEE0FD}"/>
               </a:ext>
             </a:extLst>
           </p:cNvPr>
@@ -21488,7 +21488,7 @@
           <p:cNvPr id="6" name="Controle: ½ × (12 − 8) × (26 − 14) = € 24">
             <a:extLst xmlns:a="http://schemas.openxmlformats.org/drawingml/2006/main">
               <a:ext uri="{FF2B5EF4-FFF2-40B4-BE49-F238E27FC236}">
-                <a16:creationId xmlns:a16="http://schemas.microsoft.com/office/drawing/2014/main" id="{E3CCED7F-2BAA-4672-87C9-7309E06C9653}"/>
+                <a16:creationId xmlns:a16="http://schemas.microsoft.com/office/drawing/2014/main" id="{18FB2FF0-D7F3-4A34-8E84-1278568ABD21}"/>
               </a:ext>
             </a:extLst>
           </p:cNvPr>
@@ -21717,7 +21717,7 @@
           <p:cNvPr id="8" name="Verruiming is kosteloos en technisch mogelijk.&#10;Prijs en best">
             <a:extLst xmlns:a="http://schemas.openxmlformats.org/drawingml/2006/main">
               <a:ext uri="{FF2B5EF4-FFF2-40B4-BE49-F238E27FC236}">
-                <a16:creationId xmlns:a16="http://schemas.microsoft.com/office/drawing/2014/main" id="{6B04EDCF-7AEF-49AB-9BAE-EEAD5824F8A7}"/>
+                <a16:creationId xmlns:a16="http://schemas.microsoft.com/office/drawing/2014/main" id="{430A02AD-858F-4C9E-9145-5F79BD29AA6E}"/>
               </a:ext>
             </a:extLst>
           </p:cNvPr>
@@ -21795,7 +21795,7 @@
     </p:spTree>
     <p:extLst>
       <p:ext uri="{BB962C8B-B14F-4D97-AF65-F5344CB8AC3E}">
-        <p14:creationId xmlns:p14="http://schemas.microsoft.com/office/powerpoint/2010/main" val="1919038473"/>
+        <p14:creationId xmlns:p14="http://schemas.microsoft.com/office/powerpoint/2010/main" val="1278409371"/>
       </p:ext>
     </p:extLst>
   </p:cSld>
@@ -21826,7 +21826,7 @@
           <p:cNvPr id="29" name="Deze les: §2.3.4 Gemengde opgaven">
             <a:extLst xmlns:a="http://schemas.openxmlformats.org/drawingml/2006/main">
               <a:ext uri="{FF2B5EF4-FFF2-40B4-BE49-F238E27FC236}">
-                <a16:creationId xmlns:a16="http://schemas.microsoft.com/office/drawing/2014/main" id="{F0ADE2AB-BBB4-4E40-935C-03CD5B8C437A}"/>
+                <a16:creationId xmlns:a16="http://schemas.microsoft.com/office/drawing/2014/main" id="{76EEB0AC-D112-4A46-93DF-12083B04A8C1}"/>
               </a:ext>
             </a:extLst>
           </p:cNvPr>
@@ -21883,7 +21883,7 @@
           <p:cNvPr id="2" name="">
             <a:extLst xmlns:a="http://schemas.openxmlformats.org/drawingml/2006/main">
               <a:ext uri="{FF2B5EF4-FFF2-40B4-BE49-F238E27FC236}">
-                <a16:creationId xmlns:a16="http://schemas.microsoft.com/office/drawing/2014/main" id="{4FB3EC28-2FA8-40FB-AA6D-2A547F9B505C}"/>
+                <a16:creationId xmlns:a16="http://schemas.microsoft.com/office/drawing/2014/main" id="{72C47386-71F9-4B7E-AD2E-6BBACAD41F2C}"/>
               </a:ext>
             </a:extLst>
           </p:cNvPr>
@@ -21912,7 +21912,7 @@
           <p:cNvPr id="3" name="footer">
             <a:extLst xmlns:a="http://schemas.openxmlformats.org/drawingml/2006/main">
               <a:ext uri="{FF2B5EF4-FFF2-40B4-BE49-F238E27FC236}">
-                <a16:creationId xmlns:a16="http://schemas.microsoft.com/office/drawing/2014/main" id="{0869543B-BF76-4E7D-8638-3769AB9471F4}"/>
+                <a16:creationId xmlns:a16="http://schemas.microsoft.com/office/drawing/2014/main" id="{83271A05-4B66-40F4-94A1-759AA348A9BC}"/>
               </a:ext>
             </a:extLst>
           </p:cNvPr>
@@ -21969,7 +21969,7 @@
           <p:cNvPr id="4" name="slide-number">
             <a:extLst xmlns:a="http://schemas.openxmlformats.org/drawingml/2006/main">
               <a:ext uri="{FF2B5EF4-FFF2-40B4-BE49-F238E27FC236}">
-                <a16:creationId xmlns:a16="http://schemas.microsoft.com/office/drawing/2014/main" id="{921754CF-9864-45BC-A8DD-02E2D5E49DFD}"/>
+                <a16:creationId xmlns:a16="http://schemas.microsoft.com/office/drawing/2014/main" id="{5C5F9A62-BDB6-4FBE-94FC-D47609C6B881}"/>
               </a:ext>
             </a:extLst>
           </p:cNvPr>
@@ -22026,7 +22026,7 @@
           <p:cNvPr id="5" name="phase">
             <a:extLst xmlns:a="http://schemas.openxmlformats.org/drawingml/2006/main">
               <a:ext uri="{FF2B5EF4-FFF2-40B4-BE49-F238E27FC236}">
-                <a16:creationId xmlns:a16="http://schemas.microsoft.com/office/drawing/2014/main" id="{4EF25D19-4B37-4EAF-820A-49B4906A6704}"/>
+                <a16:creationId xmlns:a16="http://schemas.microsoft.com/office/drawing/2014/main" id="{20493154-7EBE-4FFE-A990-94E85D85DBEE}"/>
               </a:ext>
             </a:extLst>
           </p:cNvPr>
@@ -22083,7 +22083,7 @@
           <p:cNvPr id="6" name="Lesroute">
             <a:extLst xmlns:a="http://schemas.openxmlformats.org/drawingml/2006/main">
               <a:ext uri="{FF2B5EF4-FFF2-40B4-BE49-F238E27FC236}">
-                <a16:creationId xmlns:a16="http://schemas.microsoft.com/office/drawing/2014/main" id="{53E5F6BD-33BE-4307-998C-DC4590478D1C}"/>
+                <a16:creationId xmlns:a16="http://schemas.microsoft.com/office/drawing/2014/main" id="{16484CF6-8EE9-401A-BB31-2AB0D249C0E0}"/>
               </a:ext>
             </a:extLst>
           </p:cNvPr>
@@ -22140,7 +22140,7 @@
           <p:cNvPr id="7" name="route-number-1">
             <a:extLst xmlns:a="http://schemas.openxmlformats.org/drawingml/2006/main">
               <a:ext uri="{FF2B5EF4-FFF2-40B4-BE49-F238E27FC236}">
-                <a16:creationId xmlns:a16="http://schemas.microsoft.com/office/drawing/2014/main" id="{72563892-EF5C-4C67-8C37-57D5761319C1}"/>
+                <a16:creationId xmlns:a16="http://schemas.microsoft.com/office/drawing/2014/main" id="{A2BBD43E-F842-4DEF-8BE3-89522CFB27AE}"/>
               </a:ext>
             </a:extLst>
           </p:cNvPr>
@@ -22197,7 +22197,7 @@
           <p:cNvPr id="8" name="route-1">
             <a:extLst xmlns:a="http://schemas.openxmlformats.org/drawingml/2006/main">
               <a:ext uri="{FF2B5EF4-FFF2-40B4-BE49-F238E27FC236}">
-                <a16:creationId xmlns:a16="http://schemas.microsoft.com/office/drawing/2014/main" id="{18DC82F9-7FE3-4633-8037-1EC45FD43601}"/>
+                <a16:creationId xmlns:a16="http://schemas.microsoft.com/office/drawing/2014/main" id="{029E87B5-E2D6-4592-831B-799AA856C78A}"/>
               </a:ext>
             </a:extLst>
           </p:cNvPr>
@@ -22254,7 +22254,7 @@
           <p:cNvPr id="9" name="route-number-2">
             <a:extLst xmlns:a="http://schemas.openxmlformats.org/drawingml/2006/main">
               <a:ext uri="{FF2B5EF4-FFF2-40B4-BE49-F238E27FC236}">
-                <a16:creationId xmlns:a16="http://schemas.microsoft.com/office/drawing/2014/main" id="{CCD514AD-6E37-44E6-A48B-0016385DD15B}"/>
+                <a16:creationId xmlns:a16="http://schemas.microsoft.com/office/drawing/2014/main" id="{7B7ACA40-A64B-411C-B4C5-C98B582E09A2}"/>
               </a:ext>
             </a:extLst>
           </p:cNvPr>
@@ -22311,7 +22311,7 @@
           <p:cNvPr id="10" name="route-2">
             <a:extLst xmlns:a="http://schemas.openxmlformats.org/drawingml/2006/main">
               <a:ext uri="{FF2B5EF4-FFF2-40B4-BE49-F238E27FC236}">
-                <a16:creationId xmlns:a16="http://schemas.microsoft.com/office/drawing/2014/main" id="{BE8CA8EC-D404-4E62-B8B9-04ABBF474B42}"/>
+                <a16:creationId xmlns:a16="http://schemas.microsoft.com/office/drawing/2014/main" id="{50B51A51-CA15-4183-B8DE-F84CFB230E31}"/>
               </a:ext>
             </a:extLst>
           </p:cNvPr>
@@ -22368,7 +22368,7 @@
           <p:cNvPr id="11" name="route-number-3">
             <a:extLst xmlns:a="http://schemas.openxmlformats.org/drawingml/2006/main">
               <a:ext uri="{FF2B5EF4-FFF2-40B4-BE49-F238E27FC236}">
-                <a16:creationId xmlns:a16="http://schemas.microsoft.com/office/drawing/2014/main" id="{8AD8D860-0A8E-453F-95D4-1EC8F31CB9FE}"/>
+                <a16:creationId xmlns:a16="http://schemas.microsoft.com/office/drawing/2014/main" id="{DDB1AFFE-D873-4699-9312-A856C2D9E477}"/>
               </a:ext>
             </a:extLst>
           </p:cNvPr>
@@ -22425,7 +22425,7 @@
           <p:cNvPr id="12" name="route-3">
             <a:extLst xmlns:a="http://schemas.openxmlformats.org/drawingml/2006/main">
               <a:ext uri="{FF2B5EF4-FFF2-40B4-BE49-F238E27FC236}">
-                <a16:creationId xmlns:a16="http://schemas.microsoft.com/office/drawing/2014/main" id="{C19D8F10-BCE6-4197-A2FF-DD78C4B4688E}"/>
+                <a16:creationId xmlns:a16="http://schemas.microsoft.com/office/drawing/2014/main" id="{E69FCFC2-AFDE-46C0-BF98-7191DC88689C}"/>
               </a:ext>
             </a:extLst>
           </p:cNvPr>
@@ -22482,7 +22482,7 @@
           <p:cNvPr id="13" name="route-number-4">
             <a:extLst xmlns:a="http://schemas.openxmlformats.org/drawingml/2006/main">
               <a:ext uri="{FF2B5EF4-FFF2-40B4-BE49-F238E27FC236}">
-                <a16:creationId xmlns:a16="http://schemas.microsoft.com/office/drawing/2014/main" id="{80003B23-5BA8-48F0-B2FD-5ECFA12D6E8E}"/>
+                <a16:creationId xmlns:a16="http://schemas.microsoft.com/office/drawing/2014/main" id="{1B01A971-24BB-43A8-AE37-1D54795ABAD3}"/>
               </a:ext>
             </a:extLst>
           </p:cNvPr>
@@ -22539,7 +22539,7 @@
           <p:cNvPr id="14" name="route-4">
             <a:extLst xmlns:a="http://schemas.openxmlformats.org/drawingml/2006/main">
               <a:ext uri="{FF2B5EF4-FFF2-40B4-BE49-F238E27FC236}">
-                <a16:creationId xmlns:a16="http://schemas.microsoft.com/office/drawing/2014/main" id="{0986B7F0-F827-46FF-BB5A-4D549859CA76}"/>
+                <a16:creationId xmlns:a16="http://schemas.microsoft.com/office/drawing/2014/main" id="{F646D9A5-19E0-4A0D-B11C-360DC10F3BBE}"/>
               </a:ext>
             </a:extLst>
           </p:cNvPr>
@@ -22596,7 +22596,7 @@
           <p:cNvPr id="15" name="route-number-5">
             <a:extLst xmlns:a="http://schemas.openxmlformats.org/drawingml/2006/main">
               <a:ext uri="{FF2B5EF4-FFF2-40B4-BE49-F238E27FC236}">
-                <a16:creationId xmlns:a16="http://schemas.microsoft.com/office/drawing/2014/main" id="{3EF5C2D0-78B0-42CD-965E-04DAC8AB6E53}"/>
+                <a16:creationId xmlns:a16="http://schemas.microsoft.com/office/drawing/2014/main" id="{93D3A673-4849-4411-A29B-8A6993CF93B3}"/>
               </a:ext>
             </a:extLst>
           </p:cNvPr>
@@ -22653,7 +22653,7 @@
           <p:cNvPr id="16" name="route-5">
             <a:extLst xmlns:a="http://schemas.openxmlformats.org/drawingml/2006/main">
               <a:ext uri="{FF2B5EF4-FFF2-40B4-BE49-F238E27FC236}">
-                <a16:creationId xmlns:a16="http://schemas.microsoft.com/office/drawing/2014/main" id="{55484295-EE88-420D-9E62-D1565179A61E}"/>
+                <a16:creationId xmlns:a16="http://schemas.microsoft.com/office/drawing/2014/main" id="{2F4A76C9-365D-4029-BC28-FFDB29088254}"/>
               </a:ext>
             </a:extLst>
           </p:cNvPr>
@@ -22710,7 +22710,7 @@
           <p:cNvPr id="17" name="route-number-6">
             <a:extLst xmlns:a="http://schemas.openxmlformats.org/drawingml/2006/main">
               <a:ext uri="{FF2B5EF4-FFF2-40B4-BE49-F238E27FC236}">
-                <a16:creationId xmlns:a16="http://schemas.microsoft.com/office/drawing/2014/main" id="{18A41C50-B21F-4E25-A773-0C2ACF276270}"/>
+                <a16:creationId xmlns:a16="http://schemas.microsoft.com/office/drawing/2014/main" id="{63982C4D-04EB-48F4-930C-A59625F52179}"/>
               </a:ext>
             </a:extLst>
           </p:cNvPr>
@@ -22767,7 +22767,7 @@
           <p:cNvPr id="18" name="route-6">
             <a:extLst xmlns:a="http://schemas.openxmlformats.org/drawingml/2006/main">
               <a:ext uri="{FF2B5EF4-FFF2-40B4-BE49-F238E27FC236}">
-                <a16:creationId xmlns:a16="http://schemas.microsoft.com/office/drawing/2014/main" id="{A5D59869-081C-424F-AD09-6D3360D6831F}"/>
+                <a16:creationId xmlns:a16="http://schemas.microsoft.com/office/drawing/2014/main" id="{16CD0272-1909-4EC3-938D-6A6BF522C93F}"/>
               </a:ext>
             </a:extLst>
           </p:cNvPr>
@@ -22824,7 +22824,7 @@
           <p:cNvPr id="19" name="route-number-7">
             <a:extLst xmlns:a="http://schemas.openxmlformats.org/drawingml/2006/main">
               <a:ext uri="{FF2B5EF4-FFF2-40B4-BE49-F238E27FC236}">
-                <a16:creationId xmlns:a16="http://schemas.microsoft.com/office/drawing/2014/main" id="{8AF4C77B-A374-4595-8697-9029A8ABD6ED}"/>
+                <a16:creationId xmlns:a16="http://schemas.microsoft.com/office/drawing/2014/main" id="{27231D03-6D52-4492-BE23-82B67ACDD433}"/>
               </a:ext>
             </a:extLst>
           </p:cNvPr>
@@ -22881,7 +22881,7 @@
           <p:cNvPr id="20" name="route-7">
             <a:extLst xmlns:a="http://schemas.openxmlformats.org/drawingml/2006/main">
               <a:ext uri="{FF2B5EF4-FFF2-40B4-BE49-F238E27FC236}">
-                <a16:creationId xmlns:a16="http://schemas.microsoft.com/office/drawing/2014/main" id="{C2CDA181-CCE7-4C6D-886D-FB0CCCF802FC}"/>
+                <a16:creationId xmlns:a16="http://schemas.microsoft.com/office/drawing/2014/main" id="{7ED8671A-DF88-43EA-98EA-A59BDC146BAA}"/>
               </a:ext>
             </a:extLst>
           </p:cNvPr>
@@ -22938,7 +22938,7 @@
           <p:cNvPr id="21" name="Lesdoelen">
             <a:extLst xmlns:a="http://schemas.openxmlformats.org/drawingml/2006/main">
               <a:ext uri="{FF2B5EF4-FFF2-40B4-BE49-F238E27FC236}">
-                <a16:creationId xmlns:a16="http://schemas.microsoft.com/office/drawing/2014/main" id="{D7570C90-77EF-486E-BE5A-DF5539FF596D}"/>
+                <a16:creationId xmlns:a16="http://schemas.microsoft.com/office/drawing/2014/main" id="{F73A5E92-E8B2-439D-9C16-5A3668B244FB}"/>
               </a:ext>
             </a:extLst>
           </p:cNvPr>
@@ -22995,7 +22995,7 @@
           <p:cNvPr id="22" name="overview-goals">
             <a:extLst xmlns:a="http://schemas.openxmlformats.org/drawingml/2006/main">
               <a:ext uri="{FF2B5EF4-FFF2-40B4-BE49-F238E27FC236}">
-                <a16:creationId xmlns:a16="http://schemas.microsoft.com/office/drawing/2014/main" id="{8F48A718-790F-433C-A7E0-95726654402F}"/>
+                <a16:creationId xmlns:a16="http://schemas.microsoft.com/office/drawing/2014/main" id="{2E3EE2D3-DE18-47B9-86FF-F64BE6B4E47F}"/>
               </a:ext>
             </a:extLst>
           </p:cNvPr>
@@ -23098,7 +23098,7 @@
           <p:cNvPr id="23" name="">
             <a:extLst xmlns:a="http://schemas.openxmlformats.org/drawingml/2006/main">
               <a:ext uri="{FF2B5EF4-FFF2-40B4-BE49-F238E27FC236}">
-                <a16:creationId xmlns:a16="http://schemas.microsoft.com/office/drawing/2014/main" id="{528B6230-589A-43E0-B17C-4EE475C30705}"/>
+                <a16:creationId xmlns:a16="http://schemas.microsoft.com/office/drawing/2014/main" id="{DC174BA3-299F-4BA4-888F-BB0D4E269E2C}"/>
               </a:ext>
             </a:extLst>
           </p:cNvPr>
@@ -23127,7 +23127,7 @@
           <p:cNvPr id="24" name="Startopdracht">
             <a:extLst xmlns:a="http://schemas.openxmlformats.org/drawingml/2006/main">
               <a:ext uri="{FF2B5EF4-FFF2-40B4-BE49-F238E27FC236}">
-                <a16:creationId xmlns:a16="http://schemas.microsoft.com/office/drawing/2014/main" id="{82041B71-81AD-42BD-8C19-3313C1C5AF33}"/>
+                <a16:creationId xmlns:a16="http://schemas.microsoft.com/office/drawing/2014/main" id="{045ED811-ACCE-4DCB-90A2-7767B18E6FE4}"/>
               </a:ext>
             </a:extLst>
           </p:cNvPr>
@@ -23184,7 +23184,7 @@
           <p:cNvPr id="25" name="overview-start">
             <a:extLst xmlns:a="http://schemas.openxmlformats.org/drawingml/2006/main">
               <a:ext uri="{FF2B5EF4-FFF2-40B4-BE49-F238E27FC236}">
-                <a16:creationId xmlns:a16="http://schemas.microsoft.com/office/drawing/2014/main" id="{3B2DF5B4-F828-49FC-9192-0FDC34585AA0}"/>
+                <a16:creationId xmlns:a16="http://schemas.microsoft.com/office/drawing/2014/main" id="{64C9939D-D065-4139-AD8D-9FB5C9D8948B}"/>
               </a:ext>
             </a:extLst>
           </p:cNvPr>
@@ -23231,7 +23231,7 @@
                 <a:ea typeface="Arial"/>
                 <a:cs typeface="Arial"/>
               </a:rPr>
-              <a:t>Pagina 101 · Opgave 1</a:t>
+              <a:t>Pagina 102 · Opgave 1</a:t>
             </a:r>
           </a:p>
           <a:p xmlns:a="http://schemas.openxmlformats.org/drawingml/2006/main">
@@ -23254,7 +23254,7 @@
                 <a:ea typeface="Arial"/>
                 <a:cs typeface="Arial"/>
               </a:rPr>
-              <a:t>Steun: theorie p. 82–84</a:t>
+              <a:t>Steun: theorie p. 83–85</a:t>
             </a:r>
           </a:p>
         </p:txBody>
@@ -23264,7 +23264,7 @@
           <p:cNvPr id="26" name="">
             <a:extLst xmlns:a="http://schemas.openxmlformats.org/drawingml/2006/main">
               <a:ext uri="{FF2B5EF4-FFF2-40B4-BE49-F238E27FC236}">
-                <a16:creationId xmlns:a16="http://schemas.microsoft.com/office/drawing/2014/main" id="{3A956411-1ACF-4565-836B-532B4D57E95C}"/>
+                <a16:creationId xmlns:a16="http://schemas.microsoft.com/office/drawing/2014/main" id="{6F08C44E-176E-433F-81BC-8FBDCD472304}"/>
               </a:ext>
             </a:extLst>
           </p:cNvPr>
@@ -23293,7 +23293,7 @@
           <p:cNvPr id="27" name="Huiswerk">
             <a:extLst xmlns:a="http://schemas.openxmlformats.org/drawingml/2006/main">
               <a:ext uri="{FF2B5EF4-FFF2-40B4-BE49-F238E27FC236}">
-                <a16:creationId xmlns:a16="http://schemas.microsoft.com/office/drawing/2014/main" id="{35EA02BF-80F6-4E0F-BC76-D5DCA3DE335F}"/>
+                <a16:creationId xmlns:a16="http://schemas.microsoft.com/office/drawing/2014/main" id="{73B2002F-3438-45B4-B26F-60DEBD820725}"/>
               </a:ext>
             </a:extLst>
           </p:cNvPr>
@@ -23350,7 +23350,7 @@
           <p:cNvPr id="28" name="overview-homework">
             <a:extLst xmlns:a="http://schemas.openxmlformats.org/drawingml/2006/main">
               <a:ext uri="{FF2B5EF4-FFF2-40B4-BE49-F238E27FC236}">
-                <a16:creationId xmlns:a16="http://schemas.microsoft.com/office/drawing/2014/main" id="{9D63EF1F-57C6-4187-A99F-8E7C835C84E3}"/>
+                <a16:creationId xmlns:a16="http://schemas.microsoft.com/office/drawing/2014/main" id="{4544EE19-B202-485A-AE51-D33E7DE95313}"/>
               </a:ext>
             </a:extLst>
           </p:cNvPr>
@@ -23474,7 +23474,7 @@
     </p:spTree>
     <p:extLst>
       <p:ext uri="{BB962C8B-B14F-4D97-AF65-F5344CB8AC3E}">
-        <p14:creationId xmlns:p14="http://schemas.microsoft.com/office/powerpoint/2010/main" val="1297024433"/>
+        <p14:creationId xmlns:p14="http://schemas.microsoft.com/office/powerpoint/2010/main" val="2015780676"/>
       </p:ext>
     </p:extLst>
   </p:cSld>
@@ -23505,7 +23505,7 @@
           <p:cNvPr id="10" name="Opgave 3 · Huurfietsen op een eiland">
             <a:extLst xmlns:a="http://schemas.openxmlformats.org/drawingml/2006/main">
               <a:ext uri="{FF2B5EF4-FFF2-40B4-BE49-F238E27FC236}">
-                <a16:creationId xmlns:a16="http://schemas.microsoft.com/office/drawing/2014/main" id="{0D2F1B95-6CE0-4CA2-A6A4-0C7201126862}"/>
+                <a16:creationId xmlns:a16="http://schemas.microsoft.com/office/drawing/2014/main" id="{5942C271-9020-4CCF-AD9C-394ED009B524}"/>
               </a:ext>
             </a:extLst>
           </p:cNvPr>
@@ -23562,7 +23562,7 @@
           <p:cNvPr id="2" name="">
             <a:extLst xmlns:a="http://schemas.openxmlformats.org/drawingml/2006/main">
               <a:ext uri="{FF2B5EF4-FFF2-40B4-BE49-F238E27FC236}">
-                <a16:creationId xmlns:a16="http://schemas.microsoft.com/office/drawing/2014/main" id="{3FFBAC40-EC34-49AE-BB2E-AB001B6E8218}"/>
+                <a16:creationId xmlns:a16="http://schemas.microsoft.com/office/drawing/2014/main" id="{89D551F6-FEA4-47E6-A5AF-61E62D404E2A}"/>
               </a:ext>
             </a:extLst>
           </p:cNvPr>
@@ -23591,7 +23591,7 @@
           <p:cNvPr id="3" name="footer">
             <a:extLst xmlns:a="http://schemas.openxmlformats.org/drawingml/2006/main">
               <a:ext uri="{FF2B5EF4-FFF2-40B4-BE49-F238E27FC236}">
-                <a16:creationId xmlns:a16="http://schemas.microsoft.com/office/drawing/2014/main" id="{29AACD83-9636-4C53-A36D-63347D18DF75}"/>
+                <a16:creationId xmlns:a16="http://schemas.microsoft.com/office/drawing/2014/main" id="{9DDDD68F-9547-43D5-A5E9-35B5953A18F0}"/>
               </a:ext>
             </a:extLst>
           </p:cNvPr>
@@ -23638,7 +23638,7 @@
                 <a:ea typeface="Arial"/>
                 <a:cs typeface="Arial"/>
               </a:rPr>
-              <a:t>§2.3.4 Gemengde opgaven · Opgave 3 · Boekpagina 104–105</a:t>
+              <a:t>§2.3.4 Gemengde opgaven · Opgave 3 · Boekpagina 105–106</a:t>
             </a:r>
           </a:p>
         </p:txBody>
@@ -23648,7 +23648,7 @@
           <p:cNvPr id="4" name="slide-number">
             <a:extLst xmlns:a="http://schemas.openxmlformats.org/drawingml/2006/main">
               <a:ext uri="{FF2B5EF4-FFF2-40B4-BE49-F238E27FC236}">
-                <a16:creationId xmlns:a16="http://schemas.microsoft.com/office/drawing/2014/main" id="{0C2727ED-E915-4150-8341-0EC613D4BFEE}"/>
+                <a16:creationId xmlns:a16="http://schemas.microsoft.com/office/drawing/2014/main" id="{1667C1FE-DE36-4F0E-A731-A9000D3F0AB6}"/>
               </a:ext>
             </a:extLst>
           </p:cNvPr>
@@ -23705,7 +23705,7 @@
           <p:cNvPr id="5" name="Op een eiland worden huurfietsen verhandeld.">
             <a:extLst xmlns:a="http://schemas.openxmlformats.org/drawingml/2006/main">
               <a:ext uri="{FF2B5EF4-FFF2-40B4-BE49-F238E27FC236}">
-                <a16:creationId xmlns:a16="http://schemas.microsoft.com/office/drawing/2014/main" id="{CCBB91B0-488E-45AE-8E5E-74831416AAA2}"/>
+                <a16:creationId xmlns:a16="http://schemas.microsoft.com/office/drawing/2014/main" id="{5F32EB1D-8E78-47E6-B79D-6DD1C5A47685}"/>
               </a:ext>
             </a:extLst>
           </p:cNvPr>
@@ -23762,7 +23762,7 @@
           <p:cNvPr id="6" name="Vraag: P = 80 − Q">
             <a:extLst xmlns:a="http://schemas.openxmlformats.org/drawingml/2006/main">
               <a:ext uri="{FF2B5EF4-FFF2-40B4-BE49-F238E27FC236}">
-                <a16:creationId xmlns:a16="http://schemas.microsoft.com/office/drawing/2014/main" id="{A5D9D3C5-992A-4AFD-8C1E-66506F50A721}"/>
+                <a16:creationId xmlns:a16="http://schemas.microsoft.com/office/drawing/2014/main" id="{3F464C23-146D-459E-8600-A1532D1DD2B2}"/>
               </a:ext>
             </a:extLst>
           </p:cNvPr>
@@ -23819,7 +23819,7 @@
           <p:cNvPr id="7" name="Aanbod: P = 20 + 0,5Q">
             <a:extLst xmlns:a="http://schemas.openxmlformats.org/drawingml/2006/main">
               <a:ext uri="{FF2B5EF4-FFF2-40B4-BE49-F238E27FC236}">
-                <a16:creationId xmlns:a16="http://schemas.microsoft.com/office/drawing/2014/main" id="{8286AAD5-EB0C-4CDC-B673-5BBEB6D8828D}"/>
+                <a16:creationId xmlns:a16="http://schemas.microsoft.com/office/drawing/2014/main" id="{95DBFC6F-7E3B-4981-B724-F51006B06A5B}"/>
               </a:ext>
             </a:extLst>
           </p:cNvPr>
@@ -23876,7 +23876,7 @@
           <p:cNvPr id="8" name="P in euro per huurfiets · Q in huurfietsen&#10;Binnen deze opgav">
             <a:extLst xmlns:a="http://schemas.openxmlformats.org/drawingml/2006/main">
               <a:ext uri="{FF2B5EF4-FFF2-40B4-BE49-F238E27FC236}">
-                <a16:creationId xmlns:a16="http://schemas.microsoft.com/office/drawing/2014/main" id="{D2C9640B-C61B-415C-9C6C-990BB82C9A26}"/>
+                <a16:creationId xmlns:a16="http://schemas.microsoft.com/office/drawing/2014/main" id="{0681396A-0876-4491-8505-3B9A1B610FCA}"/>
               </a:ext>
             </a:extLst>
           </p:cNvPr>
@@ -23956,7 +23956,7 @@
           <p:cNvPr id="9" name="Zonder beperking ontstaat een marktevenwicht.&#10;Een bron verme">
             <a:extLst xmlns:a="http://schemas.openxmlformats.org/drawingml/2006/main">
               <a:ext uri="{FF2B5EF4-FFF2-40B4-BE49-F238E27FC236}">
-                <a16:creationId xmlns:a16="http://schemas.microsoft.com/office/drawing/2014/main" id="{AF40C0B0-D19B-42EE-904E-6A235DBDE289}"/>
+                <a16:creationId xmlns:a16="http://schemas.microsoft.com/office/drawing/2014/main" id="{660A9540-65E8-4C50-A9AC-D3B93BBD35D7}"/>
               </a:ext>
             </a:extLst>
           </p:cNvPr>
@@ -24057,7 +24057,7 @@
     </p:spTree>
     <p:extLst>
       <p:ext uri="{BB962C8B-B14F-4D97-AF65-F5344CB8AC3E}">
-        <p14:creationId xmlns:p14="http://schemas.microsoft.com/office/powerpoint/2010/main" val="1299538148"/>
+        <p14:creationId xmlns:p14="http://schemas.microsoft.com/office/powerpoint/2010/main" val="1971109761"/>
       </p:ext>
     </p:extLst>
   </p:cSld>
@@ -24088,7 +24088,7 @@
           <p:cNvPr id="8" name="Opgave 3 · De boekingsregel">
             <a:extLst xmlns:a="http://schemas.openxmlformats.org/drawingml/2006/main">
               <a:ext uri="{FF2B5EF4-FFF2-40B4-BE49-F238E27FC236}">
-                <a16:creationId xmlns:a16="http://schemas.microsoft.com/office/drawing/2014/main" id="{F2181DD3-6FC2-4629-90E1-77A6EF2666AC}"/>
+                <a16:creationId xmlns:a16="http://schemas.microsoft.com/office/drawing/2014/main" id="{86F70923-7014-4290-8F87-2EAFEE747A0F}"/>
               </a:ext>
             </a:extLst>
           </p:cNvPr>
@@ -24145,7 +24145,7 @@
           <p:cNvPr id="2" name="">
             <a:extLst xmlns:a="http://schemas.openxmlformats.org/drawingml/2006/main">
               <a:ext uri="{FF2B5EF4-FFF2-40B4-BE49-F238E27FC236}">
-                <a16:creationId xmlns:a16="http://schemas.microsoft.com/office/drawing/2014/main" id="{3C8E8D2F-4F16-4DA2-98B3-B7D73D15FEFA}"/>
+                <a16:creationId xmlns:a16="http://schemas.microsoft.com/office/drawing/2014/main" id="{5BC9EBCE-D92E-4E69-96CE-8EDD8B688DC9}"/>
               </a:ext>
             </a:extLst>
           </p:cNvPr>
@@ -24174,7 +24174,7 @@
           <p:cNvPr id="3" name="footer">
             <a:extLst xmlns:a="http://schemas.openxmlformats.org/drawingml/2006/main">
               <a:ext uri="{FF2B5EF4-FFF2-40B4-BE49-F238E27FC236}">
-                <a16:creationId xmlns:a16="http://schemas.microsoft.com/office/drawing/2014/main" id="{1E014080-A62D-4B1D-9BDD-CD034E08F63B}"/>
+                <a16:creationId xmlns:a16="http://schemas.microsoft.com/office/drawing/2014/main" id="{0B299F4A-02A1-4372-A067-228D58CCC3A9}"/>
               </a:ext>
             </a:extLst>
           </p:cNvPr>
@@ -24221,7 +24221,7 @@
                 <a:ea typeface="Arial"/>
                 <a:cs typeface="Arial"/>
               </a:rPr>
-              <a:t>§2.3.4 Gemengde opgaven · Opgave 3 · Boekpagina 104–105</a:t>
+              <a:t>§2.3.4 Gemengde opgaven · Opgave 3 · Boekpagina 105–106</a:t>
             </a:r>
           </a:p>
         </p:txBody>
@@ -24231,7 +24231,7 @@
           <p:cNvPr id="4" name="slide-number">
             <a:extLst xmlns:a="http://schemas.openxmlformats.org/drawingml/2006/main">
               <a:ext uri="{FF2B5EF4-FFF2-40B4-BE49-F238E27FC236}">
-                <a16:creationId xmlns:a16="http://schemas.microsoft.com/office/drawing/2014/main" id="{963F9114-296F-4A4A-B1B8-60831DA24F2A}"/>
+                <a16:creationId xmlns:a16="http://schemas.microsoft.com/office/drawing/2014/main" id="{EB000FB9-D7E3-4848-9F85-B5327F898D55}"/>
               </a:ext>
             </a:extLst>
           </p:cNvPr>
@@ -24560,7 +24560,7 @@
           <p:cNvPr id="6" name="De 30 fietsen gaan naar de huurders met de hoogste betalings">
             <a:extLst xmlns:a="http://schemas.openxmlformats.org/drawingml/2006/main">
               <a:ext uri="{FF2B5EF4-FFF2-40B4-BE49-F238E27FC236}">
-                <a16:creationId xmlns:a16="http://schemas.microsoft.com/office/drawing/2014/main" id="{54A1162C-25CD-40F9-BE1A-0FD7F41BC8F8}"/>
+                <a16:creationId xmlns:a16="http://schemas.microsoft.com/office/drawing/2014/main" id="{432FDFDC-F065-4422-824B-1874DBB92D6E}"/>
               </a:ext>
             </a:extLst>
           </p:cNvPr>
@@ -24617,7 +24617,7 @@
           <p:cNvPr id="7" name="Bij verruiming blijven prijs en bestaande transacties ongewi">
             <a:extLst xmlns:a="http://schemas.openxmlformats.org/drawingml/2006/main">
               <a:ext uri="{FF2B5EF4-FFF2-40B4-BE49-F238E27FC236}">
-                <a16:creationId xmlns:a16="http://schemas.microsoft.com/office/drawing/2014/main" id="{768205AA-B361-4DA4-80AD-3402AAEA0775}"/>
+                <a16:creationId xmlns:a16="http://schemas.microsoft.com/office/drawing/2014/main" id="{7D095544-2316-4147-8CB8-27BFBBDBD3B3}"/>
               </a:ext>
             </a:extLst>
           </p:cNvPr>
@@ -24672,7 +24672,7 @@
     </p:spTree>
     <p:extLst>
       <p:ext uri="{BB962C8B-B14F-4D97-AF65-F5344CB8AC3E}">
-        <p14:creationId xmlns:p14="http://schemas.microsoft.com/office/powerpoint/2010/main" val="623409225"/>
+        <p14:creationId xmlns:p14="http://schemas.microsoft.com/office/powerpoint/2010/main" val="965769321"/>
       </p:ext>
     </p:extLst>
   </p:cSld>
@@ -24703,7 +24703,7 @@
           <p:cNvPr id="11" name="Opgave 3 · Basisgrafiek">
             <a:extLst xmlns:a="http://schemas.openxmlformats.org/drawingml/2006/main">
               <a:ext uri="{FF2B5EF4-FFF2-40B4-BE49-F238E27FC236}">
-                <a16:creationId xmlns:a16="http://schemas.microsoft.com/office/drawing/2014/main" id="{16E437F5-9726-4674-A2DD-299C5EF9CAD4}"/>
+                <a16:creationId xmlns:a16="http://schemas.microsoft.com/office/drawing/2014/main" id="{59B714F7-DD7F-4F70-9627-91D9EED16A6F}"/>
               </a:ext>
             </a:extLst>
           </p:cNvPr>
@@ -24760,7 +24760,7 @@
           <p:cNvPr id="2" name="">
             <a:extLst xmlns:a="http://schemas.openxmlformats.org/drawingml/2006/main">
               <a:ext uri="{FF2B5EF4-FFF2-40B4-BE49-F238E27FC236}">
-                <a16:creationId xmlns:a16="http://schemas.microsoft.com/office/drawing/2014/main" id="{D36C593D-0A6E-4806-BEC9-5F034A37FF83}"/>
+                <a16:creationId xmlns:a16="http://schemas.microsoft.com/office/drawing/2014/main" id="{035F25AA-3A0B-4DD2-89B8-2AD9441E4C39}"/>
               </a:ext>
             </a:extLst>
           </p:cNvPr>
@@ -24789,7 +24789,7 @@
           <p:cNvPr id="3" name="footer">
             <a:extLst xmlns:a="http://schemas.openxmlformats.org/drawingml/2006/main">
               <a:ext uri="{FF2B5EF4-FFF2-40B4-BE49-F238E27FC236}">
-                <a16:creationId xmlns:a16="http://schemas.microsoft.com/office/drawing/2014/main" id="{464FE678-98FF-46BF-9DC2-D04863A9C4A9}"/>
+                <a16:creationId xmlns:a16="http://schemas.microsoft.com/office/drawing/2014/main" id="{37B4FCA2-E91C-433D-A4F9-172F3A034F8C}"/>
               </a:ext>
             </a:extLst>
           </p:cNvPr>
@@ -24836,7 +24836,7 @@
                 <a:ea typeface="Arial"/>
                 <a:cs typeface="Arial"/>
               </a:rPr>
-              <a:t>§2.3.4 Gemengde opgaven · Opgave 3 · Boekpagina 104–105</a:t>
+              <a:t>§2.3.4 Gemengde opgaven · Opgave 3 · Boekpagina 105–106</a:t>
             </a:r>
           </a:p>
         </p:txBody>
@@ -24846,7 +24846,7 @@
           <p:cNvPr id="4" name="slide-number">
             <a:extLst xmlns:a="http://schemas.openxmlformats.org/drawingml/2006/main">
               <a:ext uri="{FF2B5EF4-FFF2-40B4-BE49-F238E27FC236}">
-                <a16:creationId xmlns:a16="http://schemas.microsoft.com/office/drawing/2014/main" id="{2BFDB04D-9006-453A-A6C5-A06BE2611CAC}"/>
+                <a16:creationId xmlns:a16="http://schemas.microsoft.com/office/drawing/2014/main" id="{F0BB3084-50AD-46A2-AA1A-BB7BD75F1FE5}"/>
               </a:ext>
             </a:extLst>
           </p:cNvPr>
@@ -24910,7 +24910,7 @@
         </p:xfrm>
         <a:graphic xmlns:a="http://schemas.openxmlformats.org/drawingml/2006/main">
           <a:graphicData uri="http://schemas.openxmlformats.org/drawingml/2006/chart">
-            <c:chart xmlns:r="http://schemas.openxmlformats.org/officeDocument/2006/relationships" xmlns:c="http://schemas.openxmlformats.org/drawingml/2006/chart" r:id="Rd7e67a04f0564fd8"/>
+            <c:chart xmlns:r="http://schemas.openxmlformats.org/officeDocument/2006/relationships" xmlns:c="http://schemas.openxmlformats.org/drawingml/2006/chart" r:id="R6f40459353344c3d"/>
           </a:graphicData>
         </a:graphic>
       </p:graphicFrame>
@@ -24919,7 +24919,7 @@
           <p:cNvPr id="6" name="V">
             <a:extLst xmlns:a="http://schemas.openxmlformats.org/drawingml/2006/main">
               <a:ext uri="{FF2B5EF4-FFF2-40B4-BE49-F238E27FC236}">
-                <a16:creationId xmlns:a16="http://schemas.microsoft.com/office/drawing/2014/main" id="{3A9139F0-8EF2-408B-99E2-B87AEFE7E0A2}"/>
+                <a16:creationId xmlns:a16="http://schemas.microsoft.com/office/drawing/2014/main" id="{3E9EEBC0-E7D2-4EAC-9AF8-83B801B9D726}"/>
               </a:ext>
             </a:extLst>
           </p:cNvPr>
@@ -24976,7 +24976,7 @@
           <p:cNvPr id="7" name="A = MK">
             <a:extLst xmlns:a="http://schemas.openxmlformats.org/drawingml/2006/main">
               <a:ext uri="{FF2B5EF4-FFF2-40B4-BE49-F238E27FC236}">
-                <a16:creationId xmlns:a16="http://schemas.microsoft.com/office/drawing/2014/main" id="{5A903A92-E776-472C-93D5-F5423480A482}"/>
+                <a16:creationId xmlns:a16="http://schemas.microsoft.com/office/drawing/2014/main" id="{08A5F818-3EAF-4E95-95E6-1F8EF02DFE9C}"/>
               </a:ext>
             </a:extLst>
           </p:cNvPr>
@@ -25033,7 +25033,7 @@
           <p:cNvPr id="8" name="Gegeven lijnen">
             <a:extLst xmlns:a="http://schemas.openxmlformats.org/drawingml/2006/main">
               <a:ext uri="{FF2B5EF4-FFF2-40B4-BE49-F238E27FC236}">
-                <a16:creationId xmlns:a16="http://schemas.microsoft.com/office/drawing/2014/main" id="{49ABAD5F-D18B-411C-AC80-DF6AFEAF7B7E}"/>
+                <a16:creationId xmlns:a16="http://schemas.microsoft.com/office/drawing/2014/main" id="{FC2AF559-D4F8-4B28-AB4E-49BB8FD31037}"/>
               </a:ext>
             </a:extLst>
           </p:cNvPr>
@@ -25090,7 +25090,7 @@
           <p:cNvPr id="9" name="V: P = 80 − Q&#10;&#10;A = MK:&#10;P = 20 + 0,5Q">
             <a:extLst xmlns:a="http://schemas.openxmlformats.org/drawingml/2006/main">
               <a:ext uri="{FF2B5EF4-FFF2-40B4-BE49-F238E27FC236}">
-                <a16:creationId xmlns:a16="http://schemas.microsoft.com/office/drawing/2014/main" id="{6B37CE84-4FFB-4326-A284-E4D23AF809FD}"/>
+                <a16:creationId xmlns:a16="http://schemas.microsoft.com/office/drawing/2014/main" id="{D47E8312-B736-4052-BE29-524BA1F4E5B5}"/>
               </a:ext>
             </a:extLst>
           </p:cNvPr>
@@ -25198,7 +25198,7 @@
           <p:cNvPr id="10" name="De markeringen&#10;komen later.">
             <a:extLst xmlns:a="http://schemas.openxmlformats.org/drawingml/2006/main">
               <a:ext uri="{FF2B5EF4-FFF2-40B4-BE49-F238E27FC236}">
-                <a16:creationId xmlns:a16="http://schemas.microsoft.com/office/drawing/2014/main" id="{258A1A17-9EA5-4D49-81A9-1AF24DF3EB8B}"/>
+                <a16:creationId xmlns:a16="http://schemas.microsoft.com/office/drawing/2014/main" id="{2EC655DA-C319-4E88-8899-EC7F7767845B}"/>
               </a:ext>
             </a:extLst>
           </p:cNvPr>
@@ -25276,7 +25276,7 @@
     </p:spTree>
     <p:extLst>
       <p:ext uri="{BB962C8B-B14F-4D97-AF65-F5344CB8AC3E}">
-        <p14:creationId xmlns:p14="http://schemas.microsoft.com/office/powerpoint/2010/main" val="1691456024"/>
+        <p14:creationId xmlns:p14="http://schemas.microsoft.com/office/powerpoint/2010/main" val="1091089435"/>
       </p:ext>
     </p:extLst>
   </p:cSld>
